--- a/slides/HROC_Weekly_Update.pptx
+++ b/slides/HROC_Weekly_Update.pptx
@@ -13,9 +13,10 @@
     <p:sldId id="261" r:id="rId7"/>
     <p:sldId id="262" r:id="rId8"/>
     <p:sldId id="263" r:id="rId9"/>
+    <p:sldId id="264" r:id="rId10"/>
   </p:sldIdLst>
   <p:notesMasterIdLst>
-    <p:notesMasterId r:id="rId10"/>
+    <p:notesMasterId r:id="rId11"/>
   </p:notesMasterIdLst>
   <p:sldSz cx="12192000" cy="6858000"/>
   <p:notesSz cx="6858000" cy="12192000"/>
@@ -1125,7 +1126,7 @@
           <a:p>
             <a:r>
               <a:rPr lang="en-US" dirty="0"/>
-              <a:t>Plan between now and the 21st. Download and process the remaining animals — the five down ones plus the two failed up animals, which are useful as negative controls. That takes us from five to about twelve. Re-run everything at that larger n, which is what powers the scaling correlation. Build the presentation for your group. And preview it with you beforehand. One question for you: given the up group is capped at two, is the scaling analysis the right thing to build the paper around rather than the direction contrast?</a:t>
+              <a:t>One more thing from this week. We put everything behind a single page so it stays in sync and is easy to hand to anyone — the repository with the whole pipeline, a six-page write-up formatted as a handout with the real numbers and figures, and the slide decks. Two blanks I deliberately left: Theresa's surname, and what Tarun and I should be listed as on the write-up. I didn't want to guess at either.</a:t>
             </a:r>
             <a:endParaRPr lang="en-US" dirty="0"/>
           </a:p>
@@ -1149,6 +1150,94 @@
             <a:fld id="{F7021451-1387-4CA6-816F-3879F97B5CBC}" type="slidenum">
               <a:rPr lang="en-US"/>
               <a:t>8</a:t>
+            </a:fld>
+            <a:endParaRPr lang="en-US"/>
+          </a:p>
+        </p:txBody>
+      </p:sp>
+    </p:spTree>
+    <p:extLst>
+      <p:ext uri="{BB962C8B-B14F-4D97-AF65-F5344CB8AC3E}">
+        <p14:creationId xmlns:p14="http://schemas.microsoft.com/office/powerpoint/2010/main" val="1024086991"/>
+      </p:ext>
+    </p:extLst>
+  </p:cSld>
+  <p:clrMapOvr>
+    <a:masterClrMapping/>
+  </p:clrMapOvr>
+</p:notes>
+</file>
+
+<file path=ppt/notesSlides/notesSlide9.xml><?xml version="1.0" encoding="utf-8"?>
+<p:notes xmlns:a="http://schemas.openxmlformats.org/drawingml/2006/main" xmlns:r="http://schemas.openxmlformats.org/officeDocument/2006/relationships" xmlns:p="http://schemas.openxmlformats.org/presentationml/2006/main">
+  <p:cSld>
+    <p:spTree>
+      <p:nvGrpSpPr>
+        <p:cNvPr id="1" name=""/>
+        <p:cNvGrpSpPr/>
+        <p:nvPr/>
+      </p:nvGrpSpPr>
+      <p:grpSpPr>
+        <a:xfrm>
+          <a:off x="0" y="0"/>
+          <a:ext cx="0" cy="0"/>
+          <a:chOff x="0" y="0"/>
+          <a:chExt cx="0" cy="0"/>
+        </a:xfrm>
+      </p:grpSpPr>
+      <p:sp>
+        <p:nvSpPr>
+          <p:cNvPr id="2" name="Slide Image Placeholder 1"/>
+          <p:cNvSpPr>
+            <a:spLocks noGrp="1" noRot="1" noChangeAspect="1"/>
+          </p:cNvSpPr>
+          <p:nvPr>
+            <p:ph type="sldImg"/>
+          </p:nvPr>
+        </p:nvSpPr>
+        <p:spPr/>
+      </p:sp>
+      <p:sp>
+        <p:nvSpPr>
+          <p:cNvPr id="3" name="Notes Placeholder 2"/>
+          <p:cNvSpPr>
+            <a:spLocks noGrp="1"/>
+          </p:cNvSpPr>
+          <p:nvPr>
+            <p:ph type="body" idx="1"/>
+          </p:nvPr>
+        </p:nvSpPr>
+        <p:spPr/>
+        <p:txBody>
+          <a:bodyPr/>
+          <a:lstStyle/>
+          <a:p>
+            <a:r>
+              <a:rPr lang="en-US" dirty="0"/>
+              <a:t>Plan between now and the 21st. Download and process the remaining animals — the five down ones plus the two failed up animals, which are useful as negative controls. That takes us from five to about twelve. Re-run everything at that larger n, which is what powers the scaling correlation. Build the presentation for your group. And preview it with you beforehand. One question for you: given the up group is capped at two, is the scaling analysis the right thing to build the paper around rather than the direction contrast?</a:t>
+            </a:r>
+            <a:endParaRPr lang="en-US" dirty="0"/>
+          </a:p>
+        </p:txBody>
+      </p:sp>
+      <p:sp>
+        <p:nvSpPr>
+          <p:cNvPr id="4" name="Slide Number Placeholder 3"/>
+          <p:cNvSpPr>
+            <a:spLocks noGrp="1"/>
+          </p:cNvSpPr>
+          <p:nvPr>
+            <p:ph type="sldNum" sz="quarter" idx="10"/>
+          </p:nvPr>
+        </p:nvSpPr>
+        <p:spPr/>
+        <p:txBody>
+          <a:bodyPr/>
+          <a:lstStyle/>
+          <a:p>
+            <a:fld id="{F7021451-1387-4CA6-816F-3879F97B5CBC}" type="slidenum">
+              <a:rPr lang="en-US"/>
+              <a:t>9</a:t>
             </a:fld>
             <a:endParaRPr lang="en-US"/>
           </a:p>
@@ -6380,6 +6469,821 @@
             <a:r>
               <a:rPr lang="en-US" sz="1200" b="1" spc="300" kern="0" dirty="0">
                 <a:solidFill>
+                  <a:srgbClr val="6D28D9"/>
+                </a:solidFill>
+                <a:latin typeface="Calibri" pitchFamily="34" charset="0"/>
+                <a:ea typeface="Calibri" pitchFamily="34" charset="-122"/>
+                <a:cs typeface="Calibri" pitchFamily="34" charset="-120"/>
+              </a:rPr>
+              <a:t>NEW THIS WEEK · DELIVERABLES</a:t>
+            </a:r>
+            <a:endParaRPr lang="en-US" sz="1200" dirty="0"/>
+          </a:p>
+        </p:txBody>
+      </p:sp>
+      <p:sp>
+        <p:nvSpPr>
+          <p:cNvPr id="3" name="Text 1"/>
+          <p:cNvSpPr/>
+          <p:nvPr/>
+        </p:nvSpPr>
+        <p:spPr>
+          <a:xfrm>
+            <a:off x="640080" y="457200"/>
+            <a:ext cx="11064240" cy="713232"/>
+          </a:xfrm>
+          <a:prstGeom prst="rect">
+            <a:avLst/>
+          </a:prstGeom>
+          <a:noFill/>
+          <a:ln/>
+        </p:spPr>
+        <p:txBody>
+          <a:bodyPr wrap="square" lIns="0" tIns="0" rIns="0" bIns="0" rtlCol="0" anchor="ctr"/>
+          <a:lstStyle/>
+          <a:p>
+            <a:pPr indent="0" marL="0">
+              <a:buNone/>
+            </a:pPr>
+            <a:r>
+              <a:rPr lang="en-US" sz="2800" b="1" dirty="0">
+                <a:solidFill>
+                  <a:srgbClr val="1E293B"/>
+                </a:solidFill>
+                <a:latin typeface="Cambria" pitchFamily="34" charset="0"/>
+                <a:ea typeface="Cambria" pitchFamily="34" charset="-122"/>
+                <a:cs typeface="Cambria" pitchFamily="34" charset="-120"/>
+              </a:rPr>
+              <a:t>Everything now lives in one place</a:t>
+            </a:r>
+            <a:endParaRPr lang="en-US" sz="2800" dirty="0"/>
+          </a:p>
+        </p:txBody>
+      </p:sp>
+      <p:sp>
+        <p:nvSpPr>
+          <p:cNvPr id="4" name="Text 2"/>
+          <p:cNvSpPr/>
+          <p:nvPr/>
+        </p:nvSpPr>
+        <p:spPr>
+          <a:xfrm>
+            <a:off x="640080" y="1627632"/>
+            <a:ext cx="10881360" cy="502920"/>
+          </a:xfrm>
+          <a:prstGeom prst="rect">
+            <a:avLst/>
+          </a:prstGeom>
+          <a:noFill/>
+          <a:ln/>
+        </p:spPr>
+        <p:txBody>
+          <a:bodyPr wrap="square" lIns="0" tIns="0" rIns="0" bIns="0" rtlCol="0" anchor="ctr"/>
+          <a:lstStyle/>
+          <a:p>
+            <a:pPr indent="0" marL="0">
+              <a:buNone/>
+            </a:pPr>
+            <a:r>
+              <a:rPr lang="en-US" sz="1450" dirty="0">
+                <a:solidFill>
+                  <a:srgbClr val="1E293B"/>
+                </a:solidFill>
+                <a:latin typeface="Calibri" pitchFamily="34" charset="0"/>
+                <a:ea typeface="Calibri" pitchFamily="34" charset="-122"/>
+                <a:cs typeface="Calibri" pitchFamily="34" charset="-120"/>
+              </a:rPr>
+              <a:t>We put the project behind a single page so the code, the write-up and the slides stay in sync and are easy to hand to anyone.</a:t>
+            </a:r>
+            <a:endParaRPr lang="en-US" sz="1450" dirty="0"/>
+          </a:p>
+        </p:txBody>
+      </p:sp>
+      <p:sp>
+        <p:nvSpPr>
+          <p:cNvPr id="5" name="Shape 3"/>
+          <p:cNvSpPr/>
+          <p:nvPr/>
+        </p:nvSpPr>
+        <p:spPr>
+          <a:xfrm>
+            <a:off x="640080" y="2286000"/>
+            <a:ext cx="3538728" cy="3200400"/>
+          </a:xfrm>
+          <a:prstGeom prst="roundRect">
+            <a:avLst>
+              <a:gd name="adj" fmla="val 2571"/>
+            </a:avLst>
+          </a:prstGeom>
+          <a:solidFill>
+            <a:srgbClr val="FFFFFF"/>
+          </a:solidFill>
+          <a:ln w="12700">
+            <a:solidFill>
+              <a:srgbClr val="E2E8F0"/>
+            </a:solidFill>
+            <a:prstDash val="solid"/>
+          </a:ln>
+          <a:effectLst>
+            <a:outerShdw sx="100000" sy="100000" kx="0" ky="0" algn="bl" rotWithShape="0" blurRad="114300" dist="38100" dir="5400000">
+              <a:srgbClr val="0F172A">
+                <a:alpha val="14000"/>
+              </a:srgbClr>
+            </a:outerShdw>
+          </a:effectLst>
+        </p:spPr>
+      </p:sp>
+      <p:sp>
+        <p:nvSpPr>
+          <p:cNvPr id="6" name="Text 4"/>
+          <p:cNvSpPr/>
+          <p:nvPr/>
+        </p:nvSpPr>
+        <p:spPr>
+          <a:xfrm>
+            <a:off x="914400" y="2514600"/>
+            <a:ext cx="3017520" cy="274320"/>
+          </a:xfrm>
+          <a:prstGeom prst="rect">
+            <a:avLst/>
+          </a:prstGeom>
+          <a:noFill/>
+          <a:ln/>
+        </p:spPr>
+        <p:txBody>
+          <a:bodyPr wrap="square" lIns="0" tIns="0" rIns="0" bIns="0" rtlCol="0" anchor="ctr"/>
+          <a:lstStyle/>
+          <a:p>
+            <a:pPr indent="0" marL="0">
+              <a:buNone/>
+            </a:pPr>
+            <a:r>
+              <a:rPr lang="en-US" sz="1100" b="1" spc="200" kern="0" dirty="0">
+                <a:solidFill>
+                  <a:srgbClr val="6D28D9"/>
+                </a:solidFill>
+                <a:latin typeface="Calibri" pitchFamily="34" charset="0"/>
+                <a:ea typeface="Calibri" pitchFamily="34" charset="-122"/>
+                <a:cs typeface="Calibri" pitchFamily="34" charset="-120"/>
+              </a:rPr>
+              <a:t>REPOSITORY</a:t>
+            </a:r>
+            <a:endParaRPr lang="en-US" sz="1100" dirty="0"/>
+          </a:p>
+        </p:txBody>
+      </p:sp>
+      <p:sp>
+        <p:nvSpPr>
+          <p:cNvPr id="7" name="Text 5"/>
+          <p:cNvSpPr/>
+          <p:nvPr/>
+        </p:nvSpPr>
+        <p:spPr>
+          <a:xfrm>
+            <a:off x="914400" y="2834640"/>
+            <a:ext cx="3017520" cy="457200"/>
+          </a:xfrm>
+          <a:prstGeom prst="rect">
+            <a:avLst/>
+          </a:prstGeom>
+          <a:noFill/>
+          <a:ln/>
+        </p:spPr>
+        <p:txBody>
+          <a:bodyPr wrap="square" lIns="0" tIns="0" rIns="0" bIns="0" rtlCol="0" anchor="ctr"/>
+          <a:lstStyle/>
+          <a:p>
+            <a:pPr indent="0" marL="0">
+              <a:buNone/>
+            </a:pPr>
+            <a:r>
+              <a:rPr lang="en-US" sz="1900" b="1" dirty="0">
+                <a:solidFill>
+                  <a:srgbClr val="1E293B"/>
+                </a:solidFill>
+                <a:latin typeface="Cambria" pitchFamily="34" charset="0"/>
+                <a:ea typeface="Cambria" pitchFamily="34" charset="-122"/>
+                <a:cs typeface="Cambria" pitchFamily="34" charset="-120"/>
+              </a:rPr>
+              <a:t>The pipeline</a:t>
+            </a:r>
+            <a:endParaRPr lang="en-US" sz="1900" dirty="0"/>
+          </a:p>
+        </p:txBody>
+      </p:sp>
+      <p:sp>
+        <p:nvSpPr>
+          <p:cNvPr id="8" name="Text 6"/>
+          <p:cNvSpPr/>
+          <p:nvPr/>
+        </p:nvSpPr>
+        <p:spPr>
+          <a:xfrm>
+            <a:off x="914400" y="3383280"/>
+            <a:ext cx="3063240" cy="1463040"/>
+          </a:xfrm>
+          <a:prstGeom prst="rect">
+            <a:avLst/>
+          </a:prstGeom>
+          <a:noFill/>
+          <a:ln/>
+        </p:spPr>
+        <p:txBody>
+          <a:bodyPr wrap="square" lIns="0" tIns="0" rIns="0" bIns="0" rtlCol="0" anchor="ctr"/>
+          <a:lstStyle/>
+          <a:p>
+            <a:pPr indent="0" marL="0">
+              <a:lnSpc>
+                <a:spcPct val="106000"/>
+              </a:lnSpc>
+              <a:buNone/>
+            </a:pPr>
+            <a:r>
+              <a:rPr lang="en-US" sz="1250" dirty="0">
+                <a:solidFill>
+                  <a:srgbClr val="64748B"/>
+                </a:solidFill>
+                <a:latin typeface="Calibri" pitchFamily="34" charset="0"/>
+                <a:ea typeface="Calibri" pitchFamily="34" charset="-122"/>
+                <a:cs typeface="Calibri" pitchFamily="34" charset="-120"/>
+              </a:rPr>
+              <a:t>Decoding, the pooled autoencoder, every control, per-animal results. One command per animal, reproducible end to end.</a:t>
+            </a:r>
+            <a:endParaRPr lang="en-US" sz="1250" dirty="0"/>
+          </a:p>
+        </p:txBody>
+      </p:sp>
+      <p:sp>
+        <p:nvSpPr>
+          <p:cNvPr id="9" name="Text 7"/>
+          <p:cNvSpPr/>
+          <p:nvPr/>
+        </p:nvSpPr>
+        <p:spPr>
+          <a:xfrm>
+            <a:off x="914400" y="4983480"/>
+            <a:ext cx="3063240" cy="365760"/>
+          </a:xfrm>
+          <a:prstGeom prst="rect">
+            <a:avLst/>
+          </a:prstGeom>
+          <a:noFill/>
+          <a:ln/>
+        </p:spPr>
+        <p:txBody>
+          <a:bodyPr wrap="square" lIns="0" tIns="0" rIns="0" bIns="0" rtlCol="0" anchor="ctr"/>
+          <a:lstStyle/>
+          <a:p>
+            <a:pPr indent="0" marL="0">
+              <a:buNone/>
+            </a:pPr>
+            <a:r>
+              <a:rPr lang="en-US" sz="1050" i="1" dirty="0">
+                <a:solidFill>
+                  <a:srgbClr val="6D28D9"/>
+                </a:solidFill>
+                <a:latin typeface="Calibri" pitchFamily="34" charset="0"/>
+                <a:ea typeface="Calibri" pitchFamily="34" charset="-122"/>
+                <a:cs typeface="Calibri" pitchFamily="34" charset="-120"/>
+              </a:rPr>
+              <a:t>github.com/switchrao777/hroc-ncan</a:t>
+            </a:r>
+            <a:endParaRPr lang="en-US" sz="1050" dirty="0"/>
+          </a:p>
+        </p:txBody>
+      </p:sp>
+      <p:sp>
+        <p:nvSpPr>
+          <p:cNvPr id="10" name="Shape 8"/>
+          <p:cNvSpPr/>
+          <p:nvPr/>
+        </p:nvSpPr>
+        <p:spPr>
+          <a:xfrm>
+            <a:off x="4370832" y="2286000"/>
+            <a:ext cx="3538728" cy="3200400"/>
+          </a:xfrm>
+          <a:prstGeom prst="roundRect">
+            <a:avLst>
+              <a:gd name="adj" fmla="val 2571"/>
+            </a:avLst>
+          </a:prstGeom>
+          <a:solidFill>
+            <a:srgbClr val="FFFFFF"/>
+          </a:solidFill>
+          <a:ln w="12700">
+            <a:solidFill>
+              <a:srgbClr val="E2E8F0"/>
+            </a:solidFill>
+            <a:prstDash val="solid"/>
+          </a:ln>
+          <a:effectLst>
+            <a:outerShdw sx="100000" sy="100000" kx="0" ky="0" algn="bl" rotWithShape="0" blurRad="114300" dist="38100" dir="5400000">
+              <a:srgbClr val="0F172A">
+                <a:alpha val="14000"/>
+              </a:srgbClr>
+            </a:outerShdw>
+          </a:effectLst>
+        </p:spPr>
+      </p:sp>
+      <p:sp>
+        <p:nvSpPr>
+          <p:cNvPr id="11" name="Text 9"/>
+          <p:cNvSpPr/>
+          <p:nvPr/>
+        </p:nvSpPr>
+        <p:spPr>
+          <a:xfrm>
+            <a:off x="4645152" y="2514600"/>
+            <a:ext cx="3017520" cy="274320"/>
+          </a:xfrm>
+          <a:prstGeom prst="rect">
+            <a:avLst/>
+          </a:prstGeom>
+          <a:noFill/>
+          <a:ln/>
+        </p:spPr>
+        <p:txBody>
+          <a:bodyPr wrap="square" lIns="0" tIns="0" rIns="0" bIns="0" rtlCol="0" anchor="ctr"/>
+          <a:lstStyle/>
+          <a:p>
+            <a:pPr indent="0" marL="0">
+              <a:buNone/>
+            </a:pPr>
+            <a:r>
+              <a:rPr lang="en-US" sz="1100" b="1" spc="200" kern="0" dirty="0">
+                <a:solidFill>
+                  <a:srgbClr val="0D9488"/>
+                </a:solidFill>
+                <a:latin typeface="Calibri" pitchFamily="34" charset="0"/>
+                <a:ea typeface="Calibri" pitchFamily="34" charset="-122"/>
+                <a:cs typeface="Calibri" pitchFamily="34" charset="-120"/>
+              </a:rPr>
+              <a:t>REPORT</a:t>
+            </a:r>
+            <a:endParaRPr lang="en-US" sz="1100" dirty="0"/>
+          </a:p>
+        </p:txBody>
+      </p:sp>
+      <p:sp>
+        <p:nvSpPr>
+          <p:cNvPr id="12" name="Text 10"/>
+          <p:cNvSpPr/>
+          <p:nvPr/>
+        </p:nvSpPr>
+        <p:spPr>
+          <a:xfrm>
+            <a:off x="4645152" y="2834640"/>
+            <a:ext cx="3017520" cy="457200"/>
+          </a:xfrm>
+          <a:prstGeom prst="rect">
+            <a:avLst/>
+          </a:prstGeom>
+          <a:noFill/>
+          <a:ln/>
+        </p:spPr>
+        <p:txBody>
+          <a:bodyPr wrap="square" lIns="0" tIns="0" rIns="0" bIns="0" rtlCol="0" anchor="ctr"/>
+          <a:lstStyle/>
+          <a:p>
+            <a:pPr indent="0" marL="0">
+              <a:buNone/>
+            </a:pPr>
+            <a:r>
+              <a:rPr lang="en-US" sz="1900" b="1" dirty="0">
+                <a:solidFill>
+                  <a:srgbClr val="1E293B"/>
+                </a:solidFill>
+                <a:latin typeface="Cambria" pitchFamily="34" charset="0"/>
+                <a:ea typeface="Cambria" pitchFamily="34" charset="-122"/>
+                <a:cs typeface="Cambria" pitchFamily="34" charset="-120"/>
+              </a:rPr>
+              <a:t>Six-page write-up</a:t>
+            </a:r>
+            <a:endParaRPr lang="en-US" sz="1900" dirty="0"/>
+          </a:p>
+        </p:txBody>
+      </p:sp>
+      <p:sp>
+        <p:nvSpPr>
+          <p:cNvPr id="13" name="Text 11"/>
+          <p:cNvSpPr/>
+          <p:nvPr/>
+        </p:nvSpPr>
+        <p:spPr>
+          <a:xfrm>
+            <a:off x="4645152" y="3383280"/>
+            <a:ext cx="3063240" cy="1463040"/>
+          </a:xfrm>
+          <a:prstGeom prst="rect">
+            <a:avLst/>
+          </a:prstGeom>
+          <a:noFill/>
+          <a:ln/>
+        </p:spPr>
+        <p:txBody>
+          <a:bodyPr wrap="square" lIns="0" tIns="0" rIns="0" bIns="0" rtlCol="0" anchor="ctr"/>
+          <a:lstStyle/>
+          <a:p>
+            <a:pPr indent="0" marL="0">
+              <a:lnSpc>
+                <a:spcPct val="106000"/>
+              </a:lnSpc>
+              <a:buNone/>
+            </a:pPr>
+            <a:r>
+              <a:rPr lang="en-US" sz="1250" dirty="0">
+                <a:solidFill>
+                  <a:srgbClr val="64748B"/>
+                </a:solidFill>
+                <a:latin typeface="Calibri" pitchFamily="34" charset="0"/>
+                <a:ea typeface="Calibri" pitchFamily="34" charset="-122"/>
+                <a:cs typeface="Calibri" pitchFamily="34" charset="-120"/>
+              </a:rPr>
+              <a:t>Background, methods, results, limitations, references — with the four figures and the real numbers. Formatted as a handout.</a:t>
+            </a:r>
+            <a:endParaRPr lang="en-US" sz="1250" dirty="0"/>
+          </a:p>
+        </p:txBody>
+      </p:sp>
+      <p:sp>
+        <p:nvSpPr>
+          <p:cNvPr id="14" name="Text 12"/>
+          <p:cNvSpPr/>
+          <p:nvPr/>
+        </p:nvSpPr>
+        <p:spPr>
+          <a:xfrm>
+            <a:off x="4645152" y="4983480"/>
+            <a:ext cx="3063240" cy="365760"/>
+          </a:xfrm>
+          <a:prstGeom prst="rect">
+            <a:avLst/>
+          </a:prstGeom>
+          <a:noFill/>
+          <a:ln/>
+        </p:spPr>
+        <p:txBody>
+          <a:bodyPr wrap="square" lIns="0" tIns="0" rIns="0" bIns="0" rtlCol="0" anchor="ctr"/>
+          <a:lstStyle/>
+          <a:p>
+            <a:pPr indent="0" marL="0">
+              <a:buNone/>
+            </a:pPr>
+            <a:r>
+              <a:rPr lang="en-US" sz="1050" i="1" dirty="0">
+                <a:solidFill>
+                  <a:srgbClr val="0D9488"/>
+                </a:solidFill>
+                <a:latin typeface="Calibri" pitchFamily="34" charset="0"/>
+                <a:ea typeface="Calibri" pitchFamily="34" charset="-122"/>
+                <a:cs typeface="Calibri" pitchFamily="34" charset="-120"/>
+              </a:rPr>
+              <a:t>docs/HROC_Report.pdf</a:t>
+            </a:r>
+            <a:endParaRPr lang="en-US" sz="1050" dirty="0"/>
+          </a:p>
+        </p:txBody>
+      </p:sp>
+      <p:sp>
+        <p:nvSpPr>
+          <p:cNvPr id="15" name="Shape 13"/>
+          <p:cNvSpPr/>
+          <p:nvPr/>
+        </p:nvSpPr>
+        <p:spPr>
+          <a:xfrm>
+            <a:off x="8101584" y="2286000"/>
+            <a:ext cx="3538728" cy="3200400"/>
+          </a:xfrm>
+          <a:prstGeom prst="roundRect">
+            <a:avLst>
+              <a:gd name="adj" fmla="val 2571"/>
+            </a:avLst>
+          </a:prstGeom>
+          <a:solidFill>
+            <a:srgbClr val="FFFFFF"/>
+          </a:solidFill>
+          <a:ln w="12700">
+            <a:solidFill>
+              <a:srgbClr val="E2E8F0"/>
+            </a:solidFill>
+            <a:prstDash val="solid"/>
+          </a:ln>
+          <a:effectLst>
+            <a:outerShdw sx="100000" sy="100000" kx="0" ky="0" algn="bl" rotWithShape="0" blurRad="114300" dist="38100" dir="5400000">
+              <a:srgbClr val="0F172A">
+                <a:alpha val="14000"/>
+              </a:srgbClr>
+            </a:outerShdw>
+          </a:effectLst>
+        </p:spPr>
+      </p:sp>
+      <p:sp>
+        <p:nvSpPr>
+          <p:cNvPr id="16" name="Text 14"/>
+          <p:cNvSpPr/>
+          <p:nvPr/>
+        </p:nvSpPr>
+        <p:spPr>
+          <a:xfrm>
+            <a:off x="8375904" y="2514600"/>
+            <a:ext cx="3017520" cy="274320"/>
+          </a:xfrm>
+          <a:prstGeom prst="rect">
+            <a:avLst/>
+          </a:prstGeom>
+          <a:noFill/>
+          <a:ln/>
+        </p:spPr>
+        <p:txBody>
+          <a:bodyPr wrap="square" lIns="0" tIns="0" rIns="0" bIns="0" rtlCol="0" anchor="ctr"/>
+          <a:lstStyle/>
+          <a:p>
+            <a:pPr indent="0" marL="0">
+              <a:buNone/>
+            </a:pPr>
+            <a:r>
+              <a:rPr lang="en-US" sz="1100" b="1" spc="200" kern="0" dirty="0">
+                <a:solidFill>
+                  <a:srgbClr val="D97706"/>
+                </a:solidFill>
+                <a:latin typeface="Calibri" pitchFamily="34" charset="0"/>
+                <a:ea typeface="Calibri" pitchFamily="34" charset="-122"/>
+                <a:cs typeface="Calibri" pitchFamily="34" charset="-120"/>
+              </a:rPr>
+              <a:t>SLIDES</a:t>
+            </a:r>
+            <a:endParaRPr lang="en-US" sz="1100" dirty="0"/>
+          </a:p>
+        </p:txBody>
+      </p:sp>
+      <p:sp>
+        <p:nvSpPr>
+          <p:cNvPr id="17" name="Text 15"/>
+          <p:cNvSpPr/>
+          <p:nvPr/>
+        </p:nvSpPr>
+        <p:spPr>
+          <a:xfrm>
+            <a:off x="8375904" y="2834640"/>
+            <a:ext cx="3017520" cy="457200"/>
+          </a:xfrm>
+          <a:prstGeom prst="rect">
+            <a:avLst/>
+          </a:prstGeom>
+          <a:noFill/>
+          <a:ln/>
+        </p:spPr>
+        <p:txBody>
+          <a:bodyPr wrap="square" lIns="0" tIns="0" rIns="0" bIns="0" rtlCol="0" anchor="ctr"/>
+          <a:lstStyle/>
+          <a:p>
+            <a:pPr indent="0" marL="0">
+              <a:buNone/>
+            </a:pPr>
+            <a:r>
+              <a:rPr lang="en-US" sz="1900" b="1" dirty="0">
+                <a:solidFill>
+                  <a:srgbClr val="1E293B"/>
+                </a:solidFill>
+                <a:latin typeface="Cambria" pitchFamily="34" charset="0"/>
+                <a:ea typeface="Cambria" pitchFamily="34" charset="-122"/>
+                <a:cs typeface="Cambria" pitchFamily="34" charset="-120"/>
+              </a:rPr>
+              <a:t>The decks</a:t>
+            </a:r>
+            <a:endParaRPr lang="en-US" sz="1900" dirty="0"/>
+          </a:p>
+        </p:txBody>
+      </p:sp>
+      <p:sp>
+        <p:nvSpPr>
+          <p:cNvPr id="18" name="Text 16"/>
+          <p:cNvSpPr/>
+          <p:nvPr/>
+        </p:nvSpPr>
+        <p:spPr>
+          <a:xfrm>
+            <a:off x="8375904" y="3383280"/>
+            <a:ext cx="3063240" cy="1463040"/>
+          </a:xfrm>
+          <a:prstGeom prst="rect">
+            <a:avLst/>
+          </a:prstGeom>
+          <a:noFill/>
+          <a:ln/>
+        </p:spPr>
+        <p:txBody>
+          <a:bodyPr wrap="square" lIns="0" tIns="0" rIns="0" bIns="0" rtlCol="0" anchor="ctr"/>
+          <a:lstStyle/>
+          <a:p>
+            <a:pPr indent="0" marL="0">
+              <a:lnSpc>
+                <a:spcPct val="106000"/>
+              </a:lnSpc>
+              <a:buNone/>
+            </a:pPr>
+            <a:r>
+              <a:rPr lang="en-US" sz="1250" dirty="0">
+                <a:solidFill>
+                  <a:srgbClr val="64748B"/>
+                </a:solidFill>
+                <a:latin typeface="Calibri" pitchFamily="34" charset="0"/>
+                <a:ea typeface="Calibri" pitchFamily="34" charset="-122"/>
+                <a:cs typeface="Calibri" pitchFamily="34" charset="-120"/>
+              </a:rPr>
+              <a:t>This update, the talk for your group, and speaker notes for each.</a:t>
+            </a:r>
+            <a:endParaRPr lang="en-US" sz="1250" dirty="0"/>
+          </a:p>
+        </p:txBody>
+      </p:sp>
+      <p:sp>
+        <p:nvSpPr>
+          <p:cNvPr id="19" name="Text 17"/>
+          <p:cNvSpPr/>
+          <p:nvPr/>
+        </p:nvSpPr>
+        <p:spPr>
+          <a:xfrm>
+            <a:off x="8375904" y="4983480"/>
+            <a:ext cx="3063240" cy="365760"/>
+          </a:xfrm>
+          <a:prstGeom prst="rect">
+            <a:avLst/>
+          </a:prstGeom>
+          <a:noFill/>
+          <a:ln/>
+        </p:spPr>
+        <p:txBody>
+          <a:bodyPr wrap="square" lIns="0" tIns="0" rIns="0" bIns="0" rtlCol="0" anchor="ctr"/>
+          <a:lstStyle/>
+          <a:p>
+            <a:pPr indent="0" marL="0">
+              <a:buNone/>
+            </a:pPr>
+            <a:r>
+              <a:rPr lang="en-US" sz="1050" i="1" dirty="0">
+                <a:solidFill>
+                  <a:srgbClr val="D97706"/>
+                </a:solidFill>
+                <a:latin typeface="Calibri" pitchFamily="34" charset="0"/>
+                <a:ea typeface="Calibri" pitchFamily="34" charset="-122"/>
+                <a:cs typeface="Calibri" pitchFamily="34" charset="-120"/>
+              </a:rPr>
+              <a:t>slides/</a:t>
+            </a:r>
+            <a:endParaRPr lang="en-US" sz="1050" dirty="0"/>
+          </a:p>
+        </p:txBody>
+      </p:sp>
+      <p:sp>
+        <p:nvSpPr>
+          <p:cNvPr id="20" name="Shape 18"/>
+          <p:cNvSpPr/>
+          <p:nvPr/>
+        </p:nvSpPr>
+        <p:spPr>
+          <a:xfrm>
+            <a:off x="640080" y="5715000"/>
+            <a:ext cx="10881360" cy="777240"/>
+          </a:xfrm>
+          <a:prstGeom prst="roundRect">
+            <a:avLst>
+              <a:gd name="adj" fmla="val 10588"/>
+            </a:avLst>
+          </a:prstGeom>
+          <a:solidFill>
+            <a:srgbClr val="F5F3FF"/>
+          </a:solidFill>
+          <a:ln w="12700">
+            <a:solidFill>
+              <a:srgbClr val="E2E8F0"/>
+            </a:solidFill>
+            <a:prstDash val="solid"/>
+          </a:ln>
+          <a:effectLst>
+            <a:outerShdw sx="100000" sy="100000" kx="0" ky="0" algn="bl" rotWithShape="0" blurRad="114300" dist="38100" dir="5400000">
+              <a:srgbClr val="0F172A">
+                <a:alpha val="14000"/>
+              </a:srgbClr>
+            </a:outerShdw>
+          </a:effectLst>
+        </p:spPr>
+      </p:sp>
+      <p:sp>
+        <p:nvSpPr>
+          <p:cNvPr id="21" name="Text 19"/>
+          <p:cNvSpPr/>
+          <p:nvPr/>
+        </p:nvSpPr>
+        <p:spPr>
+          <a:xfrm>
+            <a:off x="960120" y="5852160"/>
+            <a:ext cx="10241280" cy="502920"/>
+          </a:xfrm>
+          <a:prstGeom prst="rect">
+            <a:avLst/>
+          </a:prstGeom>
+          <a:noFill/>
+          <a:ln/>
+        </p:spPr>
+        <p:txBody>
+          <a:bodyPr wrap="square" lIns="0" tIns="0" rIns="0" bIns="0" rtlCol="0" anchor="ctr"/>
+          <a:lstStyle/>
+          <a:p>
+            <a:pPr indent="0" marL="0">
+              <a:buNone/>
+            </a:pPr>
+            <a:r>
+              <a:rPr lang="en-US" sz="1300" b="1" dirty="0">
+                <a:solidFill>
+                  <a:srgbClr val="6D28D9"/>
+                </a:solidFill>
+                <a:latin typeface="Calibri" pitchFamily="34" charset="0"/>
+                <a:ea typeface="Calibri" pitchFamily="34" charset="-122"/>
+                <a:cs typeface="Calibri" pitchFamily="34" charset="-120"/>
+              </a:rPr>
+              <a:t>Two blanks I left for you:  </a:t>
+            </a:r>
+            <a:pPr indent="0" marL="0">
+              <a:buNone/>
+            </a:pPr>
+            <a:r>
+              <a:rPr lang="en-US" sz="1300" dirty="0">
+                <a:solidFill>
+                  <a:srgbClr val="1E293B"/>
+                </a:solidFill>
+                <a:latin typeface="Calibri" pitchFamily="34" charset="0"/>
+                <a:ea typeface="Calibri" pitchFamily="34" charset="-122"/>
+                <a:cs typeface="Calibri" pitchFamily="34" charset="-120"/>
+              </a:rPr>
+              <a:t>Theresa's surname, and what Tarun and I should be listed as. I didn't want to guess on the write-up.</a:t>
+            </a:r>
+            <a:endParaRPr lang="en-US" sz="1300" dirty="0"/>
+          </a:p>
+        </p:txBody>
+      </p:sp>
+    </p:spTree>
+  </p:cSld>
+  <p:clrMapOvr>
+    <a:masterClrMapping/>
+  </p:clrMapOvr>
+</p:sld>
+</file>
+
+<file path=ppt/slides/slide9.xml><?xml version="1.0" encoding="utf-8"?>
+<p:sld xmlns:a="http://schemas.openxmlformats.org/drawingml/2006/main" xmlns:r="http://schemas.openxmlformats.org/officeDocument/2006/relationships" xmlns:p="http://schemas.openxmlformats.org/presentationml/2006/main">
+  <p:cSld name="Slide 9">
+    <p:bg>
+      <p:bgPr>
+        <a:solidFill>
+          <a:srgbClr val="FFFFFF"/>
+        </a:solidFill>
+      </p:bgPr>
+    </p:bg>
+    <p:spTree>
+      <p:nvGrpSpPr>
+        <p:cNvPr id="1" name=""/>
+        <p:cNvGrpSpPr/>
+        <p:nvPr/>
+      </p:nvGrpSpPr>
+      <p:grpSpPr>
+        <a:xfrm>
+          <a:off x="0" y="0"/>
+          <a:ext cx="0" cy="0"/>
+          <a:chOff x="0" y="0"/>
+          <a:chExt cx="0" cy="0"/>
+        </a:xfrm>
+      </p:grpSpPr>
+      <p:sp>
+        <p:nvSpPr>
+          <p:cNvPr id="2" name="Text 0"/>
+          <p:cNvSpPr/>
+          <p:nvPr/>
+        </p:nvSpPr>
+        <p:spPr>
+          <a:xfrm>
+            <a:off x="658368" y="384048"/>
+            <a:ext cx="10972800" cy="274320"/>
+          </a:xfrm>
+          <a:prstGeom prst="rect">
+            <a:avLst/>
+          </a:prstGeom>
+          <a:noFill/>
+          <a:ln/>
+        </p:spPr>
+        <p:txBody>
+          <a:bodyPr wrap="square" lIns="0" tIns="0" rIns="0" bIns="0" rtlCol="0" anchor="ctr"/>
+          <a:lstStyle/>
+          <a:p>
+            <a:pPr indent="0" marL="0">
+              <a:buNone/>
+            </a:pPr>
+            <a:r>
+              <a:rPr lang="en-US" sz="1200" b="1" spc="300" kern="0" dirty="0">
+                <a:solidFill>
                   <a:srgbClr val="0D9488"/>
                 </a:solidFill>
                 <a:latin typeface="Calibri" pitchFamily="34" charset="0"/>

--- a/slides/HROC_Weekly_Update.pptx
+++ b/slides/HROC_Weekly_Update.pptx
@@ -14,9 +14,10 @@
     <p:sldId id="262" r:id="rId8"/>
     <p:sldId id="263" r:id="rId9"/>
     <p:sldId id="264" r:id="rId10"/>
+    <p:sldId id="265" r:id="rId11"/>
   </p:sldIdLst>
   <p:notesMasterIdLst>
-    <p:notesMasterId r:id="rId11"/>
+    <p:notesMasterId r:id="rId12"/>
   </p:notesMasterIdLst>
   <p:sldSz cx="12192000" cy="6858000"/>
   <p:notesSz cx="6858000" cy="12192000"/>
@@ -510,7 +511,7 @@
           <a:p>
             <a:r>
               <a:rPr lang="en-US" dirty="0"/>
-              <a:t>Short update this week. You gave us four things to check, all four are done, and I want to lead with the one where the number moved against us.</a:t>
+              <a:t>Good week. The headline is that the cortical effect is small in magnitude but extremely consistent — it is above the null in 99 of 101 five-day blocks, in every animal. I will also show you all four controls you asked for, and one number I had to revise down.</a:t>
             </a:r>
             <a:endParaRPr lang="en-US" dirty="0"/>
           </a:p>
@@ -534,6 +535,94 @@
             <a:fld id="{F7021451-1387-4CA6-816F-3879F97B5CBC}" type="slidenum">
               <a:rPr lang="en-US"/>
               <a:t>1</a:t>
+            </a:fld>
+            <a:endParaRPr lang="en-US"/>
+          </a:p>
+        </p:txBody>
+      </p:sp>
+    </p:spTree>
+    <p:extLst>
+      <p:ext uri="{BB962C8B-B14F-4D97-AF65-F5344CB8AC3E}">
+        <p14:creationId xmlns:p14="http://schemas.microsoft.com/office/powerpoint/2010/main" val="1024086991"/>
+      </p:ext>
+    </p:extLst>
+  </p:cSld>
+  <p:clrMapOvr>
+    <a:masterClrMapping/>
+  </p:clrMapOvr>
+</p:notes>
+</file>
+
+<file path=ppt/notesSlides/notesSlide10.xml><?xml version="1.0" encoding="utf-8"?>
+<p:notes xmlns:a="http://schemas.openxmlformats.org/drawingml/2006/main" xmlns:r="http://schemas.openxmlformats.org/officeDocument/2006/relationships" xmlns:p="http://schemas.openxmlformats.org/presentationml/2006/main">
+  <p:cSld>
+    <p:spTree>
+      <p:nvGrpSpPr>
+        <p:cNvPr id="1" name=""/>
+        <p:cNvGrpSpPr/>
+        <p:nvPr/>
+      </p:nvGrpSpPr>
+      <p:grpSpPr>
+        <a:xfrm>
+          <a:off x="0" y="0"/>
+          <a:ext cx="0" cy="0"/>
+          <a:chOff x="0" y="0"/>
+          <a:chExt cx="0" cy="0"/>
+        </a:xfrm>
+      </p:grpSpPr>
+      <p:sp>
+        <p:nvSpPr>
+          <p:cNvPr id="2" name="Slide Image Placeholder 1"/>
+          <p:cNvSpPr>
+            <a:spLocks noGrp="1" noRot="1" noChangeAspect="1"/>
+          </p:cNvSpPr>
+          <p:nvPr>
+            <p:ph type="sldImg"/>
+          </p:nvPr>
+        </p:nvSpPr>
+        <p:spPr/>
+      </p:sp>
+      <p:sp>
+        <p:nvSpPr>
+          <p:cNvPr id="3" name="Notes Placeholder 2"/>
+          <p:cNvSpPr>
+            <a:spLocks noGrp="1"/>
+          </p:cNvSpPr>
+          <p:nvPr>
+            <p:ph type="body" idx="1"/>
+          </p:nvPr>
+        </p:nvSpPr>
+        <p:spPr/>
+        <p:txBody>
+          <a:bodyPr/>
+          <a:lstStyle/>
+          <a:p>
+            <a:r>
+              <a:rPr lang="en-US" dirty="0"/>
+              <a:t>Plan between now and the 21st. Download and process the remaining animals — the five down ones plus the two failed up animals, which are useful as negative controls. That takes us from five to about twelve. Re-run everything at that larger n, which is what powers the scaling correlation. Build the presentation for your group. And preview it with you beforehand. One question for you: given the up group is capped at two, is the scaling analysis the right thing to build the paper around rather than the direction contrast?</a:t>
+            </a:r>
+            <a:endParaRPr lang="en-US" dirty="0"/>
+          </a:p>
+        </p:txBody>
+      </p:sp>
+      <p:sp>
+        <p:nvSpPr>
+          <p:cNvPr id="4" name="Slide Number Placeholder 3"/>
+          <p:cNvSpPr>
+            <a:spLocks noGrp="1"/>
+          </p:cNvSpPr>
+          <p:nvPr>
+            <p:ph type="sldNum" sz="quarter" idx="10"/>
+          </p:nvPr>
+        </p:nvSpPr>
+        <p:spPr/>
+        <p:txBody>
+          <a:bodyPr/>
+          <a:lstStyle/>
+          <a:p>
+            <a:fld id="{F7021451-1387-4CA6-816F-3879F97B5CBC}" type="slidenum">
+              <a:rPr lang="en-US"/>
+              <a:t>10</a:t>
             </a:fld>
             <a:endParaRPr lang="en-US"/>
           </a:p>
@@ -774,7 +863,7 @@
           <a:p>
             <a:r>
               <a:rPr lang="en-US" dirty="0"/>
-              <a:t>This is the one I want to lead with. Last week I quoted 0.35. That was the best block, and on top of that I'd removed stimulus and background globally rather than block by block. If the stimulus-reflex relationship shifts between blocks, global removal leaves stimulus variance behind, and cortex tracks stimulus — so the number was inflated. Doing it inside each block gives 0.04. That's the number we'll quote from now on. It's still above the shuffle null in every animal, so the finding holds, it's just a smaller claim than I made last week.</a:t>
+              <a:t>This is the number I want you to take away. Rather than judging the effect by its size alone, ask how often it shows up. For every five-day block we test cortex against a shuffle of that block's own labels. It beats the shuffle in 99 of 101 blocks, in all five animals — a sign test gives p of two times ten to the minus twenty-seven. The effect is small, but it is almost always there, and a small effect that appears every time in every animal is not noise.</a:t>
             </a:r>
             <a:endParaRPr lang="en-US" dirty="0"/>
           </a:p>
@@ -862,7 +951,7 @@
           <a:p>
             <a:r>
               <a:rPr lang="en-US" dirty="0"/>
-              <a:t>Crosstalk, using exactly the method you suggested — correlate cortical against muscle power and see how much coordination there is. Above 100 hertz, where muscle artefact lives, the correlation is plus 0.06, essentially zero. The low bands are slightly negative. And the lead-lag check has cortex marginally leading muscle, which you said would be the acceptable direction. So we don't think the ECoG is reproducing the EMG.</a:t>
+              <a:t>You asked me to check whether the stimulus had been removed properly, and it had not. Last week I quoted 0.35. That was the best block, and on top of that I'd removed stimulus and background globally rather than block by block. If the stimulus-reflex relationship shifts between blocks, global removal leaves stimulus variance behind, and cortex tracks stimulus — so the number was inflated. Doing it inside each block gives 0.04. That's the number we'll quote from now on. It's still above the shuffle null in every animal, so the finding holds, it's just a smaller claim than I made last week.</a:t>
             </a:r>
             <a:endParaRPr lang="en-US" dirty="0"/>
           </a:p>
@@ -950,7 +1039,7 @@
           <a:p>
             <a:r>
               <a:rPr lang="en-US" dirty="0"/>
-              <a:t>And this is your internal-control idea, which I think is the most promising thing we have. Animals differ in how much they learned and two of ours failed outright — those become the negative control. The correlation between learning and the change in coupling is plus 0.64. The two animals that succeeded gained coupling; the two that failed didn't. With five animals it isn't significant, but it's the right direction, and it's exactly what more animals would power.</a:t>
+              <a:t>Crosstalk, using exactly the method you suggested — correlate cortical against muscle power and see how much coordination there is. Above 100 hertz, where muscle artefact lives, the correlation is plus 0.06, essentially zero. The low bands are slightly negative. And the lead-lag check has cortex marginally leading muscle, which you said would be the acceptable direction. So we don't think the ECoG is reproducing the EMG.</a:t>
             </a:r>
             <a:endParaRPr lang="en-US" dirty="0"/>
           </a:p>
@@ -1038,7 +1127,7 @@
           <a:p>
             <a:r>
               <a:rPr lang="en-US" dirty="0"/>
-              <a:t>One new finding, and it's a constraint. I went back through every animal's log using the reward criterion as a success readout. For up-conditioning, raising the bar means the rat is beating it. Animals 3 and 4 had theirs raised, so they learned. Animals 1 and 6 had theirs lowered, so they struggled. And animal 12's electrode was dead. So the up group is capped at two, permanently — there isn't another good up-conditioned animal in this dataset. The down group can still grow, and 7, 8, 13, 14 and 15 are ready to download.</a:t>
+              <a:t>And this is your internal-control idea, which I think is the most promising thing we have. Animals differ in how much they learned and two of ours failed outright — those become the negative control. The correlation between learning and the change in coupling is plus 0.64. The two animals that succeeded gained coupling; the two that failed didn't. With five animals it isn't significant, but it's the right direction, and it's exactly what more animals would power.</a:t>
             </a:r>
             <a:endParaRPr lang="en-US" dirty="0"/>
           </a:p>
@@ -1126,7 +1215,7 @@
           <a:p>
             <a:r>
               <a:rPr lang="en-US" dirty="0"/>
-              <a:t>One more thing from this week. We put everything behind a single page so it stays in sync and is easy to hand to anyone — the repository with the whole pipeline, a six-page write-up formatted as a handout with the real numbers and figures, and the slide decks. Two blanks I deliberately left: Theresa's surname, and what Tarun and I should be listed as on the write-up. I didn't want to guess at either.</a:t>
+              <a:t>One new finding, and it's a constraint. I went back through every animal's log using the reward criterion as a success readout. For up-conditioning, raising the bar means the rat is beating it. Animals 3 and 4 had theirs raised, so they learned. Animals 1 and 6 had theirs lowered, so they struggled. And animal 12's electrode was dead. So the up group is capped at two, permanently — there isn't another good up-conditioned animal in this dataset. The down group can still grow, and 7, 8, 13, 14 and 15 are ready to download.</a:t>
             </a:r>
             <a:endParaRPr lang="en-US" dirty="0"/>
           </a:p>
@@ -1214,7 +1303,7 @@
           <a:p>
             <a:r>
               <a:rPr lang="en-US" dirty="0"/>
-              <a:t>Plan between now and the 21st. Download and process the remaining animals — the five down ones plus the two failed up animals, which are useful as negative controls. That takes us from five to about twelve. Re-run everything at that larger n, which is what powers the scaling correlation. Build the presentation for your group. And preview it with you beforehand. One question for you: given the up group is capped at two, is the scaling analysis the right thing to build the paper around rather than the direction contrast?</a:t>
+              <a:t>One more thing from this week. We put everything behind a single page so it stays in sync and is easy to hand to anyone — the repository with the whole pipeline, a six-page write-up formatted as a handout with the real numbers and figures, and the slide decks. Two blanks I deliberately left: Theresa's surname, and what Tarun and I should be listed as on the write-up. I didn't want to guess at either.</a:t>
             </a:r>
             <a:endParaRPr lang="en-US" dirty="0"/>
           </a:p>
@@ -1706,7 +1795,7 @@
                 <a:ea typeface="Cambria" pitchFamily="34" charset="-122"/>
                 <a:cs typeface="Cambria" pitchFamily="34" charset="-120"/>
               </a:rPr>
-              <a:t>Everything you asked for</a:t>
+              <a:t>The cortical signal is small</a:t>
             </a:r>
             <a:endParaRPr lang="en-US" sz="4000" dirty="0"/>
           </a:p>
@@ -1726,7 +1815,7 @@
                 <a:ea typeface="Cambria" pitchFamily="34" charset="-122"/>
                 <a:cs typeface="Cambria" pitchFamily="34" charset="-120"/>
               </a:rPr>
-              <a:t>last week, answered.</a:t>
+              <a:t>— and almost always there.</a:t>
             </a:r>
             <a:endParaRPr lang="en-US" sz="4000" dirty="0"/>
           </a:p>
@@ -1741,7 +1830,7 @@
         <p:spPr>
           <a:xfrm>
             <a:off x="749808" y="3931920"/>
-            <a:ext cx="10058400" cy="457200"/>
+            <a:ext cx="10058400" cy="548640"/>
           </a:xfrm>
           <a:prstGeom prst="rect">
             <a:avLst/>
@@ -1765,7 +1854,7 @@
                 <a:ea typeface="Calibri" pitchFamily="34" charset="-122"/>
                 <a:cs typeface="Calibri" pitchFamily="34" charset="-120"/>
               </a:rPr>
-              <a:t>Including one number that moved against us.</a:t>
+              <a:t>99 of 101 blocks above the null, across every animal. Plus all four controls you asked for.</a:t>
             </a:r>
             <a:endParaRPr lang="en-US" sz="1700" dirty="0"/>
           </a:p>
@@ -1807,6 +1896,897 @@
               <a:t>Suchith Rao &amp; Tarun Senthil    •    for Dr. Carp</a:t>
             </a:r>
             <a:endParaRPr lang="en-US" sz="1400" dirty="0"/>
+          </a:p>
+        </p:txBody>
+      </p:sp>
+    </p:spTree>
+  </p:cSld>
+  <p:clrMapOvr>
+    <a:masterClrMapping/>
+  </p:clrMapOvr>
+</p:sld>
+</file>
+
+<file path=ppt/slides/slide10.xml><?xml version="1.0" encoding="utf-8"?>
+<p:sld xmlns:a="http://schemas.openxmlformats.org/drawingml/2006/main" xmlns:r="http://schemas.openxmlformats.org/officeDocument/2006/relationships" xmlns:p="http://schemas.openxmlformats.org/presentationml/2006/main">
+  <p:cSld name="Slide 10">
+    <p:bg>
+      <p:bgPr>
+        <a:solidFill>
+          <a:srgbClr val="FFFFFF"/>
+        </a:solidFill>
+      </p:bgPr>
+    </p:bg>
+    <p:spTree>
+      <p:nvGrpSpPr>
+        <p:cNvPr id="1" name=""/>
+        <p:cNvGrpSpPr/>
+        <p:nvPr/>
+      </p:nvGrpSpPr>
+      <p:grpSpPr>
+        <a:xfrm>
+          <a:off x="0" y="0"/>
+          <a:ext cx="0" cy="0"/>
+          <a:chOff x="0" y="0"/>
+          <a:chExt cx="0" cy="0"/>
+        </a:xfrm>
+      </p:grpSpPr>
+      <p:sp>
+        <p:nvSpPr>
+          <p:cNvPr id="2" name="Text 0"/>
+          <p:cNvSpPr/>
+          <p:nvPr/>
+        </p:nvSpPr>
+        <p:spPr>
+          <a:xfrm>
+            <a:off x="658368" y="384048"/>
+            <a:ext cx="10972800" cy="274320"/>
+          </a:xfrm>
+          <a:prstGeom prst="rect">
+            <a:avLst/>
+          </a:prstGeom>
+          <a:noFill/>
+          <a:ln/>
+        </p:spPr>
+        <p:txBody>
+          <a:bodyPr wrap="square" lIns="0" tIns="0" rIns="0" bIns="0" rtlCol="0" anchor="ctr"/>
+          <a:lstStyle/>
+          <a:p>
+            <a:pPr indent="0" marL="0">
+              <a:buNone/>
+            </a:pPr>
+            <a:r>
+              <a:rPr lang="en-US" sz="1200" b="1" spc="300" kern="0" dirty="0">
+                <a:solidFill>
+                  <a:srgbClr val="0D9488"/>
+                </a:solidFill>
+                <a:latin typeface="Calibri" pitchFamily="34" charset="0"/>
+                <a:ea typeface="Calibri" pitchFamily="34" charset="-122"/>
+                <a:cs typeface="Calibri" pitchFamily="34" charset="-120"/>
+              </a:rPr>
+              <a:t>NEXT</a:t>
+            </a:r>
+            <a:endParaRPr lang="en-US" sz="1200" dirty="0"/>
+          </a:p>
+        </p:txBody>
+      </p:sp>
+      <p:sp>
+        <p:nvSpPr>
+          <p:cNvPr id="3" name="Text 1"/>
+          <p:cNvSpPr/>
+          <p:nvPr/>
+        </p:nvSpPr>
+        <p:spPr>
+          <a:xfrm>
+            <a:off x="640080" y="457200"/>
+            <a:ext cx="11064240" cy="713232"/>
+          </a:xfrm>
+          <a:prstGeom prst="rect">
+            <a:avLst/>
+          </a:prstGeom>
+          <a:noFill/>
+          <a:ln/>
+        </p:spPr>
+        <p:txBody>
+          <a:bodyPr wrap="square" lIns="0" tIns="0" rIns="0" bIns="0" rtlCol="0" anchor="ctr"/>
+          <a:lstStyle/>
+          <a:p>
+            <a:pPr indent="0" marL="0">
+              <a:buNone/>
+            </a:pPr>
+            <a:r>
+              <a:rPr lang="en-US" sz="2800" b="1" dirty="0">
+                <a:solidFill>
+                  <a:srgbClr val="1E293B"/>
+                </a:solidFill>
+                <a:latin typeface="Cambria" pitchFamily="34" charset="0"/>
+                <a:ea typeface="Cambria" pitchFamily="34" charset="-122"/>
+                <a:cs typeface="Cambria" pitchFamily="34" charset="-120"/>
+              </a:rPr>
+              <a:t>Between now and the 21st</a:t>
+            </a:r>
+            <a:endParaRPr lang="en-US" sz="2800" dirty="0"/>
+          </a:p>
+        </p:txBody>
+      </p:sp>
+      <p:sp>
+        <p:nvSpPr>
+          <p:cNvPr id="4" name="Shape 2"/>
+          <p:cNvSpPr/>
+          <p:nvPr/>
+        </p:nvSpPr>
+        <p:spPr>
+          <a:xfrm>
+            <a:off x="640080" y="1920240"/>
+            <a:ext cx="10881360" cy="960120"/>
+          </a:xfrm>
+          <a:prstGeom prst="roundRect">
+            <a:avLst>
+              <a:gd name="adj" fmla="val 8571"/>
+            </a:avLst>
+          </a:prstGeom>
+          <a:solidFill>
+            <a:srgbClr val="FFFFFF"/>
+          </a:solidFill>
+          <a:ln w="12700">
+            <a:solidFill>
+              <a:srgbClr val="E2E8F0"/>
+            </a:solidFill>
+            <a:prstDash val="solid"/>
+          </a:ln>
+          <a:effectLst>
+            <a:outerShdw sx="100000" sy="100000" kx="0" ky="0" algn="bl" rotWithShape="0" blurRad="114300" dist="38100" dir="5400000">
+              <a:srgbClr val="0F172A">
+                <a:alpha val="14000"/>
+              </a:srgbClr>
+            </a:outerShdw>
+          </a:effectLst>
+        </p:spPr>
+      </p:sp>
+      <p:sp>
+        <p:nvSpPr>
+          <p:cNvPr id="5" name="Shape 3"/>
+          <p:cNvSpPr/>
+          <p:nvPr/>
+        </p:nvSpPr>
+        <p:spPr>
+          <a:xfrm>
+            <a:off x="896112" y="2176272"/>
+            <a:ext cx="438912" cy="438912"/>
+          </a:xfrm>
+          <a:prstGeom prst="ellipse">
+            <a:avLst/>
+          </a:prstGeom>
+          <a:solidFill>
+            <a:srgbClr val="6D28D9"/>
+          </a:solidFill>
+          <a:ln/>
+        </p:spPr>
+      </p:sp>
+      <p:sp>
+        <p:nvSpPr>
+          <p:cNvPr id="6" name="Text 4"/>
+          <p:cNvSpPr/>
+          <p:nvPr/>
+        </p:nvSpPr>
+        <p:spPr>
+          <a:xfrm>
+            <a:off x="896112" y="2176272"/>
+            <a:ext cx="438912" cy="438912"/>
+          </a:xfrm>
+          <a:prstGeom prst="rect">
+            <a:avLst/>
+          </a:prstGeom>
+          <a:noFill/>
+          <a:ln/>
+        </p:spPr>
+        <p:txBody>
+          <a:bodyPr wrap="square" lIns="0" tIns="0" rIns="0" bIns="0" rtlCol="0" anchor="ctr"/>
+          <a:lstStyle/>
+          <a:p>
+            <a:pPr algn="ctr" indent="0" marL="0">
+              <a:buNone/>
+            </a:pPr>
+            <a:r>
+              <a:rPr lang="en-US" sz="1600" b="1" dirty="0">
+                <a:solidFill>
+                  <a:srgbClr val="FFFFFF"/>
+                </a:solidFill>
+                <a:latin typeface="Calibri" pitchFamily="34" charset="0"/>
+                <a:ea typeface="Calibri" pitchFamily="34" charset="-122"/>
+                <a:cs typeface="Calibri" pitchFamily="34" charset="-120"/>
+              </a:rPr>
+              <a:t>1</a:t>
+            </a:r>
+            <a:endParaRPr lang="en-US" sz="1600" dirty="0"/>
+          </a:p>
+        </p:txBody>
+      </p:sp>
+      <p:sp>
+        <p:nvSpPr>
+          <p:cNvPr id="7" name="Text 5"/>
+          <p:cNvSpPr/>
+          <p:nvPr/>
+        </p:nvSpPr>
+        <p:spPr>
+          <a:xfrm>
+            <a:off x="1517904" y="2103120"/>
+            <a:ext cx="3931920" cy="594360"/>
+          </a:xfrm>
+          <a:prstGeom prst="rect">
+            <a:avLst/>
+          </a:prstGeom>
+          <a:noFill/>
+          <a:ln/>
+        </p:spPr>
+        <p:txBody>
+          <a:bodyPr wrap="square" lIns="0" tIns="0" rIns="0" bIns="0" rtlCol="0" anchor="ctr"/>
+          <a:lstStyle/>
+          <a:p>
+            <a:pPr indent="0" marL="0">
+              <a:lnSpc>
+                <a:spcPct val="100000"/>
+              </a:lnSpc>
+              <a:buNone/>
+            </a:pPr>
+            <a:r>
+              <a:rPr lang="en-US" sz="1450" b="1" dirty="0">
+                <a:solidFill>
+                  <a:srgbClr val="1E293B"/>
+                </a:solidFill>
+                <a:latin typeface="Calibri" pitchFamily="34" charset="0"/>
+                <a:ea typeface="Calibri" pitchFamily="34" charset="-122"/>
+                <a:cs typeface="Calibri" pitchFamily="34" charset="-120"/>
+              </a:rPr>
+              <a:t>Download and process the remaining animals</a:t>
+            </a:r>
+            <a:endParaRPr lang="en-US" sz="1450" dirty="0"/>
+          </a:p>
+        </p:txBody>
+      </p:sp>
+      <p:sp>
+        <p:nvSpPr>
+          <p:cNvPr id="8" name="Text 6"/>
+          <p:cNvSpPr/>
+          <p:nvPr/>
+        </p:nvSpPr>
+        <p:spPr>
+          <a:xfrm>
+            <a:off x="5577840" y="2103120"/>
+            <a:ext cx="5669280" cy="594360"/>
+          </a:xfrm>
+          <a:prstGeom prst="rect">
+            <a:avLst/>
+          </a:prstGeom>
+          <a:noFill/>
+          <a:ln/>
+        </p:spPr>
+        <p:txBody>
+          <a:bodyPr wrap="square" lIns="0" tIns="0" rIns="0" bIns="0" rtlCol="0" anchor="ctr"/>
+          <a:lstStyle/>
+          <a:p>
+            <a:pPr indent="0" marL="0">
+              <a:lnSpc>
+                <a:spcPct val="102000"/>
+              </a:lnSpc>
+              <a:buNone/>
+            </a:pPr>
+            <a:r>
+              <a:rPr lang="en-US" sz="1250" dirty="0">
+                <a:solidFill>
+                  <a:srgbClr val="64748B"/>
+                </a:solidFill>
+                <a:latin typeface="Calibri" pitchFamily="34" charset="0"/>
+                <a:ea typeface="Calibri" pitchFamily="34" charset="-122"/>
+                <a:cs typeface="Calibri" pitchFamily="34" charset="-120"/>
+              </a:rPr>
+              <a:t>7, 8, 13, 14, 15 (down) plus 1 and 6 (failed up — negative controls). Takes n from 5 to about 12.</a:t>
+            </a:r>
+            <a:endParaRPr lang="en-US" sz="1250" dirty="0"/>
+          </a:p>
+        </p:txBody>
+      </p:sp>
+      <p:sp>
+        <p:nvSpPr>
+          <p:cNvPr id="9" name="Shape 7"/>
+          <p:cNvSpPr/>
+          <p:nvPr/>
+        </p:nvSpPr>
+        <p:spPr>
+          <a:xfrm>
+            <a:off x="640080" y="2990088"/>
+            <a:ext cx="10881360" cy="960120"/>
+          </a:xfrm>
+          <a:prstGeom prst="roundRect">
+            <a:avLst>
+              <a:gd name="adj" fmla="val 8571"/>
+            </a:avLst>
+          </a:prstGeom>
+          <a:solidFill>
+            <a:srgbClr val="FFFFFF"/>
+          </a:solidFill>
+          <a:ln w="12700">
+            <a:solidFill>
+              <a:srgbClr val="E2E8F0"/>
+            </a:solidFill>
+            <a:prstDash val="solid"/>
+          </a:ln>
+          <a:effectLst>
+            <a:outerShdw sx="100000" sy="100000" kx="0" ky="0" algn="bl" rotWithShape="0" blurRad="114300" dist="38100" dir="5400000">
+              <a:srgbClr val="0F172A">
+                <a:alpha val="14000"/>
+              </a:srgbClr>
+            </a:outerShdw>
+          </a:effectLst>
+        </p:spPr>
+      </p:sp>
+      <p:sp>
+        <p:nvSpPr>
+          <p:cNvPr id="10" name="Shape 8"/>
+          <p:cNvSpPr/>
+          <p:nvPr/>
+        </p:nvSpPr>
+        <p:spPr>
+          <a:xfrm>
+            <a:off x="896112" y="3246120"/>
+            <a:ext cx="438912" cy="438912"/>
+          </a:xfrm>
+          <a:prstGeom prst="ellipse">
+            <a:avLst/>
+          </a:prstGeom>
+          <a:solidFill>
+            <a:srgbClr val="6D28D9"/>
+          </a:solidFill>
+          <a:ln/>
+        </p:spPr>
+      </p:sp>
+      <p:sp>
+        <p:nvSpPr>
+          <p:cNvPr id="11" name="Text 9"/>
+          <p:cNvSpPr/>
+          <p:nvPr/>
+        </p:nvSpPr>
+        <p:spPr>
+          <a:xfrm>
+            <a:off x="896112" y="3246120"/>
+            <a:ext cx="438912" cy="438912"/>
+          </a:xfrm>
+          <a:prstGeom prst="rect">
+            <a:avLst/>
+          </a:prstGeom>
+          <a:noFill/>
+          <a:ln/>
+        </p:spPr>
+        <p:txBody>
+          <a:bodyPr wrap="square" lIns="0" tIns="0" rIns="0" bIns="0" rtlCol="0" anchor="ctr"/>
+          <a:lstStyle/>
+          <a:p>
+            <a:pPr algn="ctr" indent="0" marL="0">
+              <a:buNone/>
+            </a:pPr>
+            <a:r>
+              <a:rPr lang="en-US" sz="1600" b="1" dirty="0">
+                <a:solidFill>
+                  <a:srgbClr val="FFFFFF"/>
+                </a:solidFill>
+                <a:latin typeface="Calibri" pitchFamily="34" charset="0"/>
+                <a:ea typeface="Calibri" pitchFamily="34" charset="-122"/>
+                <a:cs typeface="Calibri" pitchFamily="34" charset="-120"/>
+              </a:rPr>
+              <a:t>2</a:t>
+            </a:r>
+            <a:endParaRPr lang="en-US" sz="1600" dirty="0"/>
+          </a:p>
+        </p:txBody>
+      </p:sp>
+      <p:sp>
+        <p:nvSpPr>
+          <p:cNvPr id="12" name="Text 10"/>
+          <p:cNvSpPr/>
+          <p:nvPr/>
+        </p:nvSpPr>
+        <p:spPr>
+          <a:xfrm>
+            <a:off x="1517904" y="3172968"/>
+            <a:ext cx="3931920" cy="594360"/>
+          </a:xfrm>
+          <a:prstGeom prst="rect">
+            <a:avLst/>
+          </a:prstGeom>
+          <a:noFill/>
+          <a:ln/>
+        </p:spPr>
+        <p:txBody>
+          <a:bodyPr wrap="square" lIns="0" tIns="0" rIns="0" bIns="0" rtlCol="0" anchor="ctr"/>
+          <a:lstStyle/>
+          <a:p>
+            <a:pPr indent="0" marL="0">
+              <a:lnSpc>
+                <a:spcPct val="100000"/>
+              </a:lnSpc>
+              <a:buNone/>
+            </a:pPr>
+            <a:r>
+              <a:rPr lang="en-US" sz="1450" b="1" dirty="0">
+                <a:solidFill>
+                  <a:srgbClr val="1E293B"/>
+                </a:solidFill>
+                <a:latin typeface="Calibri" pitchFamily="34" charset="0"/>
+                <a:ea typeface="Calibri" pitchFamily="34" charset="-122"/>
+                <a:cs typeface="Calibri" pitchFamily="34" charset="-120"/>
+              </a:rPr>
+              <a:t>Re-run everything at the larger n</a:t>
+            </a:r>
+            <a:endParaRPr lang="en-US" sz="1450" dirty="0"/>
+          </a:p>
+        </p:txBody>
+      </p:sp>
+      <p:sp>
+        <p:nvSpPr>
+          <p:cNvPr id="13" name="Text 11"/>
+          <p:cNvSpPr/>
+          <p:nvPr/>
+        </p:nvSpPr>
+        <p:spPr>
+          <a:xfrm>
+            <a:off x="5577840" y="3172968"/>
+            <a:ext cx="5669280" cy="594360"/>
+          </a:xfrm>
+          <a:prstGeom prst="rect">
+            <a:avLst/>
+          </a:prstGeom>
+          <a:noFill/>
+          <a:ln/>
+        </p:spPr>
+        <p:txBody>
+          <a:bodyPr wrap="square" lIns="0" tIns="0" rIns="0" bIns="0" rtlCol="0" anchor="ctr"/>
+          <a:lstStyle/>
+          <a:p>
+            <a:pPr indent="0" marL="0">
+              <a:lnSpc>
+                <a:spcPct val="102000"/>
+              </a:lnSpc>
+              <a:buNone/>
+            </a:pPr>
+            <a:r>
+              <a:rPr lang="en-US" sz="1250" dirty="0">
+                <a:solidFill>
+                  <a:srgbClr val="64748B"/>
+                </a:solidFill>
+                <a:latin typeface="Calibri" pitchFamily="34" charset="0"/>
+                <a:ea typeface="Calibri" pitchFamily="34" charset="-122"/>
+                <a:cs typeface="Calibri" pitchFamily="34" charset="-120"/>
+              </a:rPr>
+              <a:t>The scaling correlation is the analysis this powers. Fully automated — two commands per animal.</a:t>
+            </a:r>
+            <a:endParaRPr lang="en-US" sz="1250" dirty="0"/>
+          </a:p>
+        </p:txBody>
+      </p:sp>
+      <p:sp>
+        <p:nvSpPr>
+          <p:cNvPr id="14" name="Shape 12"/>
+          <p:cNvSpPr/>
+          <p:nvPr/>
+        </p:nvSpPr>
+        <p:spPr>
+          <a:xfrm>
+            <a:off x="640080" y="4059936"/>
+            <a:ext cx="10881360" cy="960120"/>
+          </a:xfrm>
+          <a:prstGeom prst="roundRect">
+            <a:avLst>
+              <a:gd name="adj" fmla="val 8571"/>
+            </a:avLst>
+          </a:prstGeom>
+          <a:solidFill>
+            <a:srgbClr val="FFFFFF"/>
+          </a:solidFill>
+          <a:ln w="12700">
+            <a:solidFill>
+              <a:srgbClr val="E2E8F0"/>
+            </a:solidFill>
+            <a:prstDash val="solid"/>
+          </a:ln>
+          <a:effectLst>
+            <a:outerShdw sx="100000" sy="100000" kx="0" ky="0" algn="bl" rotWithShape="0" blurRad="114300" dist="38100" dir="5400000">
+              <a:srgbClr val="0F172A">
+                <a:alpha val="14000"/>
+              </a:srgbClr>
+            </a:outerShdw>
+          </a:effectLst>
+        </p:spPr>
+      </p:sp>
+      <p:sp>
+        <p:nvSpPr>
+          <p:cNvPr id="15" name="Shape 13"/>
+          <p:cNvSpPr/>
+          <p:nvPr/>
+        </p:nvSpPr>
+        <p:spPr>
+          <a:xfrm>
+            <a:off x="896112" y="4315968"/>
+            <a:ext cx="438912" cy="438912"/>
+          </a:xfrm>
+          <a:prstGeom prst="ellipse">
+            <a:avLst/>
+          </a:prstGeom>
+          <a:solidFill>
+            <a:srgbClr val="0D9488"/>
+          </a:solidFill>
+          <a:ln/>
+        </p:spPr>
+      </p:sp>
+      <p:sp>
+        <p:nvSpPr>
+          <p:cNvPr id="16" name="Text 14"/>
+          <p:cNvSpPr/>
+          <p:nvPr/>
+        </p:nvSpPr>
+        <p:spPr>
+          <a:xfrm>
+            <a:off x="896112" y="4315968"/>
+            <a:ext cx="438912" cy="438912"/>
+          </a:xfrm>
+          <a:prstGeom prst="rect">
+            <a:avLst/>
+          </a:prstGeom>
+          <a:noFill/>
+          <a:ln/>
+        </p:spPr>
+        <p:txBody>
+          <a:bodyPr wrap="square" lIns="0" tIns="0" rIns="0" bIns="0" rtlCol="0" anchor="ctr"/>
+          <a:lstStyle/>
+          <a:p>
+            <a:pPr algn="ctr" indent="0" marL="0">
+              <a:buNone/>
+            </a:pPr>
+            <a:r>
+              <a:rPr lang="en-US" sz="1600" b="1" dirty="0">
+                <a:solidFill>
+                  <a:srgbClr val="FFFFFF"/>
+                </a:solidFill>
+                <a:latin typeface="Calibri" pitchFamily="34" charset="0"/>
+                <a:ea typeface="Calibri" pitchFamily="34" charset="-122"/>
+                <a:cs typeface="Calibri" pitchFamily="34" charset="-120"/>
+              </a:rPr>
+              <a:t>3</a:t>
+            </a:r>
+            <a:endParaRPr lang="en-US" sz="1600" dirty="0"/>
+          </a:p>
+        </p:txBody>
+      </p:sp>
+      <p:sp>
+        <p:nvSpPr>
+          <p:cNvPr id="17" name="Text 15"/>
+          <p:cNvSpPr/>
+          <p:nvPr/>
+        </p:nvSpPr>
+        <p:spPr>
+          <a:xfrm>
+            <a:off x="1517904" y="4242816"/>
+            <a:ext cx="3931920" cy="594360"/>
+          </a:xfrm>
+          <a:prstGeom prst="rect">
+            <a:avLst/>
+          </a:prstGeom>
+          <a:noFill/>
+          <a:ln/>
+        </p:spPr>
+        <p:txBody>
+          <a:bodyPr wrap="square" lIns="0" tIns="0" rIns="0" bIns="0" rtlCol="0" anchor="ctr"/>
+          <a:lstStyle/>
+          <a:p>
+            <a:pPr indent="0" marL="0">
+              <a:lnSpc>
+                <a:spcPct val="100000"/>
+              </a:lnSpc>
+              <a:buNone/>
+            </a:pPr>
+            <a:r>
+              <a:rPr lang="en-US" sz="1450" b="1" dirty="0">
+                <a:solidFill>
+                  <a:srgbClr val="1E293B"/>
+                </a:solidFill>
+                <a:latin typeface="Calibri" pitchFamily="34" charset="0"/>
+                <a:ea typeface="Calibri" pitchFamily="34" charset="-122"/>
+                <a:cs typeface="Calibri" pitchFamily="34" charset="-120"/>
+              </a:rPr>
+              <a:t>Build the presentation for your group</a:t>
+            </a:r>
+            <a:endParaRPr lang="en-US" sz="1450" dirty="0"/>
+          </a:p>
+        </p:txBody>
+      </p:sp>
+      <p:sp>
+        <p:nvSpPr>
+          <p:cNvPr id="18" name="Text 16"/>
+          <p:cNvSpPr/>
+          <p:nvPr/>
+        </p:nvSpPr>
+        <p:spPr>
+          <a:xfrm>
+            <a:off x="5577840" y="4242816"/>
+            <a:ext cx="5669280" cy="594360"/>
+          </a:xfrm>
+          <a:prstGeom prst="rect">
+            <a:avLst/>
+          </a:prstGeom>
+          <a:noFill/>
+          <a:ln/>
+        </p:spPr>
+        <p:txBody>
+          <a:bodyPr wrap="square" lIns="0" tIns="0" rIns="0" bIns="0" rtlCol="0" anchor="ctr"/>
+          <a:lstStyle/>
+          <a:p>
+            <a:pPr indent="0" marL="0">
+              <a:lnSpc>
+                <a:spcPct val="102000"/>
+              </a:lnSpc>
+              <a:buNone/>
+            </a:pPr>
+            <a:r>
+              <a:rPr lang="en-US" sz="1250" dirty="0">
+                <a:solidFill>
+                  <a:srgbClr val="64748B"/>
+                </a:solidFill>
+                <a:latin typeface="Calibri" pitchFamily="34" charset="0"/>
+                <a:ea typeface="Calibri" pitchFamily="34" charset="-122"/>
+                <a:cs typeface="Calibri" pitchFamily="34" charset="-120"/>
+              </a:rPr>
+              <a:t>Pipeline explained with a data-flow figure, at the level you described.</a:t>
+            </a:r>
+            <a:endParaRPr lang="en-US" sz="1250" dirty="0"/>
+          </a:p>
+        </p:txBody>
+      </p:sp>
+      <p:sp>
+        <p:nvSpPr>
+          <p:cNvPr id="19" name="Shape 17"/>
+          <p:cNvSpPr/>
+          <p:nvPr/>
+        </p:nvSpPr>
+        <p:spPr>
+          <a:xfrm>
+            <a:off x="640080" y="5129784"/>
+            <a:ext cx="10881360" cy="960120"/>
+          </a:xfrm>
+          <a:prstGeom prst="roundRect">
+            <a:avLst>
+              <a:gd name="adj" fmla="val 8571"/>
+            </a:avLst>
+          </a:prstGeom>
+          <a:solidFill>
+            <a:srgbClr val="FFFFFF"/>
+          </a:solidFill>
+          <a:ln w="12700">
+            <a:solidFill>
+              <a:srgbClr val="E2E8F0"/>
+            </a:solidFill>
+            <a:prstDash val="solid"/>
+          </a:ln>
+          <a:effectLst>
+            <a:outerShdw sx="100000" sy="100000" kx="0" ky="0" algn="bl" rotWithShape="0" blurRad="114300" dist="38100" dir="5400000">
+              <a:srgbClr val="0F172A">
+                <a:alpha val="14000"/>
+              </a:srgbClr>
+            </a:outerShdw>
+          </a:effectLst>
+        </p:spPr>
+      </p:sp>
+      <p:sp>
+        <p:nvSpPr>
+          <p:cNvPr id="20" name="Shape 18"/>
+          <p:cNvSpPr/>
+          <p:nvPr/>
+        </p:nvSpPr>
+        <p:spPr>
+          <a:xfrm>
+            <a:off x="896112" y="5385816"/>
+            <a:ext cx="438912" cy="438912"/>
+          </a:xfrm>
+          <a:prstGeom prst="ellipse">
+            <a:avLst/>
+          </a:prstGeom>
+          <a:solidFill>
+            <a:srgbClr val="0D9488"/>
+          </a:solidFill>
+          <a:ln/>
+        </p:spPr>
+      </p:sp>
+      <p:sp>
+        <p:nvSpPr>
+          <p:cNvPr id="21" name="Text 19"/>
+          <p:cNvSpPr/>
+          <p:nvPr/>
+        </p:nvSpPr>
+        <p:spPr>
+          <a:xfrm>
+            <a:off x="896112" y="5385816"/>
+            <a:ext cx="438912" cy="438912"/>
+          </a:xfrm>
+          <a:prstGeom prst="rect">
+            <a:avLst/>
+          </a:prstGeom>
+          <a:noFill/>
+          <a:ln/>
+        </p:spPr>
+        <p:txBody>
+          <a:bodyPr wrap="square" lIns="0" tIns="0" rIns="0" bIns="0" rtlCol="0" anchor="ctr"/>
+          <a:lstStyle/>
+          <a:p>
+            <a:pPr algn="ctr" indent="0" marL="0">
+              <a:buNone/>
+            </a:pPr>
+            <a:r>
+              <a:rPr lang="en-US" sz="1600" b="1" dirty="0">
+                <a:solidFill>
+                  <a:srgbClr val="FFFFFF"/>
+                </a:solidFill>
+                <a:latin typeface="Calibri" pitchFamily="34" charset="0"/>
+                <a:ea typeface="Calibri" pitchFamily="34" charset="-122"/>
+                <a:cs typeface="Calibri" pitchFamily="34" charset="-120"/>
+              </a:rPr>
+              <a:t>4</a:t>
+            </a:r>
+            <a:endParaRPr lang="en-US" sz="1600" dirty="0"/>
+          </a:p>
+        </p:txBody>
+      </p:sp>
+      <p:sp>
+        <p:nvSpPr>
+          <p:cNvPr id="22" name="Text 20"/>
+          <p:cNvSpPr/>
+          <p:nvPr/>
+        </p:nvSpPr>
+        <p:spPr>
+          <a:xfrm>
+            <a:off x="1517904" y="5312664"/>
+            <a:ext cx="3931920" cy="594360"/>
+          </a:xfrm>
+          <a:prstGeom prst="rect">
+            <a:avLst/>
+          </a:prstGeom>
+          <a:noFill/>
+          <a:ln/>
+        </p:spPr>
+        <p:txBody>
+          <a:bodyPr wrap="square" lIns="0" tIns="0" rIns="0" bIns="0" rtlCol="0" anchor="ctr"/>
+          <a:lstStyle/>
+          <a:p>
+            <a:pPr indent="0" marL="0">
+              <a:lnSpc>
+                <a:spcPct val="100000"/>
+              </a:lnSpc>
+              <a:buNone/>
+            </a:pPr>
+            <a:r>
+              <a:rPr lang="en-US" sz="1450" b="1" dirty="0">
+                <a:solidFill>
+                  <a:srgbClr val="1E293B"/>
+                </a:solidFill>
+                <a:latin typeface="Calibri" pitchFamily="34" charset="0"/>
+                <a:ea typeface="Calibri" pitchFamily="34" charset="-122"/>
+                <a:cs typeface="Calibri" pitchFamily="34" charset="-120"/>
+              </a:rPr>
+              <a:t>Preview it with you</a:t>
+            </a:r>
+            <a:endParaRPr lang="en-US" sz="1450" dirty="0"/>
+          </a:p>
+        </p:txBody>
+      </p:sp>
+      <p:sp>
+        <p:nvSpPr>
+          <p:cNvPr id="23" name="Text 21"/>
+          <p:cNvSpPr/>
+          <p:nvPr/>
+        </p:nvSpPr>
+        <p:spPr>
+          <a:xfrm>
+            <a:off x="5577840" y="5312664"/>
+            <a:ext cx="5669280" cy="594360"/>
+          </a:xfrm>
+          <a:prstGeom prst="rect">
+            <a:avLst/>
+          </a:prstGeom>
+          <a:noFill/>
+          <a:ln/>
+        </p:spPr>
+        <p:txBody>
+          <a:bodyPr wrap="square" lIns="0" tIns="0" rIns="0" bIns="0" rtlCol="0" anchor="ctr"/>
+          <a:lstStyle/>
+          <a:p>
+            <a:pPr indent="0" marL="0">
+              <a:lnSpc>
+                <a:spcPct val="102000"/>
+              </a:lnSpc>
+              <a:buNone/>
+            </a:pPr>
+            <a:r>
+              <a:rPr lang="en-US" sz="1250" dirty="0">
+                <a:solidFill>
+                  <a:srgbClr val="64748B"/>
+                </a:solidFill>
+                <a:latin typeface="Calibri" pitchFamily="34" charset="0"/>
+                <a:ea typeface="Calibri" pitchFamily="34" charset="-122"/>
+                <a:cs typeface="Calibri" pitchFamily="34" charset="-120"/>
+              </a:rPr>
+              <a:t>Before the 21st, so it's on par with what your group expects.</a:t>
+            </a:r>
+            <a:endParaRPr lang="en-US" sz="1250" dirty="0"/>
+          </a:p>
+        </p:txBody>
+      </p:sp>
+      <p:sp>
+        <p:nvSpPr>
+          <p:cNvPr id="24" name="Shape 22"/>
+          <p:cNvSpPr/>
+          <p:nvPr/>
+        </p:nvSpPr>
+        <p:spPr>
+          <a:xfrm>
+            <a:off x="640080" y="6263640"/>
+            <a:ext cx="10881360" cy="685800"/>
+          </a:xfrm>
+          <a:prstGeom prst="roundRect">
+            <a:avLst>
+              <a:gd name="adj" fmla="val 12000"/>
+            </a:avLst>
+          </a:prstGeom>
+          <a:solidFill>
+            <a:srgbClr val="F5F3FF"/>
+          </a:solidFill>
+          <a:ln w="12700">
+            <a:solidFill>
+              <a:srgbClr val="E2E8F0"/>
+            </a:solidFill>
+            <a:prstDash val="solid"/>
+          </a:ln>
+          <a:effectLst>
+            <a:outerShdw sx="100000" sy="100000" kx="0" ky="0" algn="bl" rotWithShape="0" blurRad="114300" dist="38100" dir="5400000">
+              <a:srgbClr val="0F172A">
+                <a:alpha val="14000"/>
+              </a:srgbClr>
+            </a:outerShdw>
+          </a:effectLst>
+        </p:spPr>
+      </p:sp>
+      <p:sp>
+        <p:nvSpPr>
+          <p:cNvPr id="25" name="Text 23"/>
+          <p:cNvSpPr/>
+          <p:nvPr/>
+        </p:nvSpPr>
+        <p:spPr>
+          <a:xfrm>
+            <a:off x="960120" y="6382512"/>
+            <a:ext cx="10241280" cy="457200"/>
+          </a:xfrm>
+          <a:prstGeom prst="rect">
+            <a:avLst/>
+          </a:prstGeom>
+          <a:noFill/>
+          <a:ln/>
+        </p:spPr>
+        <p:txBody>
+          <a:bodyPr wrap="square" lIns="0" tIns="0" rIns="0" bIns="0" rtlCol="0" anchor="ctr"/>
+          <a:lstStyle/>
+          <a:p>
+            <a:pPr indent="0" marL="0">
+              <a:buNone/>
+            </a:pPr>
+            <a:r>
+              <a:rPr lang="en-US" sz="1350" b="1" dirty="0">
+                <a:solidFill>
+                  <a:srgbClr val="6D28D9"/>
+                </a:solidFill>
+                <a:latin typeface="Calibri" pitchFamily="34" charset="0"/>
+                <a:ea typeface="Calibri" pitchFamily="34" charset="-122"/>
+                <a:cs typeface="Calibri" pitchFamily="34" charset="-120"/>
+              </a:rPr>
+              <a:t>Question for you: with the up group capped at two, is the scaling analysis the right thing to build the paper on?</a:t>
+            </a:r>
+            <a:endParaRPr lang="en-US" sz="1350" dirty="0"/>
           </a:p>
         </p:txBody>
       </p:sp>
@@ -3750,13 +4730,13 @@
             <a:r>
               <a:rPr lang="en-US" sz="1200" b="1" spc="300" kern="0" dirty="0">
                 <a:solidFill>
-                  <a:srgbClr val="D97706"/>
-                </a:solidFill>
-                <a:latin typeface="Calibri" pitchFamily="34" charset="0"/>
-                <a:ea typeface="Calibri" pitchFamily="34" charset="-122"/>
-                <a:cs typeface="Calibri" pitchFamily="34" charset="-120"/>
-              </a:rPr>
-              <a:t>ASK 2 · THE CORRECTION</a:t>
+                  <a:srgbClr val="16A34A"/>
+                </a:solidFill>
+                <a:latin typeface="Calibri" pitchFamily="34" charset="0"/>
+                <a:ea typeface="Calibri" pitchFamily="34" charset="-122"/>
+                <a:cs typeface="Calibri" pitchFamily="34" charset="-120"/>
+              </a:rPr>
+              <a:t>THE HEADLINE</a:t>
             </a:r>
             <a:endParaRPr lang="en-US" sz="1200" dirty="0"/>
           </a:p>
@@ -3795,7 +4775,7 @@
                 <a:ea typeface="Cambria" pitchFamily="34" charset="-122"/>
                 <a:cs typeface="Cambria" pitchFamily="34" charset="-120"/>
               </a:rPr>
-              <a:t>The 0.35 was inflated. The real number is 0.04.</a:t>
+              <a:t>Small effect, near-perfect reliability</a:t>
             </a:r>
             <a:endParaRPr lang="en-US" sz="2800" dirty="0"/>
           </a:p>
@@ -3803,22 +4783,61 @@
       </p:sp>
       <p:sp>
         <p:nvSpPr>
-          <p:cNvPr id="4" name="Shape 2"/>
-          <p:cNvSpPr/>
-          <p:nvPr/>
-        </p:nvSpPr>
-        <p:spPr>
-          <a:xfrm>
-            <a:off x="640080" y="1783080"/>
-            <a:ext cx="5349240" cy="2286000"/>
+          <p:cNvPr id="4" name="Text 2"/>
+          <p:cNvSpPr/>
+          <p:nvPr/>
+        </p:nvSpPr>
+        <p:spPr>
+          <a:xfrm>
+            <a:off x="640080" y="1645920"/>
+            <a:ext cx="10881360" cy="502920"/>
+          </a:xfrm>
+          <a:prstGeom prst="rect">
+            <a:avLst/>
+          </a:prstGeom>
+          <a:noFill/>
+          <a:ln/>
+        </p:spPr>
+        <p:txBody>
+          <a:bodyPr wrap="square" lIns="0" tIns="0" rIns="0" bIns="0" rtlCol="0" anchor="ctr"/>
+          <a:lstStyle/>
+          <a:p>
+            <a:pPr indent="0" marL="0">
+              <a:buNone/>
+            </a:pPr>
+            <a:r>
+              <a:rPr lang="en-US" sz="1500" dirty="0">
+                <a:solidFill>
+                  <a:srgbClr val="1E293B"/>
+                </a:solidFill>
+                <a:latin typeface="Calibri" pitchFamily="34" charset="0"/>
+                <a:ea typeface="Calibri" pitchFamily="34" charset="-122"/>
+                <a:cs typeface="Calibri" pitchFamily="34" charset="-120"/>
+              </a:rPr>
+              <a:t>For each five-day block we ask whether cortex beats a shuffle of that block's own labels. It does, almost every time.</a:t>
+            </a:r>
+            <a:endParaRPr lang="en-US" sz="1500" dirty="0"/>
+          </a:p>
+        </p:txBody>
+      </p:sp>
+      <p:sp>
+        <p:nvSpPr>
+          <p:cNvPr id="5" name="Shape 3"/>
+          <p:cNvSpPr/>
+          <p:nvPr/>
+        </p:nvSpPr>
+        <p:spPr>
+          <a:xfrm>
+            <a:off x="640080" y="2286000"/>
+            <a:ext cx="3538728" cy="1828800"/>
           </a:xfrm>
           <a:prstGeom prst="roundRect">
             <a:avLst>
-              <a:gd name="adj" fmla="val 3600"/>
+              <a:gd name="adj" fmla="val 4500"/>
             </a:avLst>
           </a:prstGeom>
           <a:solidFill>
-            <a:srgbClr val="F1F5F9"/>
+            <a:srgbClr val="FFFFFF"/>
           </a:solidFill>
           <a:ln w="12700">
             <a:solidFill>
@@ -3837,99 +4856,880 @@
       </p:sp>
       <p:sp>
         <p:nvSpPr>
-          <p:cNvPr id="5" name="Text 3"/>
-          <p:cNvSpPr/>
-          <p:nvPr/>
-        </p:nvSpPr>
-        <p:spPr>
-          <a:xfrm>
-            <a:off x="914400" y="2011680"/>
-            <a:ext cx="4572000" cy="320040"/>
-          </a:xfrm>
-          <a:prstGeom prst="rect">
-            <a:avLst/>
-          </a:prstGeom>
-          <a:noFill/>
-          <a:ln/>
-        </p:spPr>
-        <p:txBody>
-          <a:bodyPr wrap="square" lIns="0" tIns="0" rIns="0" bIns="0" rtlCol="0" anchor="ctr"/>
-          <a:lstStyle/>
-          <a:p>
-            <a:pPr indent="0" marL="0">
-              <a:buNone/>
-            </a:pPr>
-            <a:r>
-              <a:rPr lang="en-US" sz="1500" b="1" dirty="0">
-                <a:solidFill>
-                  <a:srgbClr val="D97706"/>
-                </a:solidFill>
-                <a:latin typeface="Calibri" pitchFamily="34" charset="0"/>
-                <a:ea typeface="Calibri" pitchFamily="34" charset="-122"/>
-                <a:cs typeface="Calibri" pitchFamily="34" charset="-120"/>
-              </a:rPr>
-              <a:t>What was wrong</a:t>
-            </a:r>
-            <a:endParaRPr lang="en-US" sz="1500" dirty="0"/>
-          </a:p>
-        </p:txBody>
-      </p:sp>
-      <p:sp>
-        <p:nvSpPr>
           <p:cNvPr id="6" name="Text 4"/>
           <p:cNvSpPr/>
           <p:nvPr/>
         </p:nvSpPr>
         <p:spPr>
           <a:xfrm>
-            <a:off x="914400" y="2423160"/>
-            <a:ext cx="4846320" cy="1463040"/>
-          </a:xfrm>
-          <a:prstGeom prst="rect">
-            <a:avLst/>
-          </a:prstGeom>
-          <a:noFill/>
-          <a:ln/>
-        </p:spPr>
-        <p:txBody>
-          <a:bodyPr wrap="square" lIns="0" tIns="0" rIns="0" bIns="0" rtlCol="0" anchor="ctr"/>
-          <a:lstStyle/>
-          <a:p>
-            <a:pPr indent="0" marL="0">
-              <a:lnSpc>
-                <a:spcPct val="105000"/>
-              </a:lnSpc>
-              <a:buNone/>
-            </a:pPr>
-            <a:r>
-              <a:rPr lang="en-US" sz="1350" dirty="0">
-                <a:solidFill>
-                  <a:srgbClr val="1E293B"/>
-                </a:solidFill>
-                <a:latin typeface="Calibri" pitchFamily="34" charset="0"/>
-                <a:ea typeface="Calibri" pitchFamily="34" charset="-122"/>
-                <a:cs typeface="Calibri" pitchFamily="34" charset="-120"/>
-              </a:rPr>
-              <a:t>I removed stimulus and background across ALL trials at once, then measured cortex within each 5-day block. If the stimulus–reflex relationship shifts between blocks, that leaves stimulus variance behind — and cortex tracks stimulus.</a:t>
-            </a:r>
-            <a:endParaRPr lang="en-US" sz="1350" dirty="0"/>
-          </a:p>
-        </p:txBody>
-      </p:sp>
-      <p:sp>
-        <p:nvSpPr>
-          <p:cNvPr id="7" name="Shape 5"/>
-          <p:cNvSpPr/>
-          <p:nvPr/>
-        </p:nvSpPr>
-        <p:spPr>
-          <a:xfrm>
-            <a:off x="6172200" y="1783080"/>
-            <a:ext cx="5349240" cy="2286000"/>
+            <a:off x="640080" y="2487168"/>
+            <a:ext cx="3538728" cy="868680"/>
+          </a:xfrm>
+          <a:prstGeom prst="rect">
+            <a:avLst/>
+          </a:prstGeom>
+          <a:noFill/>
+          <a:ln/>
+        </p:spPr>
+        <p:txBody>
+          <a:bodyPr wrap="square" lIns="0" tIns="0" rIns="0" bIns="0" rtlCol="0" anchor="ctr"/>
+          <a:lstStyle/>
+          <a:p>
+            <a:pPr algn="ctr" indent="0" marL="0">
+              <a:buNone/>
+            </a:pPr>
+            <a:r>
+              <a:rPr lang="en-US" sz="3600" b="1" dirty="0">
+                <a:solidFill>
+                  <a:srgbClr val="16A34A"/>
+                </a:solidFill>
+                <a:latin typeface="Cambria" pitchFamily="34" charset="0"/>
+                <a:ea typeface="Cambria" pitchFamily="34" charset="-122"/>
+                <a:cs typeface="Cambria" pitchFamily="34" charset="-120"/>
+              </a:rPr>
+              <a:t>99 / 101</a:t>
+            </a:r>
+            <a:endParaRPr lang="en-US" sz="3600" dirty="0"/>
+          </a:p>
+        </p:txBody>
+      </p:sp>
+      <p:sp>
+        <p:nvSpPr>
+          <p:cNvPr id="7" name="Text 5"/>
+          <p:cNvSpPr/>
+          <p:nvPr/>
+        </p:nvSpPr>
+        <p:spPr>
+          <a:xfrm>
+            <a:off x="640080" y="3383280"/>
+            <a:ext cx="3538728" cy="457200"/>
+          </a:xfrm>
+          <a:prstGeom prst="rect">
+            <a:avLst/>
+          </a:prstGeom>
+          <a:noFill/>
+          <a:ln/>
+        </p:spPr>
+        <p:txBody>
+          <a:bodyPr wrap="square" lIns="0" tIns="0" rIns="0" bIns="0" rtlCol="0" anchor="ctr"/>
+          <a:lstStyle/>
+          <a:p>
+            <a:pPr algn="ctr" indent="0" marL="0">
+              <a:buNone/>
+            </a:pPr>
+            <a:r>
+              <a:rPr lang="en-US" sz="1300" dirty="0">
+                <a:solidFill>
+                  <a:srgbClr val="64748B"/>
+                </a:solidFill>
+                <a:latin typeface="Calibri" pitchFamily="34" charset="0"/>
+                <a:ea typeface="Calibri" pitchFamily="34" charset="-122"/>
+                <a:cs typeface="Calibri" pitchFamily="34" charset="-120"/>
+              </a:rPr>
+              <a:t>blocks above the null</a:t>
+            </a:r>
+            <a:endParaRPr lang="en-US" sz="1300" dirty="0"/>
+          </a:p>
+        </p:txBody>
+      </p:sp>
+      <p:sp>
+        <p:nvSpPr>
+          <p:cNvPr id="8" name="Shape 6"/>
+          <p:cNvSpPr/>
+          <p:nvPr/>
+        </p:nvSpPr>
+        <p:spPr>
+          <a:xfrm>
+            <a:off x="4370832" y="2286000"/>
+            <a:ext cx="3538728" cy="1828800"/>
           </a:xfrm>
           <a:prstGeom prst="roundRect">
             <a:avLst>
-              <a:gd name="adj" fmla="val 3600"/>
+              <a:gd name="adj" fmla="val 4500"/>
+            </a:avLst>
+          </a:prstGeom>
+          <a:solidFill>
+            <a:srgbClr val="FFFFFF"/>
+          </a:solidFill>
+          <a:ln w="12700">
+            <a:solidFill>
+              <a:srgbClr val="E2E8F0"/>
+            </a:solidFill>
+            <a:prstDash val="solid"/>
+          </a:ln>
+          <a:effectLst>
+            <a:outerShdw sx="100000" sy="100000" kx="0" ky="0" algn="bl" rotWithShape="0" blurRad="114300" dist="38100" dir="5400000">
+              <a:srgbClr val="0F172A">
+                <a:alpha val="14000"/>
+              </a:srgbClr>
+            </a:outerShdw>
+          </a:effectLst>
+        </p:spPr>
+      </p:sp>
+      <p:sp>
+        <p:nvSpPr>
+          <p:cNvPr id="9" name="Text 7"/>
+          <p:cNvSpPr/>
+          <p:nvPr/>
+        </p:nvSpPr>
+        <p:spPr>
+          <a:xfrm>
+            <a:off x="4370832" y="2487168"/>
+            <a:ext cx="3538728" cy="868680"/>
+          </a:xfrm>
+          <a:prstGeom prst="rect">
+            <a:avLst/>
+          </a:prstGeom>
+          <a:noFill/>
+          <a:ln/>
+        </p:spPr>
+        <p:txBody>
+          <a:bodyPr wrap="square" lIns="0" tIns="0" rIns="0" bIns="0" rtlCol="0" anchor="ctr"/>
+          <a:lstStyle/>
+          <a:p>
+            <a:pPr algn="ctr" indent="0" marL="0">
+              <a:buNone/>
+            </a:pPr>
+            <a:r>
+              <a:rPr lang="en-US" sz="3600" b="1" dirty="0">
+                <a:solidFill>
+                  <a:srgbClr val="16A34A"/>
+                </a:solidFill>
+                <a:latin typeface="Cambria" pitchFamily="34" charset="0"/>
+                <a:ea typeface="Cambria" pitchFamily="34" charset="-122"/>
+                <a:cs typeface="Cambria" pitchFamily="34" charset="-120"/>
+              </a:rPr>
+              <a:t>5 / 5</a:t>
+            </a:r>
+            <a:endParaRPr lang="en-US" sz="3600" dirty="0"/>
+          </a:p>
+        </p:txBody>
+      </p:sp>
+      <p:sp>
+        <p:nvSpPr>
+          <p:cNvPr id="10" name="Text 8"/>
+          <p:cNvSpPr/>
+          <p:nvPr/>
+        </p:nvSpPr>
+        <p:spPr>
+          <a:xfrm>
+            <a:off x="4370832" y="3383280"/>
+            <a:ext cx="3538728" cy="457200"/>
+          </a:xfrm>
+          <a:prstGeom prst="rect">
+            <a:avLst/>
+          </a:prstGeom>
+          <a:noFill/>
+          <a:ln/>
+        </p:spPr>
+        <p:txBody>
+          <a:bodyPr wrap="square" lIns="0" tIns="0" rIns="0" bIns="0" rtlCol="0" anchor="ctr"/>
+          <a:lstStyle/>
+          <a:p>
+            <a:pPr algn="ctr" indent="0" marL="0">
+              <a:buNone/>
+            </a:pPr>
+            <a:r>
+              <a:rPr lang="en-US" sz="1300" dirty="0">
+                <a:solidFill>
+                  <a:srgbClr val="64748B"/>
+                </a:solidFill>
+                <a:latin typeface="Calibri" pitchFamily="34" charset="0"/>
+                <a:ea typeface="Calibri" pitchFamily="34" charset="-122"/>
+                <a:cs typeface="Calibri" pitchFamily="34" charset="-120"/>
+              </a:rPr>
+              <a:t>animals</a:t>
+            </a:r>
+            <a:endParaRPr lang="en-US" sz="1300" dirty="0"/>
+          </a:p>
+        </p:txBody>
+      </p:sp>
+      <p:sp>
+        <p:nvSpPr>
+          <p:cNvPr id="11" name="Shape 9"/>
+          <p:cNvSpPr/>
+          <p:nvPr/>
+        </p:nvSpPr>
+        <p:spPr>
+          <a:xfrm>
+            <a:off x="8101584" y="2286000"/>
+            <a:ext cx="3538728" cy="1828800"/>
+          </a:xfrm>
+          <a:prstGeom prst="roundRect">
+            <a:avLst>
+              <a:gd name="adj" fmla="val 4500"/>
+            </a:avLst>
+          </a:prstGeom>
+          <a:solidFill>
+            <a:srgbClr val="FFFFFF"/>
+          </a:solidFill>
+          <a:ln w="12700">
+            <a:solidFill>
+              <a:srgbClr val="E2E8F0"/>
+            </a:solidFill>
+            <a:prstDash val="solid"/>
+          </a:ln>
+          <a:effectLst>
+            <a:outerShdw sx="100000" sy="100000" kx="0" ky="0" algn="bl" rotWithShape="0" blurRad="114300" dist="38100" dir="5400000">
+              <a:srgbClr val="0F172A">
+                <a:alpha val="14000"/>
+              </a:srgbClr>
+            </a:outerShdw>
+          </a:effectLst>
+        </p:spPr>
+      </p:sp>
+      <p:sp>
+        <p:nvSpPr>
+          <p:cNvPr id="12" name="Text 10"/>
+          <p:cNvSpPr/>
+          <p:nvPr/>
+        </p:nvSpPr>
+        <p:spPr>
+          <a:xfrm>
+            <a:off x="8101584" y="2487168"/>
+            <a:ext cx="3538728" cy="868680"/>
+          </a:xfrm>
+          <a:prstGeom prst="rect">
+            <a:avLst/>
+          </a:prstGeom>
+          <a:noFill/>
+          <a:ln/>
+        </p:spPr>
+        <p:txBody>
+          <a:bodyPr wrap="square" lIns="0" tIns="0" rIns="0" bIns="0" rtlCol="0" anchor="ctr"/>
+          <a:lstStyle/>
+          <a:p>
+            <a:pPr algn="ctr" indent="0" marL="0">
+              <a:buNone/>
+            </a:pPr>
+            <a:r>
+              <a:rPr lang="en-US" sz="3600" b="1" dirty="0">
+                <a:solidFill>
+                  <a:srgbClr val="6D28D9"/>
+                </a:solidFill>
+                <a:latin typeface="Cambria" pitchFamily="34" charset="0"/>
+                <a:ea typeface="Cambria" pitchFamily="34" charset="-122"/>
+                <a:cs typeface="Cambria" pitchFamily="34" charset="-120"/>
+              </a:rPr>
+              <a:t>p = 2×10⁻²⁷</a:t>
+            </a:r>
+            <a:endParaRPr lang="en-US" sz="3600" dirty="0"/>
+          </a:p>
+        </p:txBody>
+      </p:sp>
+      <p:sp>
+        <p:nvSpPr>
+          <p:cNvPr id="13" name="Text 11"/>
+          <p:cNvSpPr/>
+          <p:nvPr/>
+        </p:nvSpPr>
+        <p:spPr>
+          <a:xfrm>
+            <a:off x="8101584" y="3383280"/>
+            <a:ext cx="3538728" cy="457200"/>
+          </a:xfrm>
+          <a:prstGeom prst="rect">
+            <a:avLst/>
+          </a:prstGeom>
+          <a:noFill/>
+          <a:ln/>
+        </p:spPr>
+        <p:txBody>
+          <a:bodyPr wrap="square" lIns="0" tIns="0" rIns="0" bIns="0" rtlCol="0" anchor="ctr"/>
+          <a:lstStyle/>
+          <a:p>
+            <a:pPr algn="ctr" indent="0" marL="0">
+              <a:buNone/>
+            </a:pPr>
+            <a:r>
+              <a:rPr lang="en-US" sz="1300" dirty="0">
+                <a:solidFill>
+                  <a:srgbClr val="64748B"/>
+                </a:solidFill>
+                <a:latin typeface="Calibri" pitchFamily="34" charset="0"/>
+                <a:ea typeface="Calibri" pitchFamily="34" charset="-122"/>
+                <a:cs typeface="Calibri" pitchFamily="34" charset="-120"/>
+              </a:rPr>
+              <a:t>sign test</a:t>
+            </a:r>
+            <a:endParaRPr lang="en-US" sz="1300" dirty="0"/>
+          </a:p>
+        </p:txBody>
+      </p:sp>
+      <p:sp>
+        <p:nvSpPr>
+          <p:cNvPr id="14" name="Shape 12"/>
+          <p:cNvSpPr/>
+          <p:nvPr/>
+        </p:nvSpPr>
+        <p:spPr>
+          <a:xfrm>
+            <a:off x="640080" y="4434840"/>
+            <a:ext cx="2084832" cy="1051560"/>
+          </a:xfrm>
+          <a:prstGeom prst="roundRect">
+            <a:avLst>
+              <a:gd name="adj" fmla="val 7826"/>
+            </a:avLst>
+          </a:prstGeom>
+          <a:solidFill>
+            <a:srgbClr val="FFFFFF"/>
+          </a:solidFill>
+          <a:ln w="12700">
+            <a:solidFill>
+              <a:srgbClr val="E2E8F0"/>
+            </a:solidFill>
+            <a:prstDash val="solid"/>
+          </a:ln>
+          <a:effectLst>
+            <a:outerShdw sx="100000" sy="100000" kx="0" ky="0" algn="bl" rotWithShape="0" blurRad="114300" dist="38100" dir="5400000">
+              <a:srgbClr val="0F172A">
+                <a:alpha val="14000"/>
+              </a:srgbClr>
+            </a:outerShdw>
+          </a:effectLst>
+        </p:spPr>
+      </p:sp>
+      <p:sp>
+        <p:nvSpPr>
+          <p:cNvPr id="15" name="Text 13"/>
+          <p:cNvSpPr/>
+          <p:nvPr/>
+        </p:nvSpPr>
+        <p:spPr>
+          <a:xfrm>
+            <a:off x="640080" y="4553712"/>
+            <a:ext cx="2084832" cy="365760"/>
+          </a:xfrm>
+          <a:prstGeom prst="rect">
+            <a:avLst/>
+          </a:prstGeom>
+          <a:noFill/>
+          <a:ln/>
+        </p:spPr>
+        <p:txBody>
+          <a:bodyPr wrap="square" lIns="0" tIns="0" rIns="0" bIns="0" rtlCol="0" anchor="ctr"/>
+          <a:lstStyle/>
+          <a:p>
+            <a:pPr algn="ctr" indent="0" marL="0">
+              <a:buNone/>
+            </a:pPr>
+            <a:r>
+              <a:rPr lang="en-US" sz="1300" b="1" dirty="0">
+                <a:solidFill>
+                  <a:srgbClr val="64748B"/>
+                </a:solidFill>
+                <a:latin typeface="Calibri" pitchFamily="34" charset="0"/>
+                <a:ea typeface="Calibri" pitchFamily="34" charset="-122"/>
+                <a:cs typeface="Calibri" pitchFamily="34" charset="-120"/>
+              </a:rPr>
+              <a:t>A9</a:t>
+            </a:r>
+            <a:endParaRPr lang="en-US" sz="1300" dirty="0"/>
+          </a:p>
+        </p:txBody>
+      </p:sp>
+      <p:sp>
+        <p:nvSpPr>
+          <p:cNvPr id="16" name="Text 14"/>
+          <p:cNvSpPr/>
+          <p:nvPr/>
+        </p:nvSpPr>
+        <p:spPr>
+          <a:xfrm>
+            <a:off x="640080" y="4892040"/>
+            <a:ext cx="2084832" cy="457200"/>
+          </a:xfrm>
+          <a:prstGeom prst="rect">
+            <a:avLst/>
+          </a:prstGeom>
+          <a:noFill/>
+          <a:ln/>
+        </p:spPr>
+        <p:txBody>
+          <a:bodyPr wrap="square" lIns="0" tIns="0" rIns="0" bIns="0" rtlCol="0" anchor="ctr"/>
+          <a:lstStyle/>
+          <a:p>
+            <a:pPr algn="ctr" indent="0" marL="0">
+              <a:buNone/>
+            </a:pPr>
+            <a:r>
+              <a:rPr lang="en-US" sz="1900" b="1" dirty="0">
+                <a:solidFill>
+                  <a:srgbClr val="1E293B"/>
+                </a:solidFill>
+                <a:latin typeface="Cambria" pitchFamily="34" charset="0"/>
+                <a:ea typeface="Cambria" pitchFamily="34" charset="-122"/>
+                <a:cs typeface="Cambria" pitchFamily="34" charset="-120"/>
+              </a:rPr>
+              <a:t>9 / 9</a:t>
+            </a:r>
+            <a:endParaRPr lang="en-US" sz="1900" dirty="0"/>
+          </a:p>
+        </p:txBody>
+      </p:sp>
+      <p:sp>
+        <p:nvSpPr>
+          <p:cNvPr id="17" name="Shape 15"/>
+          <p:cNvSpPr/>
+          <p:nvPr/>
+        </p:nvSpPr>
+        <p:spPr>
+          <a:xfrm>
+            <a:off x="2816352" y="4434840"/>
+            <a:ext cx="2084832" cy="1051560"/>
+          </a:xfrm>
+          <a:prstGeom prst="roundRect">
+            <a:avLst>
+              <a:gd name="adj" fmla="val 7826"/>
+            </a:avLst>
+          </a:prstGeom>
+          <a:solidFill>
+            <a:srgbClr val="FFFFFF"/>
+          </a:solidFill>
+          <a:ln w="12700">
+            <a:solidFill>
+              <a:srgbClr val="E2E8F0"/>
+            </a:solidFill>
+            <a:prstDash val="solid"/>
+          </a:ln>
+          <a:effectLst>
+            <a:outerShdw sx="100000" sy="100000" kx="0" ky="0" algn="bl" rotWithShape="0" blurRad="114300" dist="38100" dir="5400000">
+              <a:srgbClr val="0F172A">
+                <a:alpha val="14000"/>
+              </a:srgbClr>
+            </a:outerShdw>
+          </a:effectLst>
+        </p:spPr>
+      </p:sp>
+      <p:sp>
+        <p:nvSpPr>
+          <p:cNvPr id="18" name="Text 16"/>
+          <p:cNvSpPr/>
+          <p:nvPr/>
+        </p:nvSpPr>
+        <p:spPr>
+          <a:xfrm>
+            <a:off x="2816352" y="4553712"/>
+            <a:ext cx="2084832" cy="365760"/>
+          </a:xfrm>
+          <a:prstGeom prst="rect">
+            <a:avLst/>
+          </a:prstGeom>
+          <a:noFill/>
+          <a:ln/>
+        </p:spPr>
+        <p:txBody>
+          <a:bodyPr wrap="square" lIns="0" tIns="0" rIns="0" bIns="0" rtlCol="0" anchor="ctr"/>
+          <a:lstStyle/>
+          <a:p>
+            <a:pPr algn="ctr" indent="0" marL="0">
+              <a:buNone/>
+            </a:pPr>
+            <a:r>
+              <a:rPr lang="en-US" sz="1300" b="1" dirty="0">
+                <a:solidFill>
+                  <a:srgbClr val="64748B"/>
+                </a:solidFill>
+                <a:latin typeface="Calibri" pitchFamily="34" charset="0"/>
+                <a:ea typeface="Calibri" pitchFamily="34" charset="-122"/>
+                <a:cs typeface="Calibri" pitchFamily="34" charset="-120"/>
+              </a:rPr>
+              <a:t>A10</a:t>
+            </a:r>
+            <a:endParaRPr lang="en-US" sz="1300" dirty="0"/>
+          </a:p>
+        </p:txBody>
+      </p:sp>
+      <p:sp>
+        <p:nvSpPr>
+          <p:cNvPr id="19" name="Text 17"/>
+          <p:cNvSpPr/>
+          <p:nvPr/>
+        </p:nvSpPr>
+        <p:spPr>
+          <a:xfrm>
+            <a:off x="2816352" y="4892040"/>
+            <a:ext cx="2084832" cy="457200"/>
+          </a:xfrm>
+          <a:prstGeom prst="rect">
+            <a:avLst/>
+          </a:prstGeom>
+          <a:noFill/>
+          <a:ln/>
+        </p:spPr>
+        <p:txBody>
+          <a:bodyPr wrap="square" lIns="0" tIns="0" rIns="0" bIns="0" rtlCol="0" anchor="ctr"/>
+          <a:lstStyle/>
+          <a:p>
+            <a:pPr algn="ctr" indent="0" marL="0">
+              <a:buNone/>
+            </a:pPr>
+            <a:r>
+              <a:rPr lang="en-US" sz="1900" b="1" dirty="0">
+                <a:solidFill>
+                  <a:srgbClr val="1E293B"/>
+                </a:solidFill>
+                <a:latin typeface="Cambria" pitchFamily="34" charset="0"/>
+                <a:ea typeface="Cambria" pitchFamily="34" charset="-122"/>
+                <a:cs typeface="Cambria" pitchFamily="34" charset="-120"/>
+              </a:rPr>
+              <a:t>35 / 35</a:t>
+            </a:r>
+            <a:endParaRPr lang="en-US" sz="1900" dirty="0"/>
+          </a:p>
+        </p:txBody>
+      </p:sp>
+      <p:sp>
+        <p:nvSpPr>
+          <p:cNvPr id="20" name="Shape 18"/>
+          <p:cNvSpPr/>
+          <p:nvPr/>
+        </p:nvSpPr>
+        <p:spPr>
+          <a:xfrm>
+            <a:off x="4992624" y="4434840"/>
+            <a:ext cx="2084832" cy="1051560"/>
+          </a:xfrm>
+          <a:prstGeom prst="roundRect">
+            <a:avLst>
+              <a:gd name="adj" fmla="val 7826"/>
+            </a:avLst>
+          </a:prstGeom>
+          <a:solidFill>
+            <a:srgbClr val="FFFFFF"/>
+          </a:solidFill>
+          <a:ln w="12700">
+            <a:solidFill>
+              <a:srgbClr val="E2E8F0"/>
+            </a:solidFill>
+            <a:prstDash val="solid"/>
+          </a:ln>
+          <a:effectLst>
+            <a:outerShdw sx="100000" sy="100000" kx="0" ky="0" algn="bl" rotWithShape="0" blurRad="114300" dist="38100" dir="5400000">
+              <a:srgbClr val="0F172A">
+                <a:alpha val="14000"/>
+              </a:srgbClr>
+            </a:outerShdw>
+          </a:effectLst>
+        </p:spPr>
+      </p:sp>
+      <p:sp>
+        <p:nvSpPr>
+          <p:cNvPr id="21" name="Text 19"/>
+          <p:cNvSpPr/>
+          <p:nvPr/>
+        </p:nvSpPr>
+        <p:spPr>
+          <a:xfrm>
+            <a:off x="4992624" y="4553712"/>
+            <a:ext cx="2084832" cy="365760"/>
+          </a:xfrm>
+          <a:prstGeom prst="rect">
+            <a:avLst/>
+          </a:prstGeom>
+          <a:noFill/>
+          <a:ln/>
+        </p:spPr>
+        <p:txBody>
+          <a:bodyPr wrap="square" lIns="0" tIns="0" rIns="0" bIns="0" rtlCol="0" anchor="ctr"/>
+          <a:lstStyle/>
+          <a:p>
+            <a:pPr algn="ctr" indent="0" marL="0">
+              <a:buNone/>
+            </a:pPr>
+            <a:r>
+              <a:rPr lang="en-US" sz="1300" b="1" dirty="0">
+                <a:solidFill>
+                  <a:srgbClr val="64748B"/>
+                </a:solidFill>
+                <a:latin typeface="Calibri" pitchFamily="34" charset="0"/>
+                <a:ea typeface="Calibri" pitchFamily="34" charset="-122"/>
+                <a:cs typeface="Calibri" pitchFamily="34" charset="-120"/>
+              </a:rPr>
+              <a:t>A11</a:t>
+            </a:r>
+            <a:endParaRPr lang="en-US" sz="1300" dirty="0"/>
+          </a:p>
+        </p:txBody>
+      </p:sp>
+      <p:sp>
+        <p:nvSpPr>
+          <p:cNvPr id="22" name="Text 20"/>
+          <p:cNvSpPr/>
+          <p:nvPr/>
+        </p:nvSpPr>
+        <p:spPr>
+          <a:xfrm>
+            <a:off x="4992624" y="4892040"/>
+            <a:ext cx="2084832" cy="457200"/>
+          </a:xfrm>
+          <a:prstGeom prst="rect">
+            <a:avLst/>
+          </a:prstGeom>
+          <a:noFill/>
+          <a:ln/>
+        </p:spPr>
+        <p:txBody>
+          <a:bodyPr wrap="square" lIns="0" tIns="0" rIns="0" bIns="0" rtlCol="0" anchor="ctr"/>
+          <a:lstStyle/>
+          <a:p>
+            <a:pPr algn="ctr" indent="0" marL="0">
+              <a:buNone/>
+            </a:pPr>
+            <a:r>
+              <a:rPr lang="en-US" sz="1900" b="1" dirty="0">
+                <a:solidFill>
+                  <a:srgbClr val="1E293B"/>
+                </a:solidFill>
+                <a:latin typeface="Cambria" pitchFamily="34" charset="0"/>
+                <a:ea typeface="Cambria" pitchFamily="34" charset="-122"/>
+                <a:cs typeface="Cambria" pitchFamily="34" charset="-120"/>
+              </a:rPr>
+              <a:t>15 / 17</a:t>
+            </a:r>
+            <a:endParaRPr lang="en-US" sz="1900" dirty="0"/>
+          </a:p>
+        </p:txBody>
+      </p:sp>
+      <p:sp>
+        <p:nvSpPr>
+          <p:cNvPr id="23" name="Shape 21"/>
+          <p:cNvSpPr/>
+          <p:nvPr/>
+        </p:nvSpPr>
+        <p:spPr>
+          <a:xfrm>
+            <a:off x="7168896" y="4434840"/>
+            <a:ext cx="2084832" cy="1051560"/>
+          </a:xfrm>
+          <a:prstGeom prst="roundRect">
+            <a:avLst>
+              <a:gd name="adj" fmla="val 7826"/>
+            </a:avLst>
+          </a:prstGeom>
+          <a:solidFill>
+            <a:srgbClr val="FFFFFF"/>
+          </a:solidFill>
+          <a:ln w="12700">
+            <a:solidFill>
+              <a:srgbClr val="E2E8F0"/>
+            </a:solidFill>
+            <a:prstDash val="solid"/>
+          </a:ln>
+          <a:effectLst>
+            <a:outerShdw sx="100000" sy="100000" kx="0" ky="0" algn="bl" rotWithShape="0" blurRad="114300" dist="38100" dir="5400000">
+              <a:srgbClr val="0F172A">
+                <a:alpha val="14000"/>
+              </a:srgbClr>
+            </a:outerShdw>
+          </a:effectLst>
+        </p:spPr>
+      </p:sp>
+      <p:sp>
+        <p:nvSpPr>
+          <p:cNvPr id="24" name="Text 22"/>
+          <p:cNvSpPr/>
+          <p:nvPr/>
+        </p:nvSpPr>
+        <p:spPr>
+          <a:xfrm>
+            <a:off x="7168896" y="4553712"/>
+            <a:ext cx="2084832" cy="365760"/>
+          </a:xfrm>
+          <a:prstGeom prst="rect">
+            <a:avLst/>
+          </a:prstGeom>
+          <a:noFill/>
+          <a:ln/>
+        </p:spPr>
+        <p:txBody>
+          <a:bodyPr wrap="square" lIns="0" tIns="0" rIns="0" bIns="0" rtlCol="0" anchor="ctr"/>
+          <a:lstStyle/>
+          <a:p>
+            <a:pPr algn="ctr" indent="0" marL="0">
+              <a:buNone/>
+            </a:pPr>
+            <a:r>
+              <a:rPr lang="en-US" sz="1300" b="1" dirty="0">
+                <a:solidFill>
+                  <a:srgbClr val="64748B"/>
+                </a:solidFill>
+                <a:latin typeface="Calibri" pitchFamily="34" charset="0"/>
+                <a:ea typeface="Calibri" pitchFamily="34" charset="-122"/>
+                <a:cs typeface="Calibri" pitchFamily="34" charset="-120"/>
+              </a:rPr>
+              <a:t>A3</a:t>
+            </a:r>
+            <a:endParaRPr lang="en-US" sz="1300" dirty="0"/>
+          </a:p>
+        </p:txBody>
+      </p:sp>
+      <p:sp>
+        <p:nvSpPr>
+          <p:cNvPr id="25" name="Text 23"/>
+          <p:cNvSpPr/>
+          <p:nvPr/>
+        </p:nvSpPr>
+        <p:spPr>
+          <a:xfrm>
+            <a:off x="7168896" y="4892040"/>
+            <a:ext cx="2084832" cy="457200"/>
+          </a:xfrm>
+          <a:prstGeom prst="rect">
+            <a:avLst/>
+          </a:prstGeom>
+          <a:noFill/>
+          <a:ln/>
+        </p:spPr>
+        <p:txBody>
+          <a:bodyPr wrap="square" lIns="0" tIns="0" rIns="0" bIns="0" rtlCol="0" anchor="ctr"/>
+          <a:lstStyle/>
+          <a:p>
+            <a:pPr algn="ctr" indent="0" marL="0">
+              <a:buNone/>
+            </a:pPr>
+            <a:r>
+              <a:rPr lang="en-US" sz="1900" b="1" dirty="0">
+                <a:solidFill>
+                  <a:srgbClr val="1E293B"/>
+                </a:solidFill>
+                <a:latin typeface="Cambria" pitchFamily="34" charset="0"/>
+                <a:ea typeface="Cambria" pitchFamily="34" charset="-122"/>
+                <a:cs typeface="Cambria" pitchFamily="34" charset="-120"/>
+              </a:rPr>
+              <a:t>20 / 20</a:t>
+            </a:r>
+            <a:endParaRPr lang="en-US" sz="1900" dirty="0"/>
+          </a:p>
+        </p:txBody>
+      </p:sp>
+      <p:sp>
+        <p:nvSpPr>
+          <p:cNvPr id="26" name="Shape 24"/>
+          <p:cNvSpPr/>
+          <p:nvPr/>
+        </p:nvSpPr>
+        <p:spPr>
+          <a:xfrm>
+            <a:off x="9345168" y="4434840"/>
+            <a:ext cx="2084832" cy="1051560"/>
+          </a:xfrm>
+          <a:prstGeom prst="roundRect">
+            <a:avLst>
+              <a:gd name="adj" fmla="val 7826"/>
+            </a:avLst>
+          </a:prstGeom>
+          <a:solidFill>
+            <a:srgbClr val="FFFFFF"/>
+          </a:solidFill>
+          <a:ln w="12700">
+            <a:solidFill>
+              <a:srgbClr val="E2E8F0"/>
+            </a:solidFill>
+            <a:prstDash val="solid"/>
+          </a:ln>
+          <a:effectLst>
+            <a:outerShdw sx="100000" sy="100000" kx="0" ky="0" algn="bl" rotWithShape="0" blurRad="114300" dist="38100" dir="5400000">
+              <a:srgbClr val="0F172A">
+                <a:alpha val="14000"/>
+              </a:srgbClr>
+            </a:outerShdw>
+          </a:effectLst>
+        </p:spPr>
+      </p:sp>
+      <p:sp>
+        <p:nvSpPr>
+          <p:cNvPr id="27" name="Text 25"/>
+          <p:cNvSpPr/>
+          <p:nvPr/>
+        </p:nvSpPr>
+        <p:spPr>
+          <a:xfrm>
+            <a:off x="9345168" y="4553712"/>
+            <a:ext cx="2084832" cy="365760"/>
+          </a:xfrm>
+          <a:prstGeom prst="rect">
+            <a:avLst/>
+          </a:prstGeom>
+          <a:noFill/>
+          <a:ln/>
+        </p:spPr>
+        <p:txBody>
+          <a:bodyPr wrap="square" lIns="0" tIns="0" rIns="0" bIns="0" rtlCol="0" anchor="ctr"/>
+          <a:lstStyle/>
+          <a:p>
+            <a:pPr algn="ctr" indent="0" marL="0">
+              <a:buNone/>
+            </a:pPr>
+            <a:r>
+              <a:rPr lang="en-US" sz="1300" b="1" dirty="0">
+                <a:solidFill>
+                  <a:srgbClr val="64748B"/>
+                </a:solidFill>
+                <a:latin typeface="Calibri" pitchFamily="34" charset="0"/>
+                <a:ea typeface="Calibri" pitchFamily="34" charset="-122"/>
+                <a:cs typeface="Calibri" pitchFamily="34" charset="-120"/>
+              </a:rPr>
+              <a:t>A4</a:t>
+            </a:r>
+            <a:endParaRPr lang="en-US" sz="1300" dirty="0"/>
+          </a:p>
+        </p:txBody>
+      </p:sp>
+      <p:sp>
+        <p:nvSpPr>
+          <p:cNvPr id="28" name="Text 26"/>
+          <p:cNvSpPr/>
+          <p:nvPr/>
+        </p:nvSpPr>
+        <p:spPr>
+          <a:xfrm>
+            <a:off x="9345168" y="4892040"/>
+            <a:ext cx="2084832" cy="457200"/>
+          </a:xfrm>
+          <a:prstGeom prst="rect">
+            <a:avLst/>
+          </a:prstGeom>
+          <a:noFill/>
+          <a:ln/>
+        </p:spPr>
+        <p:txBody>
+          <a:bodyPr wrap="square" lIns="0" tIns="0" rIns="0" bIns="0" rtlCol="0" anchor="ctr"/>
+          <a:lstStyle/>
+          <a:p>
+            <a:pPr algn="ctr" indent="0" marL="0">
+              <a:buNone/>
+            </a:pPr>
+            <a:r>
+              <a:rPr lang="en-US" sz="1900" b="1" dirty="0">
+                <a:solidFill>
+                  <a:srgbClr val="1E293B"/>
+                </a:solidFill>
+                <a:latin typeface="Cambria" pitchFamily="34" charset="0"/>
+                <a:ea typeface="Cambria" pitchFamily="34" charset="-122"/>
+                <a:cs typeface="Cambria" pitchFamily="34" charset="-120"/>
+              </a:rPr>
+              <a:t>20 / 20</a:t>
+            </a:r>
+            <a:endParaRPr lang="en-US" sz="1900" dirty="0"/>
+          </a:p>
+        </p:txBody>
+      </p:sp>
+      <p:sp>
+        <p:nvSpPr>
+          <p:cNvPr id="29" name="Shape 27"/>
+          <p:cNvSpPr/>
+          <p:nvPr/>
+        </p:nvSpPr>
+        <p:spPr>
+          <a:xfrm>
+            <a:off x="640080" y="5715000"/>
+            <a:ext cx="10881360" cy="777240"/>
+          </a:xfrm>
+          <a:prstGeom prst="roundRect">
+            <a:avLst>
+              <a:gd name="adj" fmla="val 10588"/>
             </a:avLst>
           </a:prstGeom>
           <a:solidFill>
@@ -3952,30 +5752,30 @@
       </p:sp>
       <p:sp>
         <p:nvSpPr>
-          <p:cNvPr id="8" name="Text 6"/>
-          <p:cNvSpPr/>
-          <p:nvPr/>
-        </p:nvSpPr>
-        <p:spPr>
-          <a:xfrm>
-            <a:off x="6446520" y="2011680"/>
-            <a:ext cx="4572000" cy="320040"/>
-          </a:xfrm>
-          <a:prstGeom prst="rect">
-            <a:avLst/>
-          </a:prstGeom>
-          <a:noFill/>
-          <a:ln/>
-        </p:spPr>
-        <p:txBody>
-          <a:bodyPr wrap="square" lIns="0" tIns="0" rIns="0" bIns="0" rtlCol="0" anchor="ctr"/>
-          <a:lstStyle/>
-          <a:p>
-            <a:pPr indent="0" marL="0">
-              <a:buNone/>
-            </a:pPr>
-            <a:r>
-              <a:rPr lang="en-US" sz="1500" b="1" dirty="0">
+          <p:cNvPr id="30" name="Text 28"/>
+          <p:cNvSpPr/>
+          <p:nvPr/>
+        </p:nvSpPr>
+        <p:spPr>
+          <a:xfrm>
+            <a:off x="960120" y="5852160"/>
+            <a:ext cx="10241280" cy="502920"/>
+          </a:xfrm>
+          <a:prstGeom prst="rect">
+            <a:avLst/>
+          </a:prstGeom>
+          <a:noFill/>
+          <a:ln/>
+        </p:spPr>
+        <p:txBody>
+          <a:bodyPr wrap="square" lIns="0" tIns="0" rIns="0" bIns="0" rtlCol="0" anchor="ctr"/>
+          <a:lstStyle/>
+          <a:p>
+            <a:pPr indent="0" marL="0">
+              <a:buNone/>
+            </a:pPr>
+            <a:r>
+              <a:rPr lang="en-US" sz="1350" b="1" dirty="0">
                 <a:solidFill>
                   <a:srgbClr val="16A34A"/>
                 </a:solidFill>
@@ -3983,37 +5783,9 @@
                 <a:ea typeface="Calibri" pitchFamily="34" charset="-122"/>
                 <a:cs typeface="Calibri" pitchFamily="34" charset="-120"/>
               </a:rPr>
-              <a:t>The fix</a:t>
-            </a:r>
-            <a:endParaRPr lang="en-US" sz="1500" dirty="0"/>
-          </a:p>
-        </p:txBody>
-      </p:sp>
-      <p:sp>
-        <p:nvSpPr>
-          <p:cNvPr id="9" name="Text 7"/>
-          <p:cNvSpPr/>
-          <p:nvPr/>
-        </p:nvSpPr>
-        <p:spPr>
-          <a:xfrm>
-            <a:off x="6446520" y="2423160"/>
-            <a:ext cx="4846320" cy="1463040"/>
-          </a:xfrm>
-          <a:prstGeom prst="rect">
-            <a:avLst/>
-          </a:prstGeom>
-          <a:noFill/>
-          <a:ln/>
-        </p:spPr>
-        <p:txBody>
-          <a:bodyPr wrap="square" lIns="0" tIns="0" rIns="0" bIns="0" rtlCol="0" anchor="ctr"/>
-          <a:lstStyle/>
-          <a:p>
-            <a:pPr indent="0" marL="0">
-              <a:lnSpc>
-                <a:spcPct val="105000"/>
-              </a:lnSpc>
+              <a:t>Why this matters more than the effect size:  </a:t>
+            </a:r>
+            <a:pPr indent="0" marL="0">
               <a:buNone/>
             </a:pPr>
             <a:r>
@@ -4025,496 +5797,9 @@
                 <a:ea typeface="Calibri" pitchFamily="34" charset="-122"/>
                 <a:cs typeface="Calibri" pitchFamily="34" charset="-120"/>
               </a:rPr>
-              <a:t>Remove them INSIDE each block, then decode. Nothing can leak across blocks. This is the conservative estimate and the one we'll quote.</a:t>
+              <a:t>a small effect that appears essentially every time, in every animal, is not noise.</a:t>
             </a:r>
             <a:endParaRPr lang="en-US" sz="1350" dirty="0"/>
-          </a:p>
-        </p:txBody>
-      </p:sp>
-      <p:sp>
-        <p:nvSpPr>
-          <p:cNvPr id="10" name="Shape 8"/>
-          <p:cNvSpPr/>
-          <p:nvPr/>
-        </p:nvSpPr>
-        <p:spPr>
-          <a:xfrm>
-            <a:off x="640080" y="4343400"/>
-            <a:ext cx="2624328" cy="1737360"/>
-          </a:xfrm>
-          <a:prstGeom prst="roundRect">
-            <a:avLst>
-              <a:gd name="adj" fmla="val 4737"/>
-            </a:avLst>
-          </a:prstGeom>
-          <a:solidFill>
-            <a:srgbClr val="FFFFFF"/>
-          </a:solidFill>
-          <a:ln w="12700">
-            <a:solidFill>
-              <a:srgbClr val="E2E8F0"/>
-            </a:solidFill>
-            <a:prstDash val="solid"/>
-          </a:ln>
-          <a:effectLst>
-            <a:outerShdw sx="100000" sy="100000" kx="0" ky="0" algn="bl" rotWithShape="0" blurRad="114300" dist="38100" dir="5400000">
-              <a:srgbClr val="0F172A">
-                <a:alpha val="14000"/>
-              </a:srgbClr>
-            </a:outerShdw>
-          </a:effectLst>
-        </p:spPr>
-      </p:sp>
-      <p:sp>
-        <p:nvSpPr>
-          <p:cNvPr id="11" name="Text 9"/>
-          <p:cNvSpPr/>
-          <p:nvPr/>
-        </p:nvSpPr>
-        <p:spPr>
-          <a:xfrm>
-            <a:off x="640080" y="4526280"/>
-            <a:ext cx="2624328" cy="822960"/>
-          </a:xfrm>
-          <a:prstGeom prst="rect">
-            <a:avLst/>
-          </a:prstGeom>
-          <a:noFill/>
-          <a:ln/>
-        </p:spPr>
-        <p:txBody>
-          <a:bodyPr wrap="square" lIns="0" tIns="0" rIns="0" bIns="0" rtlCol="0" anchor="ctr"/>
-          <a:lstStyle/>
-          <a:p>
-            <a:pPr algn="ctr" indent="0" marL="0">
-              <a:buNone/>
-            </a:pPr>
-            <a:r>
-              <a:rPr lang="en-US" sz="3400" b="1" dirty="0">
-                <a:solidFill>
-                  <a:srgbClr val="64748B"/>
-                </a:solidFill>
-                <a:latin typeface="Cambria" pitchFamily="34" charset="0"/>
-                <a:ea typeface="Cambria" pitchFamily="34" charset="-122"/>
-                <a:cs typeface="Cambria" pitchFamily="34" charset="-120"/>
-              </a:rPr>
-              <a:t>0.35</a:t>
-            </a:r>
-            <a:endParaRPr lang="en-US" sz="3400" dirty="0"/>
-          </a:p>
-        </p:txBody>
-      </p:sp>
-      <p:sp>
-        <p:nvSpPr>
-          <p:cNvPr id="12" name="Text 10"/>
-          <p:cNvSpPr/>
-          <p:nvPr/>
-        </p:nvSpPr>
-        <p:spPr>
-          <a:xfrm>
-            <a:off x="777240" y="5349240"/>
-            <a:ext cx="2350008" cy="548640"/>
-          </a:xfrm>
-          <a:prstGeom prst="rect">
-            <a:avLst/>
-          </a:prstGeom>
-          <a:noFill/>
-          <a:ln/>
-        </p:spPr>
-        <p:txBody>
-          <a:bodyPr wrap="square" lIns="0" tIns="0" rIns="0" bIns="0" rtlCol="0" anchor="ctr"/>
-          <a:lstStyle/>
-          <a:p>
-            <a:pPr algn="ctr" indent="0" marL="0">
-              <a:buNone/>
-            </a:pPr>
-            <a:r>
-              <a:rPr lang="en-US" sz="1200" dirty="0">
-                <a:solidFill>
-                  <a:srgbClr val="64748B"/>
-                </a:solidFill>
-                <a:latin typeface="Calibri" pitchFamily="34" charset="0"/>
-                <a:ea typeface="Calibri" pitchFamily="34" charset="-122"/>
-                <a:cs typeface="Calibri" pitchFamily="34" charset="-120"/>
-              </a:rPr>
-              <a:t>best block, old method</a:t>
-            </a:r>
-            <a:endParaRPr lang="en-US" sz="1200" dirty="0"/>
-          </a:p>
-        </p:txBody>
-      </p:sp>
-      <p:sp>
-        <p:nvSpPr>
-          <p:cNvPr id="13" name="Shape 11"/>
-          <p:cNvSpPr/>
-          <p:nvPr/>
-        </p:nvSpPr>
-        <p:spPr>
-          <a:xfrm>
-            <a:off x="3429000" y="4343400"/>
-            <a:ext cx="2624328" cy="1737360"/>
-          </a:xfrm>
-          <a:prstGeom prst="roundRect">
-            <a:avLst>
-              <a:gd name="adj" fmla="val 4737"/>
-            </a:avLst>
-          </a:prstGeom>
-          <a:solidFill>
-            <a:srgbClr val="FFFFFF"/>
-          </a:solidFill>
-          <a:ln w="12700">
-            <a:solidFill>
-              <a:srgbClr val="E2E8F0"/>
-            </a:solidFill>
-            <a:prstDash val="solid"/>
-          </a:ln>
-          <a:effectLst>
-            <a:outerShdw sx="100000" sy="100000" kx="0" ky="0" algn="bl" rotWithShape="0" blurRad="114300" dist="38100" dir="5400000">
-              <a:srgbClr val="0F172A">
-                <a:alpha val="14000"/>
-              </a:srgbClr>
-            </a:outerShdw>
-          </a:effectLst>
-        </p:spPr>
-      </p:sp>
-      <p:sp>
-        <p:nvSpPr>
-          <p:cNvPr id="14" name="Text 12"/>
-          <p:cNvSpPr/>
-          <p:nvPr/>
-        </p:nvSpPr>
-        <p:spPr>
-          <a:xfrm>
-            <a:off x="3429000" y="4526280"/>
-            <a:ext cx="2624328" cy="822960"/>
-          </a:xfrm>
-          <a:prstGeom prst="rect">
-            <a:avLst/>
-          </a:prstGeom>
-          <a:noFill/>
-          <a:ln/>
-        </p:spPr>
-        <p:txBody>
-          <a:bodyPr wrap="square" lIns="0" tIns="0" rIns="0" bIns="0" rtlCol="0" anchor="ctr"/>
-          <a:lstStyle/>
-          <a:p>
-            <a:pPr algn="ctr" indent="0" marL="0">
-              <a:buNone/>
-            </a:pPr>
-            <a:r>
-              <a:rPr lang="en-US" sz="3400" b="1" dirty="0">
-                <a:solidFill>
-                  <a:srgbClr val="64748B"/>
-                </a:solidFill>
-                <a:latin typeface="Cambria" pitchFamily="34" charset="0"/>
-                <a:ea typeface="Cambria" pitchFamily="34" charset="-122"/>
-                <a:cs typeface="Cambria" pitchFamily="34" charset="-120"/>
-              </a:rPr>
-              <a:t>0.09</a:t>
-            </a:r>
-            <a:endParaRPr lang="en-US" sz="3400" dirty="0"/>
-          </a:p>
-        </p:txBody>
-      </p:sp>
-      <p:sp>
-        <p:nvSpPr>
-          <p:cNvPr id="15" name="Text 13"/>
-          <p:cNvSpPr/>
-          <p:nvPr/>
-        </p:nvSpPr>
-        <p:spPr>
-          <a:xfrm>
-            <a:off x="3566160" y="5349240"/>
-            <a:ext cx="2350008" cy="548640"/>
-          </a:xfrm>
-          <a:prstGeom prst="rect">
-            <a:avLst/>
-          </a:prstGeom>
-          <a:noFill/>
-          <a:ln/>
-        </p:spPr>
-        <p:txBody>
-          <a:bodyPr wrap="square" lIns="0" tIns="0" rIns="0" bIns="0" rtlCol="0" anchor="ctr"/>
-          <a:lstStyle/>
-          <a:p>
-            <a:pPr algn="ctr" indent="0" marL="0">
-              <a:buNone/>
-            </a:pPr>
-            <a:r>
-              <a:rPr lang="en-US" sz="1200" dirty="0">
-                <a:solidFill>
-                  <a:srgbClr val="64748B"/>
-                </a:solidFill>
-                <a:latin typeface="Calibri" pitchFamily="34" charset="0"/>
-                <a:ea typeface="Calibri" pitchFamily="34" charset="-122"/>
-                <a:cs typeface="Calibri" pitchFamily="34" charset="-120"/>
-              </a:rPr>
-              <a:t>mean, old method</a:t>
-            </a:r>
-            <a:endParaRPr lang="en-US" sz="1200" dirty="0"/>
-          </a:p>
-        </p:txBody>
-      </p:sp>
-      <p:sp>
-        <p:nvSpPr>
-          <p:cNvPr id="16" name="Shape 14"/>
-          <p:cNvSpPr/>
-          <p:nvPr/>
-        </p:nvSpPr>
-        <p:spPr>
-          <a:xfrm>
-            <a:off x="6217920" y="4343400"/>
-            <a:ext cx="2624328" cy="1737360"/>
-          </a:xfrm>
-          <a:prstGeom prst="roundRect">
-            <a:avLst>
-              <a:gd name="adj" fmla="val 4737"/>
-            </a:avLst>
-          </a:prstGeom>
-          <a:solidFill>
-            <a:srgbClr val="FFFFFF"/>
-          </a:solidFill>
-          <a:ln w="12700">
-            <a:solidFill>
-              <a:srgbClr val="E2E8F0"/>
-            </a:solidFill>
-            <a:prstDash val="solid"/>
-          </a:ln>
-          <a:effectLst>
-            <a:outerShdw sx="100000" sy="100000" kx="0" ky="0" algn="bl" rotWithShape="0" blurRad="114300" dist="38100" dir="5400000">
-              <a:srgbClr val="0F172A">
-                <a:alpha val="14000"/>
-              </a:srgbClr>
-            </a:outerShdw>
-          </a:effectLst>
-        </p:spPr>
-      </p:sp>
-      <p:sp>
-        <p:nvSpPr>
-          <p:cNvPr id="17" name="Text 15"/>
-          <p:cNvSpPr/>
-          <p:nvPr/>
-        </p:nvSpPr>
-        <p:spPr>
-          <a:xfrm>
-            <a:off x="6217920" y="4526280"/>
-            <a:ext cx="2624328" cy="822960"/>
-          </a:xfrm>
-          <a:prstGeom prst="rect">
-            <a:avLst/>
-          </a:prstGeom>
-          <a:noFill/>
-          <a:ln/>
-        </p:spPr>
-        <p:txBody>
-          <a:bodyPr wrap="square" lIns="0" tIns="0" rIns="0" bIns="0" rtlCol="0" anchor="ctr"/>
-          <a:lstStyle/>
-          <a:p>
-            <a:pPr algn="ctr" indent="0" marL="0">
-              <a:buNone/>
-            </a:pPr>
-            <a:r>
-              <a:rPr lang="en-US" sz="3400" b="1" dirty="0">
-                <a:solidFill>
-                  <a:srgbClr val="16A34A"/>
-                </a:solidFill>
-                <a:latin typeface="Cambria" pitchFamily="34" charset="0"/>
-                <a:ea typeface="Cambria" pitchFamily="34" charset="-122"/>
-                <a:cs typeface="Cambria" pitchFamily="34" charset="-120"/>
-              </a:rPr>
-              <a:t>0.04</a:t>
-            </a:r>
-            <a:endParaRPr lang="en-US" sz="3400" dirty="0"/>
-          </a:p>
-        </p:txBody>
-      </p:sp>
-      <p:sp>
-        <p:nvSpPr>
-          <p:cNvPr id="18" name="Text 16"/>
-          <p:cNvSpPr/>
-          <p:nvPr/>
-        </p:nvSpPr>
-        <p:spPr>
-          <a:xfrm>
-            <a:off x="6355080" y="5349240"/>
-            <a:ext cx="2350008" cy="548640"/>
-          </a:xfrm>
-          <a:prstGeom prst="rect">
-            <a:avLst/>
-          </a:prstGeom>
-          <a:noFill/>
-          <a:ln/>
-        </p:spPr>
-        <p:txBody>
-          <a:bodyPr wrap="square" lIns="0" tIns="0" rIns="0" bIns="0" rtlCol="0" anchor="ctr"/>
-          <a:lstStyle/>
-          <a:p>
-            <a:pPr algn="ctr" indent="0" marL="0">
-              <a:buNone/>
-            </a:pPr>
-            <a:r>
-              <a:rPr lang="en-US" sz="1200" dirty="0">
-                <a:solidFill>
-                  <a:srgbClr val="64748B"/>
-                </a:solidFill>
-                <a:latin typeface="Calibri" pitchFamily="34" charset="0"/>
-                <a:ea typeface="Calibri" pitchFamily="34" charset="-122"/>
-                <a:cs typeface="Calibri" pitchFamily="34" charset="-120"/>
-              </a:rPr>
-              <a:t>mean, corrected</a:t>
-            </a:r>
-            <a:endParaRPr lang="en-US" sz="1200" dirty="0"/>
-          </a:p>
-        </p:txBody>
-      </p:sp>
-      <p:sp>
-        <p:nvSpPr>
-          <p:cNvPr id="19" name="Shape 17"/>
-          <p:cNvSpPr/>
-          <p:nvPr/>
-        </p:nvSpPr>
-        <p:spPr>
-          <a:xfrm>
-            <a:off x="9006840" y="4343400"/>
-            <a:ext cx="2624328" cy="1737360"/>
-          </a:xfrm>
-          <a:prstGeom prst="roundRect">
-            <a:avLst>
-              <a:gd name="adj" fmla="val 4737"/>
-            </a:avLst>
-          </a:prstGeom>
-          <a:solidFill>
-            <a:srgbClr val="FFFFFF"/>
-          </a:solidFill>
-          <a:ln w="12700">
-            <a:solidFill>
-              <a:srgbClr val="E2E8F0"/>
-            </a:solidFill>
-            <a:prstDash val="solid"/>
-          </a:ln>
-          <a:effectLst>
-            <a:outerShdw sx="100000" sy="100000" kx="0" ky="0" algn="bl" rotWithShape="0" blurRad="114300" dist="38100" dir="5400000">
-              <a:srgbClr val="0F172A">
-                <a:alpha val="14000"/>
-              </a:srgbClr>
-            </a:outerShdw>
-          </a:effectLst>
-        </p:spPr>
-      </p:sp>
-      <p:sp>
-        <p:nvSpPr>
-          <p:cNvPr id="20" name="Text 18"/>
-          <p:cNvSpPr/>
-          <p:nvPr/>
-        </p:nvSpPr>
-        <p:spPr>
-          <a:xfrm>
-            <a:off x="9006840" y="4526280"/>
-            <a:ext cx="2624328" cy="822960"/>
-          </a:xfrm>
-          <a:prstGeom prst="rect">
-            <a:avLst/>
-          </a:prstGeom>
-          <a:noFill/>
-          <a:ln/>
-        </p:spPr>
-        <p:txBody>
-          <a:bodyPr wrap="square" lIns="0" tIns="0" rIns="0" bIns="0" rtlCol="0" anchor="ctr"/>
-          <a:lstStyle/>
-          <a:p>
-            <a:pPr algn="ctr" indent="0" marL="0">
-              <a:buNone/>
-            </a:pPr>
-            <a:r>
-              <a:rPr lang="en-US" sz="3400" b="1" dirty="0">
-                <a:solidFill>
-                  <a:srgbClr val="DC2626"/>
-                </a:solidFill>
-                <a:latin typeface="Cambria" pitchFamily="34" charset="0"/>
-                <a:ea typeface="Cambria" pitchFamily="34" charset="-122"/>
-                <a:cs typeface="Cambria" pitchFamily="34" charset="-120"/>
-              </a:rPr>
-              <a:t>−0.01</a:t>
-            </a:r>
-            <a:endParaRPr lang="en-US" sz="3400" dirty="0"/>
-          </a:p>
-        </p:txBody>
-      </p:sp>
-      <p:sp>
-        <p:nvSpPr>
-          <p:cNvPr id="21" name="Text 19"/>
-          <p:cNvSpPr/>
-          <p:nvPr/>
-        </p:nvSpPr>
-        <p:spPr>
-          <a:xfrm>
-            <a:off x="9144000" y="5349240"/>
-            <a:ext cx="2350008" cy="548640"/>
-          </a:xfrm>
-          <a:prstGeom prst="rect">
-            <a:avLst/>
-          </a:prstGeom>
-          <a:noFill/>
-          <a:ln/>
-        </p:spPr>
-        <p:txBody>
-          <a:bodyPr wrap="square" lIns="0" tIns="0" rIns="0" bIns="0" rtlCol="0" anchor="ctr"/>
-          <a:lstStyle/>
-          <a:p>
-            <a:pPr algn="ctr" indent="0" marL="0">
-              <a:buNone/>
-            </a:pPr>
-            <a:r>
-              <a:rPr lang="en-US" sz="1200" dirty="0">
-                <a:solidFill>
-                  <a:srgbClr val="64748B"/>
-                </a:solidFill>
-                <a:latin typeface="Calibri" pitchFamily="34" charset="0"/>
-                <a:ea typeface="Calibri" pitchFamily="34" charset="-122"/>
-                <a:cs typeface="Calibri" pitchFamily="34" charset="-120"/>
-              </a:rPr>
-              <a:t>shuffle null</a:t>
-            </a:r>
-            <a:endParaRPr lang="en-US" sz="1200" dirty="0"/>
-          </a:p>
-        </p:txBody>
-      </p:sp>
-      <p:sp>
-        <p:nvSpPr>
-          <p:cNvPr id="22" name="Text 20"/>
-          <p:cNvSpPr/>
-          <p:nvPr/>
-        </p:nvSpPr>
-        <p:spPr>
-          <a:xfrm>
-            <a:off x="658368" y="6309360"/>
-            <a:ext cx="10881360" cy="365760"/>
-          </a:xfrm>
-          <a:prstGeom prst="rect">
-            <a:avLst/>
-          </a:prstGeom>
-          <a:noFill/>
-          <a:ln/>
-        </p:spPr>
-        <p:txBody>
-          <a:bodyPr wrap="square" lIns="0" tIns="0" rIns="0" bIns="0" rtlCol="0" anchor="ctr"/>
-          <a:lstStyle/>
-          <a:p>
-            <a:pPr indent="0" marL="0">
-              <a:buNone/>
-            </a:pPr>
-            <a:r>
-              <a:rPr lang="en-US" sz="1300" b="1" i="1" dirty="0">
-                <a:solidFill>
-                  <a:srgbClr val="1E293B"/>
-                </a:solidFill>
-                <a:latin typeface="Calibri" pitchFamily="34" charset="0"/>
-                <a:ea typeface="Calibri" pitchFamily="34" charset="-122"/>
-                <a:cs typeface="Calibri" pitchFamily="34" charset="-120"/>
-              </a:rPr>
-              <a:t>Still above the null in every animal — the finding holds, it's just smaller than I said.</a:t>
-            </a:r>
-            <a:endParaRPr lang="en-US" sz="1300" dirty="0"/>
           </a:p>
         </p:txBody>
       </p:sp>
@@ -4577,13 +5862,13 @@
             <a:r>
               <a:rPr lang="en-US" sz="1200" b="1" spc="300" kern="0" dirty="0">
                 <a:solidFill>
-                  <a:srgbClr val="16A34A"/>
-                </a:solidFill>
-                <a:latin typeface="Calibri" pitchFamily="34" charset="0"/>
-                <a:ea typeface="Calibri" pitchFamily="34" charset="-122"/>
-                <a:cs typeface="Calibri" pitchFamily="34" charset="-120"/>
-              </a:rPr>
-              <a:t>ASK 3 · CROSSTALK</a:t>
+                  <a:srgbClr val="D97706"/>
+                </a:solidFill>
+                <a:latin typeface="Calibri" pitchFamily="34" charset="0"/>
+                <a:ea typeface="Calibri" pitchFamily="34" charset="-122"/>
+                <a:cs typeface="Calibri" pitchFamily="34" charset="-120"/>
+              </a:rPr>
+              <a:t>ASK 2 · THE CORRECTION</a:t>
             </a:r>
             <a:endParaRPr lang="en-US" sz="1200" dirty="0"/>
           </a:p>
@@ -4622,49 +5907,141 @@
                 <a:ea typeface="Cambria" pitchFamily="34" charset="-122"/>
                 <a:cs typeface="Cambria" pitchFamily="34" charset="-120"/>
               </a:rPr>
-              <a:t>No muscle contamination</a:t>
+              <a:t>We stress-tested our own headline number</a:t>
             </a:r>
             <a:endParaRPr lang="en-US" sz="2800" dirty="0"/>
           </a:p>
         </p:txBody>
       </p:sp>
-      <p:pic>
-        <p:nvPicPr>
-          <p:cNvPr id="4" name="Image 0" descr="outputs/verify/verification.png">    </p:cNvPr>
-          <p:cNvPicPr>
-            <a:picLocks noChangeAspect="1"/>
-          </p:cNvPicPr>
-          <p:nvPr/>
-        </p:nvPicPr>
-        <p:blipFill>
-          <a:blip r:embed="rId1"/>
-          <a:srcRect l="0" r="0" t="0" b="0"/>
-          <a:stretch/>
-        </p:blipFill>
-        <p:spPr>
-          <a:xfrm>
-            <a:off x="457200" y="1828800"/>
-            <a:ext cx="6949440" cy="2672862"/>
-          </a:xfrm>
-          <a:prstGeom prst="rect">
-            <a:avLst/>
-          </a:prstGeom>
-        </p:spPr>
-      </p:pic>
-      <p:sp>
-        <p:nvSpPr>
-          <p:cNvPr id="5" name="Shape 2"/>
-          <p:cNvSpPr/>
-          <p:nvPr/>
-        </p:nvSpPr>
-        <p:spPr>
-          <a:xfrm>
-            <a:off x="7635240" y="1920240"/>
-            <a:ext cx="3886200" cy="3794760"/>
+      <p:sp>
+        <p:nvSpPr>
+          <p:cNvPr id="4" name="Shape 2"/>
+          <p:cNvSpPr/>
+          <p:nvPr/>
+        </p:nvSpPr>
+        <p:spPr>
+          <a:xfrm>
+            <a:off x="640080" y="1783080"/>
+            <a:ext cx="5349240" cy="2286000"/>
           </a:xfrm>
           <a:prstGeom prst="roundRect">
             <a:avLst>
-              <a:gd name="adj" fmla="val 2169"/>
+              <a:gd name="adj" fmla="val 3600"/>
+            </a:avLst>
+          </a:prstGeom>
+          <a:solidFill>
+            <a:srgbClr val="F1F5F9"/>
+          </a:solidFill>
+          <a:ln w="12700">
+            <a:solidFill>
+              <a:srgbClr val="E2E8F0"/>
+            </a:solidFill>
+            <a:prstDash val="solid"/>
+          </a:ln>
+          <a:effectLst>
+            <a:outerShdw sx="100000" sy="100000" kx="0" ky="0" algn="bl" rotWithShape="0" blurRad="114300" dist="38100" dir="5400000">
+              <a:srgbClr val="0F172A">
+                <a:alpha val="14000"/>
+              </a:srgbClr>
+            </a:outerShdw>
+          </a:effectLst>
+        </p:spPr>
+      </p:sp>
+      <p:sp>
+        <p:nvSpPr>
+          <p:cNvPr id="5" name="Text 3"/>
+          <p:cNvSpPr/>
+          <p:nvPr/>
+        </p:nvSpPr>
+        <p:spPr>
+          <a:xfrm>
+            <a:off x="914400" y="2011680"/>
+            <a:ext cx="4572000" cy="320040"/>
+          </a:xfrm>
+          <a:prstGeom prst="rect">
+            <a:avLst/>
+          </a:prstGeom>
+          <a:noFill/>
+          <a:ln/>
+        </p:spPr>
+        <p:txBody>
+          <a:bodyPr wrap="square" lIns="0" tIns="0" rIns="0" bIns="0" rtlCol="0" anchor="ctr"/>
+          <a:lstStyle/>
+          <a:p>
+            <a:pPr indent="0" marL="0">
+              <a:buNone/>
+            </a:pPr>
+            <a:r>
+              <a:rPr lang="en-US" sz="1500" b="1" dirty="0">
+                <a:solidFill>
+                  <a:srgbClr val="D97706"/>
+                </a:solidFill>
+                <a:latin typeface="Calibri" pitchFamily="34" charset="0"/>
+                <a:ea typeface="Calibri" pitchFamily="34" charset="-122"/>
+                <a:cs typeface="Calibri" pitchFamily="34" charset="-120"/>
+              </a:rPr>
+              <a:t>What we checked</a:t>
+            </a:r>
+            <a:endParaRPr lang="en-US" sz="1500" dirty="0"/>
+          </a:p>
+        </p:txBody>
+      </p:sp>
+      <p:sp>
+        <p:nvSpPr>
+          <p:cNvPr id="6" name="Text 4"/>
+          <p:cNvSpPr/>
+          <p:nvPr/>
+        </p:nvSpPr>
+        <p:spPr>
+          <a:xfrm>
+            <a:off x="914400" y="2423160"/>
+            <a:ext cx="4846320" cy="1463040"/>
+          </a:xfrm>
+          <a:prstGeom prst="rect">
+            <a:avLst/>
+          </a:prstGeom>
+          <a:noFill/>
+          <a:ln/>
+        </p:spPr>
+        <p:txBody>
+          <a:bodyPr wrap="square" lIns="0" tIns="0" rIns="0" bIns="0" rtlCol="0" anchor="ctr"/>
+          <a:lstStyle/>
+          <a:p>
+            <a:pPr indent="0" marL="0">
+              <a:lnSpc>
+                <a:spcPct val="105000"/>
+              </a:lnSpc>
+              <a:buNone/>
+            </a:pPr>
+            <a:r>
+              <a:rPr lang="en-US" sz="1350" dirty="0">
+                <a:solidFill>
+                  <a:srgbClr val="1E293B"/>
+                </a:solidFill>
+                <a:latin typeface="Calibri" pitchFamily="34" charset="0"/>
+                <a:ea typeface="Calibri" pitchFamily="34" charset="-122"/>
+                <a:cs typeface="Calibri" pitchFamily="34" charset="-120"/>
+              </a:rPr>
+              <a:t>I removed stimulus and background across ALL trials at once, then measured cortex within each 5-day block. If the stimulus–reflex relationship shifts between blocks, that leaves stimulus variance behind — and cortex tracks stimulus.</a:t>
+            </a:r>
+            <a:endParaRPr lang="en-US" sz="1350" dirty="0"/>
+          </a:p>
+        </p:txBody>
+      </p:sp>
+      <p:sp>
+        <p:nvSpPr>
+          <p:cNvPr id="7" name="Shape 5"/>
+          <p:cNvSpPr/>
+          <p:nvPr/>
+        </p:nvSpPr>
+        <p:spPr>
+          <a:xfrm>
+            <a:off x="6172200" y="1783080"/>
+            <a:ext cx="5349240" cy="2286000"/>
+          </a:xfrm>
+          <a:prstGeom prst="roundRect">
+            <a:avLst>
+              <a:gd name="adj" fmla="val 3600"/>
             </a:avLst>
           </a:prstGeom>
           <a:solidFill>
@@ -4687,53 +6064,53 @@
       </p:sp>
       <p:sp>
         <p:nvSpPr>
-          <p:cNvPr id="6" name="Text 3"/>
-          <p:cNvSpPr/>
-          <p:nvPr/>
-        </p:nvSpPr>
-        <p:spPr>
-          <a:xfrm>
-            <a:off x="7863840" y="2148840"/>
-            <a:ext cx="3383280" cy="320040"/>
-          </a:xfrm>
-          <a:prstGeom prst="rect">
-            <a:avLst/>
-          </a:prstGeom>
-          <a:noFill/>
-          <a:ln/>
-        </p:spPr>
-        <p:txBody>
-          <a:bodyPr wrap="square" lIns="0" tIns="0" rIns="0" bIns="0" rtlCol="0" anchor="ctr"/>
-          <a:lstStyle/>
-          <a:p>
-            <a:pPr indent="0" marL="0">
-              <a:buNone/>
-            </a:pPr>
-            <a:r>
-              <a:rPr lang="en-US" sz="1400" b="1" dirty="0">
-                <a:solidFill>
-                  <a:srgbClr val="0D9488"/>
-                </a:solidFill>
-                <a:latin typeface="Calibri" pitchFamily="34" charset="0"/>
-                <a:ea typeface="Calibri" pitchFamily="34" charset="-122"/>
-                <a:cs typeface="Calibri" pitchFamily="34" charset="-120"/>
-              </a:rPr>
-              <a:t>Your method</a:t>
-            </a:r>
-            <a:endParaRPr lang="en-US" sz="1400" dirty="0"/>
-          </a:p>
-        </p:txBody>
-      </p:sp>
-      <p:sp>
-        <p:nvSpPr>
-          <p:cNvPr id="7" name="Text 4"/>
-          <p:cNvSpPr/>
-          <p:nvPr/>
-        </p:nvSpPr>
-        <p:spPr>
-          <a:xfrm>
-            <a:off x="7863840" y="2542032"/>
-            <a:ext cx="3429000" cy="1234440"/>
+          <p:cNvPr id="8" name="Text 6"/>
+          <p:cNvSpPr/>
+          <p:nvPr/>
+        </p:nvSpPr>
+        <p:spPr>
+          <a:xfrm>
+            <a:off x="6446520" y="2011680"/>
+            <a:ext cx="4572000" cy="320040"/>
+          </a:xfrm>
+          <a:prstGeom prst="rect">
+            <a:avLst/>
+          </a:prstGeom>
+          <a:noFill/>
+          <a:ln/>
+        </p:spPr>
+        <p:txBody>
+          <a:bodyPr wrap="square" lIns="0" tIns="0" rIns="0" bIns="0" rtlCol="0" anchor="ctr"/>
+          <a:lstStyle/>
+          <a:p>
+            <a:pPr indent="0" marL="0">
+              <a:buNone/>
+            </a:pPr>
+            <a:r>
+              <a:rPr lang="en-US" sz="1500" b="1" dirty="0">
+                <a:solidFill>
+                  <a:srgbClr val="16A34A"/>
+                </a:solidFill>
+                <a:latin typeface="Calibri" pitchFamily="34" charset="0"/>
+                <a:ea typeface="Calibri" pitchFamily="34" charset="-122"/>
+                <a:cs typeface="Calibri" pitchFamily="34" charset="-120"/>
+              </a:rPr>
+              <a:t>The fix</a:t>
+            </a:r>
+            <a:endParaRPr lang="en-US" sz="1500" dirty="0"/>
+          </a:p>
+        </p:txBody>
+      </p:sp>
+      <p:sp>
+        <p:nvSpPr>
+          <p:cNvPr id="9" name="Text 7"/>
+          <p:cNvSpPr/>
+          <p:nvPr/>
+        </p:nvSpPr>
+        <p:spPr>
+          <a:xfrm>
+            <a:off x="6446520" y="2423160"/>
+            <a:ext cx="4846320" cy="1463040"/>
           </a:xfrm>
           <a:prstGeom prst="rect">
             <a:avLst/>
@@ -4752,7 +6129,7 @@
               <a:buNone/>
             </a:pPr>
             <a:r>
-              <a:rPr lang="en-US" sz="1300" dirty="0">
+              <a:rPr lang="en-US" sz="1350" dirty="0">
                 <a:solidFill>
                   <a:srgbClr val="1E293B"/>
                 </a:solidFill>
@@ -4760,103 +6137,223 @@
                 <a:ea typeface="Calibri" pitchFamily="34" charset="-122"/>
                 <a:cs typeface="Calibri" pitchFamily="34" charset="-120"/>
               </a:rPr>
-              <a:t>Correlate cortical power against muscle power, band by band. Muscle artefact lives at high frequency, so contamination would show there.</a:t>
-            </a:r>
-            <a:endParaRPr lang="en-US" sz="1300" dirty="0"/>
-          </a:p>
-        </p:txBody>
-      </p:sp>
-      <p:sp>
-        <p:nvSpPr>
-          <p:cNvPr id="8" name="Text 5"/>
-          <p:cNvSpPr/>
-          <p:nvPr/>
-        </p:nvSpPr>
-        <p:spPr>
-          <a:xfrm>
-            <a:off x="7863840" y="3840480"/>
-            <a:ext cx="3429000" cy="777240"/>
-          </a:xfrm>
-          <a:prstGeom prst="rect">
-            <a:avLst/>
-          </a:prstGeom>
-          <a:noFill/>
-          <a:ln/>
-        </p:spPr>
-        <p:txBody>
-          <a:bodyPr wrap="square" lIns="0" tIns="0" rIns="0" bIns="0" rtlCol="0" anchor="ctr"/>
-          <a:lstStyle/>
-          <a:p>
-            <a:pPr indent="0" marL="0">
-              <a:lnSpc>
-                <a:spcPct val="110000"/>
-              </a:lnSpc>
-              <a:buNone/>
-            </a:pPr>
-            <a:r>
-              <a:rPr lang="en-US" sz="2000" b="1" dirty="0">
-                <a:solidFill>
-                  <a:srgbClr val="16A34A"/>
+              <a:t>Remove them INSIDE each block, then decode. Nothing can leak across blocks. This is the conservative estimate and the one we'll quote.</a:t>
+            </a:r>
+            <a:endParaRPr lang="en-US" sz="1350" dirty="0"/>
+          </a:p>
+        </p:txBody>
+      </p:sp>
+      <p:sp>
+        <p:nvSpPr>
+          <p:cNvPr id="10" name="Shape 8"/>
+          <p:cNvSpPr/>
+          <p:nvPr/>
+        </p:nvSpPr>
+        <p:spPr>
+          <a:xfrm>
+            <a:off x="640080" y="4343400"/>
+            <a:ext cx="2624328" cy="1737360"/>
+          </a:xfrm>
+          <a:prstGeom prst="roundRect">
+            <a:avLst>
+              <a:gd name="adj" fmla="val 4737"/>
+            </a:avLst>
+          </a:prstGeom>
+          <a:solidFill>
+            <a:srgbClr val="FFFFFF"/>
+          </a:solidFill>
+          <a:ln w="12700">
+            <a:solidFill>
+              <a:srgbClr val="E2E8F0"/>
+            </a:solidFill>
+            <a:prstDash val="solid"/>
+          </a:ln>
+          <a:effectLst>
+            <a:outerShdw sx="100000" sy="100000" kx="0" ky="0" algn="bl" rotWithShape="0" blurRad="114300" dist="38100" dir="5400000">
+              <a:srgbClr val="0F172A">
+                <a:alpha val="14000"/>
+              </a:srgbClr>
+            </a:outerShdw>
+          </a:effectLst>
+        </p:spPr>
+      </p:sp>
+      <p:sp>
+        <p:nvSpPr>
+          <p:cNvPr id="11" name="Text 9"/>
+          <p:cNvSpPr/>
+          <p:nvPr/>
+        </p:nvSpPr>
+        <p:spPr>
+          <a:xfrm>
+            <a:off x="640080" y="4526280"/>
+            <a:ext cx="2624328" cy="822960"/>
+          </a:xfrm>
+          <a:prstGeom prst="rect">
+            <a:avLst/>
+          </a:prstGeom>
+          <a:noFill/>
+          <a:ln/>
+        </p:spPr>
+        <p:txBody>
+          <a:bodyPr wrap="square" lIns="0" tIns="0" rIns="0" bIns="0" rtlCol="0" anchor="ctr"/>
+          <a:lstStyle/>
+          <a:p>
+            <a:pPr algn="ctr" indent="0" marL="0">
+              <a:buNone/>
+            </a:pPr>
+            <a:r>
+              <a:rPr lang="en-US" sz="3400" b="1" dirty="0">
+                <a:solidFill>
+                  <a:srgbClr val="64748B"/>
                 </a:solidFill>
                 <a:latin typeface="Cambria" pitchFamily="34" charset="0"/>
                 <a:ea typeface="Cambria" pitchFamily="34" charset="-122"/>
                 <a:cs typeface="Cambria" pitchFamily="34" charset="-120"/>
               </a:rPr>
-              <a:t>Above 100 Hz:</a:t>
-            </a:r>
-            <a:endParaRPr lang="en-US" sz="2000" dirty="0"/>
-          </a:p>
-          <a:p>
-            <a:pPr indent="0" marL="0">
-              <a:lnSpc>
-                <a:spcPct val="110000"/>
-              </a:lnSpc>
-              <a:buNone/>
-            </a:pPr>
-            <a:r>
-              <a:rPr lang="en-US" sz="2000" b="1" dirty="0">
-                <a:solidFill>
-                  <a:srgbClr val="16A34A"/>
+              <a:t>0.35</a:t>
+            </a:r>
+            <a:endParaRPr lang="en-US" sz="3400" dirty="0"/>
+          </a:p>
+        </p:txBody>
+      </p:sp>
+      <p:sp>
+        <p:nvSpPr>
+          <p:cNvPr id="12" name="Text 10"/>
+          <p:cNvSpPr/>
+          <p:nvPr/>
+        </p:nvSpPr>
+        <p:spPr>
+          <a:xfrm>
+            <a:off x="777240" y="5349240"/>
+            <a:ext cx="2350008" cy="548640"/>
+          </a:xfrm>
+          <a:prstGeom prst="rect">
+            <a:avLst/>
+          </a:prstGeom>
+          <a:noFill/>
+          <a:ln/>
+        </p:spPr>
+        <p:txBody>
+          <a:bodyPr wrap="square" lIns="0" tIns="0" rIns="0" bIns="0" rtlCol="0" anchor="ctr"/>
+          <a:lstStyle/>
+          <a:p>
+            <a:pPr algn="ctr" indent="0" marL="0">
+              <a:buNone/>
+            </a:pPr>
+            <a:r>
+              <a:rPr lang="en-US" sz="1200" dirty="0">
+                <a:solidFill>
+                  <a:srgbClr val="64748B"/>
+                </a:solidFill>
+                <a:latin typeface="Calibri" pitchFamily="34" charset="0"/>
+                <a:ea typeface="Calibri" pitchFamily="34" charset="-122"/>
+                <a:cs typeface="Calibri" pitchFamily="34" charset="-120"/>
+              </a:rPr>
+              <a:t>best block, old method</a:t>
+            </a:r>
+            <a:endParaRPr lang="en-US" sz="1200" dirty="0"/>
+          </a:p>
+        </p:txBody>
+      </p:sp>
+      <p:sp>
+        <p:nvSpPr>
+          <p:cNvPr id="13" name="Shape 11"/>
+          <p:cNvSpPr/>
+          <p:nvPr/>
+        </p:nvSpPr>
+        <p:spPr>
+          <a:xfrm>
+            <a:off x="3429000" y="4343400"/>
+            <a:ext cx="2624328" cy="1737360"/>
+          </a:xfrm>
+          <a:prstGeom prst="roundRect">
+            <a:avLst>
+              <a:gd name="adj" fmla="val 4737"/>
+            </a:avLst>
+          </a:prstGeom>
+          <a:solidFill>
+            <a:srgbClr val="FFFFFF"/>
+          </a:solidFill>
+          <a:ln w="12700">
+            <a:solidFill>
+              <a:srgbClr val="E2E8F0"/>
+            </a:solidFill>
+            <a:prstDash val="solid"/>
+          </a:ln>
+          <a:effectLst>
+            <a:outerShdw sx="100000" sy="100000" kx="0" ky="0" algn="bl" rotWithShape="0" blurRad="114300" dist="38100" dir="5400000">
+              <a:srgbClr val="0F172A">
+                <a:alpha val="14000"/>
+              </a:srgbClr>
+            </a:outerShdw>
+          </a:effectLst>
+        </p:spPr>
+      </p:sp>
+      <p:sp>
+        <p:nvSpPr>
+          <p:cNvPr id="14" name="Text 12"/>
+          <p:cNvSpPr/>
+          <p:nvPr/>
+        </p:nvSpPr>
+        <p:spPr>
+          <a:xfrm>
+            <a:off x="3429000" y="4526280"/>
+            <a:ext cx="2624328" cy="822960"/>
+          </a:xfrm>
+          <a:prstGeom prst="rect">
+            <a:avLst/>
+          </a:prstGeom>
+          <a:noFill/>
+          <a:ln/>
+        </p:spPr>
+        <p:txBody>
+          <a:bodyPr wrap="square" lIns="0" tIns="0" rIns="0" bIns="0" rtlCol="0" anchor="ctr"/>
+          <a:lstStyle/>
+          <a:p>
+            <a:pPr algn="ctr" indent="0" marL="0">
+              <a:buNone/>
+            </a:pPr>
+            <a:r>
+              <a:rPr lang="en-US" sz="3400" b="1" dirty="0">
+                <a:solidFill>
+                  <a:srgbClr val="64748B"/>
                 </a:solidFill>
                 <a:latin typeface="Cambria" pitchFamily="34" charset="0"/>
                 <a:ea typeface="Cambria" pitchFamily="34" charset="-122"/>
                 <a:cs typeface="Cambria" pitchFamily="34" charset="-120"/>
               </a:rPr>
-              <a:t>r = +0.06</a:t>
-            </a:r>
-            <a:endParaRPr lang="en-US" sz="2000" dirty="0"/>
-          </a:p>
-        </p:txBody>
-      </p:sp>
-      <p:sp>
-        <p:nvSpPr>
-          <p:cNvPr id="9" name="Text 6"/>
-          <p:cNvSpPr/>
-          <p:nvPr/>
-        </p:nvSpPr>
-        <p:spPr>
-          <a:xfrm>
-            <a:off x="7863840" y="4709160"/>
-            <a:ext cx="3429000" cy="914400"/>
-          </a:xfrm>
-          <a:prstGeom prst="rect">
-            <a:avLst/>
-          </a:prstGeom>
-          <a:noFill/>
-          <a:ln/>
-        </p:spPr>
-        <p:txBody>
-          <a:bodyPr wrap="square" lIns="0" tIns="0" rIns="0" bIns="0" rtlCol="0" anchor="ctr"/>
-          <a:lstStyle/>
-          <a:p>
-            <a:pPr indent="0" marL="0">
-              <a:lnSpc>
-                <a:spcPct val="105000"/>
-              </a:lnSpc>
-              <a:buNone/>
-            </a:pPr>
-            <a:r>
-              <a:rPr lang="en-US" sz="1250" i="1" dirty="0">
+              <a:t>0.09</a:t>
+            </a:r>
+            <a:endParaRPr lang="en-US" sz="3400" dirty="0"/>
+          </a:p>
+        </p:txBody>
+      </p:sp>
+      <p:sp>
+        <p:nvSpPr>
+          <p:cNvPr id="15" name="Text 13"/>
+          <p:cNvSpPr/>
+          <p:nvPr/>
+        </p:nvSpPr>
+        <p:spPr>
+          <a:xfrm>
+            <a:off x="3566160" y="5349240"/>
+            <a:ext cx="2350008" cy="548640"/>
+          </a:xfrm>
+          <a:prstGeom prst="rect">
+            <a:avLst/>
+          </a:prstGeom>
+          <a:noFill/>
+          <a:ln/>
+        </p:spPr>
+        <p:txBody>
+          <a:bodyPr wrap="square" lIns="0" tIns="0" rIns="0" bIns="0" rtlCol="0" anchor="ctr"/>
+          <a:lstStyle/>
+          <a:p>
+            <a:pPr algn="ctr" indent="0" marL="0">
+              <a:buNone/>
+            </a:pPr>
+            <a:r>
+              <a:rPr lang="en-US" sz="1200" dirty="0">
                 <a:solidFill>
                   <a:srgbClr val="64748B"/>
                 </a:solidFill>
@@ -4864,9 +6361,272 @@
                 <a:ea typeface="Calibri" pitchFamily="34" charset="-122"/>
                 <a:cs typeface="Calibri" pitchFamily="34" charset="-120"/>
               </a:rPr>
-              <a:t>Essentially zero. Low bands slightly negative. Cortex marginally leads muscle, which is the acceptable direction.</a:t>
-            </a:r>
-            <a:endParaRPr lang="en-US" sz="1250" dirty="0"/>
+              <a:t>mean, old method</a:t>
+            </a:r>
+            <a:endParaRPr lang="en-US" sz="1200" dirty="0"/>
+          </a:p>
+        </p:txBody>
+      </p:sp>
+      <p:sp>
+        <p:nvSpPr>
+          <p:cNvPr id="16" name="Shape 14"/>
+          <p:cNvSpPr/>
+          <p:nvPr/>
+        </p:nvSpPr>
+        <p:spPr>
+          <a:xfrm>
+            <a:off x="6217920" y="4343400"/>
+            <a:ext cx="2624328" cy="1737360"/>
+          </a:xfrm>
+          <a:prstGeom prst="roundRect">
+            <a:avLst>
+              <a:gd name="adj" fmla="val 4737"/>
+            </a:avLst>
+          </a:prstGeom>
+          <a:solidFill>
+            <a:srgbClr val="FFFFFF"/>
+          </a:solidFill>
+          <a:ln w="12700">
+            <a:solidFill>
+              <a:srgbClr val="E2E8F0"/>
+            </a:solidFill>
+            <a:prstDash val="solid"/>
+          </a:ln>
+          <a:effectLst>
+            <a:outerShdw sx="100000" sy="100000" kx="0" ky="0" algn="bl" rotWithShape="0" blurRad="114300" dist="38100" dir="5400000">
+              <a:srgbClr val="0F172A">
+                <a:alpha val="14000"/>
+              </a:srgbClr>
+            </a:outerShdw>
+          </a:effectLst>
+        </p:spPr>
+      </p:sp>
+      <p:sp>
+        <p:nvSpPr>
+          <p:cNvPr id="17" name="Text 15"/>
+          <p:cNvSpPr/>
+          <p:nvPr/>
+        </p:nvSpPr>
+        <p:spPr>
+          <a:xfrm>
+            <a:off x="6217920" y="4526280"/>
+            <a:ext cx="2624328" cy="822960"/>
+          </a:xfrm>
+          <a:prstGeom prst="rect">
+            <a:avLst/>
+          </a:prstGeom>
+          <a:noFill/>
+          <a:ln/>
+        </p:spPr>
+        <p:txBody>
+          <a:bodyPr wrap="square" lIns="0" tIns="0" rIns="0" bIns="0" rtlCol="0" anchor="ctr"/>
+          <a:lstStyle/>
+          <a:p>
+            <a:pPr algn="ctr" indent="0" marL="0">
+              <a:buNone/>
+            </a:pPr>
+            <a:r>
+              <a:rPr lang="en-US" sz="3400" b="1" dirty="0">
+                <a:solidFill>
+                  <a:srgbClr val="16A34A"/>
+                </a:solidFill>
+                <a:latin typeface="Cambria" pitchFamily="34" charset="0"/>
+                <a:ea typeface="Cambria" pitchFamily="34" charset="-122"/>
+                <a:cs typeface="Cambria" pitchFamily="34" charset="-120"/>
+              </a:rPr>
+              <a:t>0.04</a:t>
+            </a:r>
+            <a:endParaRPr lang="en-US" sz="3400" dirty="0"/>
+          </a:p>
+        </p:txBody>
+      </p:sp>
+      <p:sp>
+        <p:nvSpPr>
+          <p:cNvPr id="18" name="Text 16"/>
+          <p:cNvSpPr/>
+          <p:nvPr/>
+        </p:nvSpPr>
+        <p:spPr>
+          <a:xfrm>
+            <a:off x="6355080" y="5349240"/>
+            <a:ext cx="2350008" cy="548640"/>
+          </a:xfrm>
+          <a:prstGeom prst="rect">
+            <a:avLst/>
+          </a:prstGeom>
+          <a:noFill/>
+          <a:ln/>
+        </p:spPr>
+        <p:txBody>
+          <a:bodyPr wrap="square" lIns="0" tIns="0" rIns="0" bIns="0" rtlCol="0" anchor="ctr"/>
+          <a:lstStyle/>
+          <a:p>
+            <a:pPr algn="ctr" indent="0" marL="0">
+              <a:buNone/>
+            </a:pPr>
+            <a:r>
+              <a:rPr lang="en-US" sz="1200" dirty="0">
+                <a:solidFill>
+                  <a:srgbClr val="64748B"/>
+                </a:solidFill>
+                <a:latin typeface="Calibri" pitchFamily="34" charset="0"/>
+                <a:ea typeface="Calibri" pitchFamily="34" charset="-122"/>
+                <a:cs typeface="Calibri" pitchFamily="34" charset="-120"/>
+              </a:rPr>
+              <a:t>mean, corrected</a:t>
+            </a:r>
+            <a:endParaRPr lang="en-US" sz="1200" dirty="0"/>
+          </a:p>
+        </p:txBody>
+      </p:sp>
+      <p:sp>
+        <p:nvSpPr>
+          <p:cNvPr id="19" name="Shape 17"/>
+          <p:cNvSpPr/>
+          <p:nvPr/>
+        </p:nvSpPr>
+        <p:spPr>
+          <a:xfrm>
+            <a:off x="9006840" y="4343400"/>
+            <a:ext cx="2624328" cy="1737360"/>
+          </a:xfrm>
+          <a:prstGeom prst="roundRect">
+            <a:avLst>
+              <a:gd name="adj" fmla="val 4737"/>
+            </a:avLst>
+          </a:prstGeom>
+          <a:solidFill>
+            <a:srgbClr val="FFFFFF"/>
+          </a:solidFill>
+          <a:ln w="12700">
+            <a:solidFill>
+              <a:srgbClr val="E2E8F0"/>
+            </a:solidFill>
+            <a:prstDash val="solid"/>
+          </a:ln>
+          <a:effectLst>
+            <a:outerShdw sx="100000" sy="100000" kx="0" ky="0" algn="bl" rotWithShape="0" blurRad="114300" dist="38100" dir="5400000">
+              <a:srgbClr val="0F172A">
+                <a:alpha val="14000"/>
+              </a:srgbClr>
+            </a:outerShdw>
+          </a:effectLst>
+        </p:spPr>
+      </p:sp>
+      <p:sp>
+        <p:nvSpPr>
+          <p:cNvPr id="20" name="Text 18"/>
+          <p:cNvSpPr/>
+          <p:nvPr/>
+        </p:nvSpPr>
+        <p:spPr>
+          <a:xfrm>
+            <a:off x="9006840" y="4526280"/>
+            <a:ext cx="2624328" cy="822960"/>
+          </a:xfrm>
+          <a:prstGeom prst="rect">
+            <a:avLst/>
+          </a:prstGeom>
+          <a:noFill/>
+          <a:ln/>
+        </p:spPr>
+        <p:txBody>
+          <a:bodyPr wrap="square" lIns="0" tIns="0" rIns="0" bIns="0" rtlCol="0" anchor="ctr"/>
+          <a:lstStyle/>
+          <a:p>
+            <a:pPr algn="ctr" indent="0" marL="0">
+              <a:buNone/>
+            </a:pPr>
+            <a:r>
+              <a:rPr lang="en-US" sz="3400" b="1" dirty="0">
+                <a:solidFill>
+                  <a:srgbClr val="DC2626"/>
+                </a:solidFill>
+                <a:latin typeface="Cambria" pitchFamily="34" charset="0"/>
+                <a:ea typeface="Cambria" pitchFamily="34" charset="-122"/>
+                <a:cs typeface="Cambria" pitchFamily="34" charset="-120"/>
+              </a:rPr>
+              <a:t>−0.01</a:t>
+            </a:r>
+            <a:endParaRPr lang="en-US" sz="3400" dirty="0"/>
+          </a:p>
+        </p:txBody>
+      </p:sp>
+      <p:sp>
+        <p:nvSpPr>
+          <p:cNvPr id="21" name="Text 19"/>
+          <p:cNvSpPr/>
+          <p:nvPr/>
+        </p:nvSpPr>
+        <p:spPr>
+          <a:xfrm>
+            <a:off x="9144000" y="5349240"/>
+            <a:ext cx="2350008" cy="548640"/>
+          </a:xfrm>
+          <a:prstGeom prst="rect">
+            <a:avLst/>
+          </a:prstGeom>
+          <a:noFill/>
+          <a:ln/>
+        </p:spPr>
+        <p:txBody>
+          <a:bodyPr wrap="square" lIns="0" tIns="0" rIns="0" bIns="0" rtlCol="0" anchor="ctr"/>
+          <a:lstStyle/>
+          <a:p>
+            <a:pPr algn="ctr" indent="0" marL="0">
+              <a:buNone/>
+            </a:pPr>
+            <a:r>
+              <a:rPr lang="en-US" sz="1200" dirty="0">
+                <a:solidFill>
+                  <a:srgbClr val="64748B"/>
+                </a:solidFill>
+                <a:latin typeface="Calibri" pitchFamily="34" charset="0"/>
+                <a:ea typeface="Calibri" pitchFamily="34" charset="-122"/>
+                <a:cs typeface="Calibri" pitchFamily="34" charset="-120"/>
+              </a:rPr>
+              <a:t>shuffle null</a:t>
+            </a:r>
+            <a:endParaRPr lang="en-US" sz="1200" dirty="0"/>
+          </a:p>
+        </p:txBody>
+      </p:sp>
+      <p:sp>
+        <p:nvSpPr>
+          <p:cNvPr id="22" name="Text 20"/>
+          <p:cNvSpPr/>
+          <p:nvPr/>
+        </p:nvSpPr>
+        <p:spPr>
+          <a:xfrm>
+            <a:off x="658368" y="6309360"/>
+            <a:ext cx="10881360" cy="365760"/>
+          </a:xfrm>
+          <a:prstGeom prst="rect">
+            <a:avLst/>
+          </a:prstGeom>
+          <a:noFill/>
+          <a:ln/>
+        </p:spPr>
+        <p:txBody>
+          <a:bodyPr wrap="square" lIns="0" tIns="0" rIns="0" bIns="0" rtlCol="0" anchor="ctr"/>
+          <a:lstStyle/>
+          <a:p>
+            <a:pPr indent="0" marL="0">
+              <a:buNone/>
+            </a:pPr>
+            <a:r>
+              <a:rPr lang="en-US" sz="1300" b="1" i="1" dirty="0">
+                <a:solidFill>
+                  <a:srgbClr val="1E293B"/>
+                </a:solidFill>
+                <a:latin typeface="Calibri" pitchFamily="34" charset="0"/>
+                <a:ea typeface="Calibri" pitchFamily="34" charset="-122"/>
+                <a:cs typeface="Calibri" pitchFamily="34" charset="-120"/>
+              </a:rPr>
+              <a:t>Still above the null in every animal — the finding holds, it's just smaller than I said.</a:t>
+            </a:r>
+            <a:endParaRPr lang="en-US" sz="1300" dirty="0"/>
           </a:p>
         </p:txBody>
       </p:sp>
@@ -4929,13 +6689,13 @@
             <a:r>
               <a:rPr lang="en-US" sz="1200" b="1" spc="300" kern="0" dirty="0">
                 <a:solidFill>
-                  <a:srgbClr val="6D28D9"/>
-                </a:solidFill>
-                <a:latin typeface="Calibri" pitchFamily="34" charset="0"/>
-                <a:ea typeface="Calibri" pitchFamily="34" charset="-122"/>
-                <a:cs typeface="Calibri" pitchFamily="34" charset="-120"/>
-              </a:rPr>
-              <a:t>ASK 4 · THE INTERNAL CONTROL</a:t>
+                  <a:srgbClr val="16A34A"/>
+                </a:solidFill>
+                <a:latin typeface="Calibri" pitchFamily="34" charset="0"/>
+                <a:ea typeface="Calibri" pitchFamily="34" charset="-122"/>
+                <a:cs typeface="Calibri" pitchFamily="34" charset="-120"/>
+              </a:rPr>
+              <a:t>ASK 3 · CROSSTALK</a:t>
             </a:r>
             <a:endParaRPr lang="en-US" sz="1200" dirty="0"/>
           </a:p>
@@ -4974,7 +6734,7 @@
                 <a:ea typeface="Cambria" pitchFamily="34" charset="-122"/>
                 <a:cs typeface="Cambria" pitchFamily="34" charset="-120"/>
               </a:rPr>
-              <a:t>The effect tracks how much they learned</a:t>
+              <a:t>No muscle contamination</a:t>
             </a:r>
             <a:endParaRPr lang="en-US" sz="2800" dirty="0"/>
           </a:p>
@@ -4982,7 +6742,7 @@
       </p:sp>
       <p:pic>
         <p:nvPicPr>
-          <p:cNvPr id="4" name="Image 0" descr="outputs/scaling/scaling.png">    </p:cNvPr>
+          <p:cNvPr id="4" name="Image 0" descr="outputs/verify/verification.png">    </p:cNvPr>
           <p:cNvPicPr>
             <a:picLocks noChangeAspect="1"/>
           </p:cNvPicPr>
@@ -5020,7 +6780,7 @@
             </a:avLst>
           </a:prstGeom>
           <a:solidFill>
-            <a:srgbClr val="F5F3FF"/>
+            <a:srgbClr val="F0FDF4"/>
           </a:solidFill>
           <a:ln w="12700">
             <a:solidFill>
@@ -5064,13 +6824,13 @@
             <a:r>
               <a:rPr lang="en-US" sz="1400" b="1" dirty="0">
                 <a:solidFill>
-                  <a:srgbClr val="6D28D9"/>
-                </a:solidFill>
-                <a:latin typeface="Calibri" pitchFamily="34" charset="0"/>
-                <a:ea typeface="Calibri" pitchFamily="34" charset="-122"/>
-                <a:cs typeface="Calibri" pitchFamily="34" charset="-120"/>
-              </a:rPr>
-              <a:t>Your idea</a:t>
+                  <a:srgbClr val="0D9488"/>
+                </a:solidFill>
+                <a:latin typeface="Calibri" pitchFamily="34" charset="0"/>
+                <a:ea typeface="Calibri" pitchFamily="34" charset="-122"/>
+                <a:cs typeface="Calibri" pitchFamily="34" charset="-120"/>
+              </a:rPr>
+              <a:t>Your method</a:t>
             </a:r>
             <a:endParaRPr lang="en-US" sz="1400" dirty="0"/>
           </a:p>
@@ -5112,7 +6872,7 @@
                 <a:ea typeface="Calibri" pitchFamily="34" charset="-122"/>
                 <a:cs typeface="Calibri" pitchFamily="34" charset="-120"/>
               </a:rPr>
-              <a:t>Animals that failed to condition shouldn't show the cortical effect. Two of ours failed — they're the built-in negative control.</a:t>
+              <a:t>Correlate cortical power against muscle power, band by band. Muscle artefact lives at high frequency, so contamination would show there.</a:t>
             </a:r>
             <a:endParaRPr lang="en-US" sz="1300" dirty="0"/>
           </a:p>
@@ -5127,33 +6887,56 @@
         <p:spPr>
           <a:xfrm>
             <a:off x="7863840" y="3840480"/>
-            <a:ext cx="3429000" cy="548640"/>
-          </a:xfrm>
-          <a:prstGeom prst="rect">
-            <a:avLst/>
-          </a:prstGeom>
-          <a:noFill/>
-          <a:ln/>
-        </p:spPr>
-        <p:txBody>
-          <a:bodyPr wrap="square" lIns="0" tIns="0" rIns="0" bIns="0" rtlCol="0" anchor="ctr"/>
-          <a:lstStyle/>
-          <a:p>
-            <a:pPr indent="0" marL="0">
-              <a:buNone/>
-            </a:pPr>
-            <a:r>
-              <a:rPr lang="en-US" sz="2600" b="1" dirty="0">
-                <a:solidFill>
-                  <a:srgbClr val="6D28D9"/>
+            <a:ext cx="3429000" cy="777240"/>
+          </a:xfrm>
+          <a:prstGeom prst="rect">
+            <a:avLst/>
+          </a:prstGeom>
+          <a:noFill/>
+          <a:ln/>
+        </p:spPr>
+        <p:txBody>
+          <a:bodyPr wrap="square" lIns="0" tIns="0" rIns="0" bIns="0" rtlCol="0" anchor="ctr"/>
+          <a:lstStyle/>
+          <a:p>
+            <a:pPr indent="0" marL="0">
+              <a:lnSpc>
+                <a:spcPct val="110000"/>
+              </a:lnSpc>
+              <a:buNone/>
+            </a:pPr>
+            <a:r>
+              <a:rPr lang="en-US" sz="2000" b="1" dirty="0">
+                <a:solidFill>
+                  <a:srgbClr val="16A34A"/>
                 </a:solidFill>
                 <a:latin typeface="Cambria" pitchFamily="34" charset="0"/>
                 <a:ea typeface="Cambria" pitchFamily="34" charset="-122"/>
                 <a:cs typeface="Cambria" pitchFamily="34" charset="-120"/>
               </a:rPr>
-              <a:t>r = +0.64</a:t>
-            </a:r>
-            <a:endParaRPr lang="en-US" sz="2600" dirty="0"/>
+              <a:t>Above 100 Hz:</a:t>
+            </a:r>
+            <a:endParaRPr lang="en-US" sz="2000" dirty="0"/>
+          </a:p>
+          <a:p>
+            <a:pPr indent="0" marL="0">
+              <a:lnSpc>
+                <a:spcPct val="110000"/>
+              </a:lnSpc>
+              <a:buNone/>
+            </a:pPr>
+            <a:r>
+              <a:rPr lang="en-US" sz="2000" b="1" dirty="0">
+                <a:solidFill>
+                  <a:srgbClr val="16A34A"/>
+                </a:solidFill>
+                <a:latin typeface="Cambria" pitchFamily="34" charset="0"/>
+                <a:ea typeface="Cambria" pitchFamily="34" charset="-122"/>
+                <a:cs typeface="Cambria" pitchFamily="34" charset="-120"/>
+              </a:rPr>
+              <a:t>r = +0.06</a:t>
+            </a:r>
+            <a:endParaRPr lang="en-US" sz="2000" dirty="0"/>
           </a:p>
         </p:txBody>
       </p:sp>
@@ -5165,7 +6948,7 @@
         </p:nvSpPr>
         <p:spPr>
           <a:xfrm>
-            <a:off x="7863840" y="4434840"/>
+            <a:off x="7863840" y="4709160"/>
             <a:ext cx="3429000" cy="914400"/>
           </a:xfrm>
           <a:prstGeom prst="rect">
@@ -5185,56 +6968,17 @@
               <a:buNone/>
             </a:pPr>
             <a:r>
-              <a:rPr lang="en-US" sz="1250" dirty="0">
-                <a:solidFill>
-                  <a:srgbClr val="1E293B"/>
-                </a:solidFill>
-                <a:latin typeface="Calibri" pitchFamily="34" charset="0"/>
-                <a:ea typeface="Calibri" pitchFamily="34" charset="-122"/>
-                <a:cs typeface="Calibri" pitchFamily="34" charset="-120"/>
-              </a:rPr>
-              <a:t>between learning and the change in coupling. The two successes gained coupling; the two failures didn't.</a:t>
+              <a:rPr lang="en-US" sz="1250" i="1" dirty="0">
+                <a:solidFill>
+                  <a:srgbClr val="64748B"/>
+                </a:solidFill>
+                <a:latin typeface="Calibri" pitchFamily="34" charset="0"/>
+                <a:ea typeface="Calibri" pitchFamily="34" charset="-122"/>
+                <a:cs typeface="Calibri" pitchFamily="34" charset="-120"/>
+              </a:rPr>
+              <a:t>Essentially zero. Low bands slightly negative. Cortex marginally leads muscle, which is the acceptable direction.</a:t>
             </a:r>
             <a:endParaRPr lang="en-US" sz="1250" dirty="0"/>
-          </a:p>
-        </p:txBody>
-      </p:sp>
-      <p:sp>
-        <p:nvSpPr>
-          <p:cNvPr id="10" name="Text 7"/>
-          <p:cNvSpPr/>
-          <p:nvPr/>
-        </p:nvSpPr>
-        <p:spPr>
-          <a:xfrm>
-            <a:off x="7863840" y="5394960"/>
-            <a:ext cx="3429000" cy="320040"/>
-          </a:xfrm>
-          <a:prstGeom prst="rect">
-            <a:avLst/>
-          </a:prstGeom>
-          <a:noFill/>
-          <a:ln/>
-        </p:spPr>
-        <p:txBody>
-          <a:bodyPr wrap="square" lIns="0" tIns="0" rIns="0" bIns="0" rtlCol="0" anchor="ctr"/>
-          <a:lstStyle/>
-          <a:p>
-            <a:pPr indent="0" marL="0">
-              <a:buNone/>
-            </a:pPr>
-            <a:r>
-              <a:rPr lang="en-US" sz="1200" b="1" i="1" dirty="0">
-                <a:solidFill>
-                  <a:srgbClr val="D97706"/>
-                </a:solidFill>
-                <a:latin typeface="Calibri" pitchFamily="34" charset="0"/>
-                <a:ea typeface="Calibri" pitchFamily="34" charset="-122"/>
-                <a:cs typeface="Calibri" pitchFamily="34" charset="-120"/>
-              </a:rPr>
-              <a:t>n = 5, so not significant yet.</a:t>
-            </a:r>
-            <a:endParaRPr lang="en-US" sz="1200" dirty="0"/>
           </a:p>
         </p:txBody>
       </p:sp>
@@ -5297,13 +7041,13 @@
             <a:r>
               <a:rPr lang="en-US" sz="1200" b="1" spc="300" kern="0" dirty="0">
                 <a:solidFill>
-                  <a:srgbClr val="D97706"/>
-                </a:solidFill>
-                <a:latin typeface="Calibri" pitchFamily="34" charset="0"/>
-                <a:ea typeface="Calibri" pitchFamily="34" charset="-122"/>
-                <a:cs typeface="Calibri" pitchFamily="34" charset="-120"/>
-              </a:rPr>
-              <a:t>NEW FINDING · A CONSTRAINT</a:t>
+                  <a:srgbClr val="6D28D9"/>
+                </a:solidFill>
+                <a:latin typeface="Calibri" pitchFamily="34" charset="0"/>
+                <a:ea typeface="Calibri" pitchFamily="34" charset="-122"/>
+                <a:cs typeface="Calibri" pitchFamily="34" charset="-120"/>
+              </a:rPr>
+              <a:t>ASK 4 · THE INTERNAL CONTROL</a:t>
             </a:r>
             <a:endParaRPr lang="en-US" sz="1200" dirty="0"/>
           </a:p>
@@ -5342,69 +7086,53 @@
                 <a:ea typeface="Cambria" pitchFamily="34" charset="-122"/>
                 <a:cs typeface="Cambria" pitchFamily="34" charset="-120"/>
               </a:rPr>
-              <a:t>We've run out of up-conditioned animals</a:t>
+              <a:t>The effect tracks how much they learned</a:t>
             </a:r>
             <a:endParaRPr lang="en-US" sz="2800" dirty="0"/>
           </a:p>
         </p:txBody>
       </p:sp>
-      <p:sp>
-        <p:nvSpPr>
-          <p:cNvPr id="4" name="Text 2"/>
-          <p:cNvSpPr/>
-          <p:nvPr/>
-        </p:nvSpPr>
-        <p:spPr>
-          <a:xfrm>
-            <a:off x="640080" y="1645920"/>
-            <a:ext cx="10881360" cy="548640"/>
-          </a:xfrm>
-          <a:prstGeom prst="rect">
-            <a:avLst/>
-          </a:prstGeom>
-          <a:noFill/>
-          <a:ln/>
-        </p:spPr>
-        <p:txBody>
-          <a:bodyPr wrap="square" lIns="0" tIns="0" rIns="0" bIns="0" rtlCol="0" anchor="ctr"/>
-          <a:lstStyle/>
-          <a:p>
-            <a:pPr indent="0" marL="0">
-              <a:buNone/>
-            </a:pPr>
-            <a:r>
-              <a:rPr lang="en-US" sz="1450" dirty="0">
-                <a:solidFill>
-                  <a:srgbClr val="1E293B"/>
-                </a:solidFill>
-                <a:latin typeface="Calibri" pitchFamily="34" charset="0"/>
-                <a:ea typeface="Calibri" pitchFamily="34" charset="-122"/>
-                <a:cs typeface="Calibri" pitchFamily="34" charset="-120"/>
-              </a:rPr>
-              <a:t>Using the reward criterion as a success readout across every animal's log — the same trick that found animals 3 and 4:</a:t>
-            </a:r>
-            <a:endParaRPr lang="en-US" sz="1450" dirty="0"/>
-          </a:p>
-        </p:txBody>
-      </p:sp>
-      <p:sp>
-        <p:nvSpPr>
-          <p:cNvPr id="5" name="Shape 3"/>
-          <p:cNvSpPr/>
-          <p:nvPr/>
-        </p:nvSpPr>
-        <p:spPr>
-          <a:xfrm>
-            <a:off x="640080" y="2377440"/>
-            <a:ext cx="10881360" cy="731520"/>
+      <p:pic>
+        <p:nvPicPr>
+          <p:cNvPr id="4" name="Image 0" descr="outputs/scaling/scaling.png">    </p:cNvPr>
+          <p:cNvPicPr>
+            <a:picLocks noChangeAspect="1"/>
+          </p:cNvPicPr>
+          <p:nvPr/>
+        </p:nvPicPr>
+        <p:blipFill>
+          <a:blip r:embed="rId1"/>
+          <a:srcRect l="0" r="0" t="0" b="0"/>
+          <a:stretch/>
+        </p:blipFill>
+        <p:spPr>
+          <a:xfrm>
+            <a:off x="457200" y="1828800"/>
+            <a:ext cx="6949440" cy="2672862"/>
+          </a:xfrm>
+          <a:prstGeom prst="rect">
+            <a:avLst/>
+          </a:prstGeom>
+        </p:spPr>
+      </p:pic>
+      <p:sp>
+        <p:nvSpPr>
+          <p:cNvPr id="5" name="Shape 2"/>
+          <p:cNvSpPr/>
+          <p:nvPr/>
+        </p:nvSpPr>
+        <p:spPr>
+          <a:xfrm>
+            <a:off x="7635240" y="1920240"/>
+            <a:ext cx="3886200" cy="3794760"/>
           </a:xfrm>
           <a:prstGeom prst="roundRect">
             <a:avLst>
-              <a:gd name="adj" fmla="val 11250"/>
+              <a:gd name="adj" fmla="val 2169"/>
             </a:avLst>
           </a:prstGeom>
           <a:solidFill>
-            <a:srgbClr val="FFFFFF"/>
+            <a:srgbClr val="F5F3FF"/>
           </a:solidFill>
           <a:ln w="12700">
             <a:solidFill>
@@ -5423,108 +7151,153 @@
       </p:sp>
       <p:sp>
         <p:nvSpPr>
-          <p:cNvPr id="6" name="Text 4"/>
-          <p:cNvSpPr/>
-          <p:nvPr/>
-        </p:nvSpPr>
-        <p:spPr>
-          <a:xfrm>
-            <a:off x="960120" y="2468880"/>
-            <a:ext cx="914400" cy="548640"/>
-          </a:xfrm>
-          <a:prstGeom prst="rect">
-            <a:avLst/>
-          </a:prstGeom>
-          <a:noFill/>
-          <a:ln/>
-        </p:spPr>
-        <p:txBody>
-          <a:bodyPr wrap="square" lIns="0" tIns="0" rIns="0" bIns="0" rtlCol="0" anchor="ctr"/>
-          <a:lstStyle/>
-          <a:p>
-            <a:pPr indent="0" marL="0">
-              <a:buNone/>
-            </a:pPr>
-            <a:r>
-              <a:rPr lang="en-US" sz="1700" b="1" dirty="0">
+          <p:cNvPr id="6" name="Text 3"/>
+          <p:cNvSpPr/>
+          <p:nvPr/>
+        </p:nvSpPr>
+        <p:spPr>
+          <a:xfrm>
+            <a:off x="7863840" y="2148840"/>
+            <a:ext cx="3383280" cy="320040"/>
+          </a:xfrm>
+          <a:prstGeom prst="rect">
+            <a:avLst/>
+          </a:prstGeom>
+          <a:noFill/>
+          <a:ln/>
+        </p:spPr>
+        <p:txBody>
+          <a:bodyPr wrap="square" lIns="0" tIns="0" rIns="0" bIns="0" rtlCol="0" anchor="ctr"/>
+          <a:lstStyle/>
+          <a:p>
+            <a:pPr indent="0" marL="0">
+              <a:buNone/>
+            </a:pPr>
+            <a:r>
+              <a:rPr lang="en-US" sz="1400" b="1" dirty="0">
+                <a:solidFill>
+                  <a:srgbClr val="6D28D9"/>
+                </a:solidFill>
+                <a:latin typeface="Calibri" pitchFamily="34" charset="0"/>
+                <a:ea typeface="Calibri" pitchFamily="34" charset="-122"/>
+                <a:cs typeface="Calibri" pitchFamily="34" charset="-120"/>
+              </a:rPr>
+              <a:t>Your idea</a:t>
+            </a:r>
+            <a:endParaRPr lang="en-US" sz="1400" dirty="0"/>
+          </a:p>
+        </p:txBody>
+      </p:sp>
+      <p:sp>
+        <p:nvSpPr>
+          <p:cNvPr id="7" name="Text 4"/>
+          <p:cNvSpPr/>
+          <p:nvPr/>
+        </p:nvSpPr>
+        <p:spPr>
+          <a:xfrm>
+            <a:off x="7863840" y="2542032"/>
+            <a:ext cx="3429000" cy="1234440"/>
+          </a:xfrm>
+          <a:prstGeom prst="rect">
+            <a:avLst/>
+          </a:prstGeom>
+          <a:noFill/>
+          <a:ln/>
+        </p:spPr>
+        <p:txBody>
+          <a:bodyPr wrap="square" lIns="0" tIns="0" rIns="0" bIns="0" rtlCol="0" anchor="ctr"/>
+          <a:lstStyle/>
+          <a:p>
+            <a:pPr indent="0" marL="0">
+              <a:lnSpc>
+                <a:spcPct val="105000"/>
+              </a:lnSpc>
+              <a:buNone/>
+            </a:pPr>
+            <a:r>
+              <a:rPr lang="en-US" sz="1300" dirty="0">
                 <a:solidFill>
                   <a:srgbClr val="1E293B"/>
+                </a:solidFill>
+                <a:latin typeface="Calibri" pitchFamily="34" charset="0"/>
+                <a:ea typeface="Calibri" pitchFamily="34" charset="-122"/>
+                <a:cs typeface="Calibri" pitchFamily="34" charset="-120"/>
+              </a:rPr>
+              <a:t>Animals that failed to condition shouldn't show the cortical effect. Two of ours failed — they're the built-in negative control.</a:t>
+            </a:r>
+            <a:endParaRPr lang="en-US" sz="1300" dirty="0"/>
+          </a:p>
+        </p:txBody>
+      </p:sp>
+      <p:sp>
+        <p:nvSpPr>
+          <p:cNvPr id="8" name="Text 5"/>
+          <p:cNvSpPr/>
+          <p:nvPr/>
+        </p:nvSpPr>
+        <p:spPr>
+          <a:xfrm>
+            <a:off x="7863840" y="3840480"/>
+            <a:ext cx="3429000" cy="548640"/>
+          </a:xfrm>
+          <a:prstGeom prst="rect">
+            <a:avLst/>
+          </a:prstGeom>
+          <a:noFill/>
+          <a:ln/>
+        </p:spPr>
+        <p:txBody>
+          <a:bodyPr wrap="square" lIns="0" tIns="0" rIns="0" bIns="0" rtlCol="0" anchor="ctr"/>
+          <a:lstStyle/>
+          <a:p>
+            <a:pPr indent="0" marL="0">
+              <a:buNone/>
+            </a:pPr>
+            <a:r>
+              <a:rPr lang="en-US" sz="2600" b="1" dirty="0">
+                <a:solidFill>
+                  <a:srgbClr val="6D28D9"/>
                 </a:solidFill>
                 <a:latin typeface="Cambria" pitchFamily="34" charset="0"/>
                 <a:ea typeface="Cambria" pitchFamily="34" charset="-122"/>
                 <a:cs typeface="Cambria" pitchFamily="34" charset="-120"/>
               </a:rPr>
-              <a:t>A3</a:t>
-            </a:r>
-            <a:endParaRPr lang="en-US" sz="1700" dirty="0"/>
-          </a:p>
-        </p:txBody>
-      </p:sp>
-      <p:sp>
-        <p:nvSpPr>
-          <p:cNvPr id="7" name="Text 5"/>
-          <p:cNvSpPr/>
-          <p:nvPr/>
-        </p:nvSpPr>
-        <p:spPr>
-          <a:xfrm>
-            <a:off x="1920240" y="2468880"/>
-            <a:ext cx="914400" cy="548640"/>
-          </a:xfrm>
-          <a:prstGeom prst="rect">
-            <a:avLst/>
-          </a:prstGeom>
-          <a:noFill/>
-          <a:ln/>
-        </p:spPr>
-        <p:txBody>
-          <a:bodyPr wrap="square" lIns="0" tIns="0" rIns="0" bIns="0" rtlCol="0" anchor="ctr"/>
-          <a:lstStyle/>
-          <a:p>
-            <a:pPr indent="0" marL="0">
-              <a:buNone/>
-            </a:pPr>
-            <a:r>
-              <a:rPr lang="en-US" sz="1300" dirty="0">
-                <a:solidFill>
-                  <a:srgbClr val="64748B"/>
-                </a:solidFill>
-                <a:latin typeface="Calibri" pitchFamily="34" charset="0"/>
-                <a:ea typeface="Calibri" pitchFamily="34" charset="-122"/>
-                <a:cs typeface="Calibri" pitchFamily="34" charset="-120"/>
-              </a:rPr>
-              <a:t>up</a:t>
-            </a:r>
-            <a:endParaRPr lang="en-US" sz="1300" dirty="0"/>
-          </a:p>
-        </p:txBody>
-      </p:sp>
-      <p:sp>
-        <p:nvSpPr>
-          <p:cNvPr id="8" name="Text 6"/>
-          <p:cNvSpPr/>
-          <p:nvPr/>
-        </p:nvSpPr>
-        <p:spPr>
-          <a:xfrm>
-            <a:off x="3017520" y="2468880"/>
-            <a:ext cx="2743200" cy="548640"/>
-          </a:xfrm>
-          <a:prstGeom prst="rect">
-            <a:avLst/>
-          </a:prstGeom>
-          <a:noFill/>
-          <a:ln/>
-        </p:spPr>
-        <p:txBody>
-          <a:bodyPr wrap="square" lIns="0" tIns="0" rIns="0" bIns="0" rtlCol="0" anchor="ctr"/>
-          <a:lstStyle/>
-          <a:p>
-            <a:pPr indent="0" marL="0">
-              <a:buNone/>
-            </a:pPr>
-            <a:r>
-              <a:rPr lang="en-US" sz="1350" dirty="0">
+              <a:t>r = +0.64</a:t>
+            </a:r>
+            <a:endParaRPr lang="en-US" sz="2600" dirty="0"/>
+          </a:p>
+        </p:txBody>
+      </p:sp>
+      <p:sp>
+        <p:nvSpPr>
+          <p:cNvPr id="9" name="Text 6"/>
+          <p:cNvSpPr/>
+          <p:nvPr/>
+        </p:nvSpPr>
+        <p:spPr>
+          <a:xfrm>
+            <a:off x="7863840" y="4434840"/>
+            <a:ext cx="3429000" cy="914400"/>
+          </a:xfrm>
+          <a:prstGeom prst="rect">
+            <a:avLst/>
+          </a:prstGeom>
+          <a:noFill/>
+          <a:ln/>
+        </p:spPr>
+        <p:txBody>
+          <a:bodyPr wrap="square" lIns="0" tIns="0" rIns="0" bIns="0" rtlCol="0" anchor="ctr"/>
+          <a:lstStyle/>
+          <a:p>
+            <a:pPr indent="0" marL="0">
+              <a:lnSpc>
+                <a:spcPct val="105000"/>
+              </a:lnSpc>
+              <a:buNone/>
+            </a:pPr>
+            <a:r>
+              <a:rPr lang="en-US" sz="1250" dirty="0">
                 <a:solidFill>
                   <a:srgbClr val="1E293B"/>
                 </a:solidFill>
@@ -5532,881 +7305,48 @@
                 <a:ea typeface="Calibri" pitchFamily="34" charset="-122"/>
                 <a:cs typeface="Calibri" pitchFamily="34" charset="-120"/>
               </a:rPr>
-              <a:t>RW  90 → 190</a:t>
-            </a:r>
-            <a:endParaRPr lang="en-US" sz="1350" dirty="0"/>
-          </a:p>
-        </p:txBody>
-      </p:sp>
-      <p:sp>
-        <p:nvSpPr>
-          <p:cNvPr id="9" name="Text 7"/>
-          <p:cNvSpPr/>
-          <p:nvPr/>
-        </p:nvSpPr>
-        <p:spPr>
-          <a:xfrm>
-            <a:off x="5943600" y="2468880"/>
-            <a:ext cx="5303520" cy="548640"/>
-          </a:xfrm>
-          <a:prstGeom prst="rect">
-            <a:avLst/>
-          </a:prstGeom>
-          <a:noFill/>
-          <a:ln/>
-        </p:spPr>
-        <p:txBody>
-          <a:bodyPr wrap="square" lIns="0" tIns="0" rIns="0" bIns="0" rtlCol="0" anchor="ctr"/>
-          <a:lstStyle/>
-          <a:p>
-            <a:pPr indent="0" marL="0">
-              <a:buNone/>
-            </a:pPr>
-            <a:r>
-              <a:rPr lang="en-US" sz="1300" b="1" dirty="0">
-                <a:solidFill>
-                  <a:srgbClr val="16A34A"/>
-                </a:solidFill>
-                <a:latin typeface="Calibri" pitchFamily="34" charset="0"/>
-                <a:ea typeface="Calibri" pitchFamily="34" charset="-122"/>
-                <a:cs typeface="Calibri" pitchFamily="34" charset="-120"/>
-              </a:rPr>
-              <a:t>bar raised — learned</a:t>
-            </a:r>
-            <a:endParaRPr lang="en-US" sz="1300" dirty="0"/>
-          </a:p>
-        </p:txBody>
-      </p:sp>
-      <p:sp>
-        <p:nvSpPr>
-          <p:cNvPr id="10" name="Shape 8"/>
-          <p:cNvSpPr/>
-          <p:nvPr/>
-        </p:nvSpPr>
-        <p:spPr>
-          <a:xfrm>
-            <a:off x="640080" y="3200400"/>
-            <a:ext cx="10881360" cy="731520"/>
-          </a:xfrm>
-          <a:prstGeom prst="roundRect">
-            <a:avLst>
-              <a:gd name="adj" fmla="val 11250"/>
-            </a:avLst>
-          </a:prstGeom>
-          <a:solidFill>
-            <a:srgbClr val="FFFFFF"/>
-          </a:solidFill>
-          <a:ln w="12700">
-            <a:solidFill>
-              <a:srgbClr val="E2E8F0"/>
-            </a:solidFill>
-            <a:prstDash val="solid"/>
-          </a:ln>
-          <a:effectLst>
-            <a:outerShdw sx="100000" sy="100000" kx="0" ky="0" algn="bl" rotWithShape="0" blurRad="114300" dist="38100" dir="5400000">
-              <a:srgbClr val="0F172A">
-                <a:alpha val="14000"/>
-              </a:srgbClr>
-            </a:outerShdw>
-          </a:effectLst>
-        </p:spPr>
-      </p:sp>
-      <p:sp>
-        <p:nvSpPr>
-          <p:cNvPr id="11" name="Text 9"/>
-          <p:cNvSpPr/>
-          <p:nvPr/>
-        </p:nvSpPr>
-        <p:spPr>
-          <a:xfrm>
-            <a:off x="960120" y="3291840"/>
-            <a:ext cx="914400" cy="548640"/>
-          </a:xfrm>
-          <a:prstGeom prst="rect">
-            <a:avLst/>
-          </a:prstGeom>
-          <a:noFill/>
-          <a:ln/>
-        </p:spPr>
-        <p:txBody>
-          <a:bodyPr wrap="square" lIns="0" tIns="0" rIns="0" bIns="0" rtlCol="0" anchor="ctr"/>
-          <a:lstStyle/>
-          <a:p>
-            <a:pPr indent="0" marL="0">
-              <a:buNone/>
-            </a:pPr>
-            <a:r>
-              <a:rPr lang="en-US" sz="1700" b="1" dirty="0">
-                <a:solidFill>
-                  <a:srgbClr val="1E293B"/>
-                </a:solidFill>
-                <a:latin typeface="Cambria" pitchFamily="34" charset="0"/>
-                <a:ea typeface="Cambria" pitchFamily="34" charset="-122"/>
-                <a:cs typeface="Cambria" pitchFamily="34" charset="-120"/>
-              </a:rPr>
-              <a:t>A4</a:t>
-            </a:r>
-            <a:endParaRPr lang="en-US" sz="1700" dirty="0"/>
-          </a:p>
-        </p:txBody>
-      </p:sp>
-      <p:sp>
-        <p:nvSpPr>
-          <p:cNvPr id="12" name="Text 10"/>
-          <p:cNvSpPr/>
-          <p:nvPr/>
-        </p:nvSpPr>
-        <p:spPr>
-          <a:xfrm>
-            <a:off x="1920240" y="3291840"/>
-            <a:ext cx="914400" cy="548640"/>
-          </a:xfrm>
-          <a:prstGeom prst="rect">
-            <a:avLst/>
-          </a:prstGeom>
-          <a:noFill/>
-          <a:ln/>
-        </p:spPr>
-        <p:txBody>
-          <a:bodyPr wrap="square" lIns="0" tIns="0" rIns="0" bIns="0" rtlCol="0" anchor="ctr"/>
-          <a:lstStyle/>
-          <a:p>
-            <a:pPr indent="0" marL="0">
-              <a:buNone/>
-            </a:pPr>
-            <a:r>
-              <a:rPr lang="en-US" sz="1300" dirty="0">
-                <a:solidFill>
-                  <a:srgbClr val="64748B"/>
-                </a:solidFill>
-                <a:latin typeface="Calibri" pitchFamily="34" charset="0"/>
-                <a:ea typeface="Calibri" pitchFamily="34" charset="-122"/>
-                <a:cs typeface="Calibri" pitchFamily="34" charset="-120"/>
-              </a:rPr>
-              <a:t>up</a:t>
-            </a:r>
-            <a:endParaRPr lang="en-US" sz="1300" dirty="0"/>
-          </a:p>
-        </p:txBody>
-      </p:sp>
-      <p:sp>
-        <p:nvSpPr>
-          <p:cNvPr id="13" name="Text 11"/>
-          <p:cNvSpPr/>
-          <p:nvPr/>
-        </p:nvSpPr>
-        <p:spPr>
-          <a:xfrm>
-            <a:off x="3017520" y="3291840"/>
-            <a:ext cx="2743200" cy="548640"/>
-          </a:xfrm>
-          <a:prstGeom prst="rect">
-            <a:avLst/>
-          </a:prstGeom>
-          <a:noFill/>
-          <a:ln/>
-        </p:spPr>
-        <p:txBody>
-          <a:bodyPr wrap="square" lIns="0" tIns="0" rIns="0" bIns="0" rtlCol="0" anchor="ctr"/>
-          <a:lstStyle/>
-          <a:p>
-            <a:pPr indent="0" marL="0">
-              <a:buNone/>
-            </a:pPr>
-            <a:r>
-              <a:rPr lang="en-US" sz="1350" dirty="0">
-                <a:solidFill>
-                  <a:srgbClr val="1E293B"/>
-                </a:solidFill>
-                <a:latin typeface="Calibri" pitchFamily="34" charset="0"/>
-                <a:ea typeface="Calibri" pitchFamily="34" charset="-122"/>
-                <a:cs typeface="Calibri" pitchFamily="34" charset="-120"/>
-              </a:rPr>
-              <a:t>RW 150 → 220</a:t>
-            </a:r>
-            <a:endParaRPr lang="en-US" sz="1350" dirty="0"/>
-          </a:p>
-        </p:txBody>
-      </p:sp>
-      <p:sp>
-        <p:nvSpPr>
-          <p:cNvPr id="14" name="Text 12"/>
-          <p:cNvSpPr/>
-          <p:nvPr/>
-        </p:nvSpPr>
-        <p:spPr>
-          <a:xfrm>
-            <a:off x="5943600" y="3291840"/>
-            <a:ext cx="5303520" cy="548640"/>
-          </a:xfrm>
-          <a:prstGeom prst="rect">
-            <a:avLst/>
-          </a:prstGeom>
-          <a:noFill/>
-          <a:ln/>
-        </p:spPr>
-        <p:txBody>
-          <a:bodyPr wrap="square" lIns="0" tIns="0" rIns="0" bIns="0" rtlCol="0" anchor="ctr"/>
-          <a:lstStyle/>
-          <a:p>
-            <a:pPr indent="0" marL="0">
-              <a:buNone/>
-            </a:pPr>
-            <a:r>
-              <a:rPr lang="en-US" sz="1300" b="1" dirty="0">
-                <a:solidFill>
-                  <a:srgbClr val="16A34A"/>
-                </a:solidFill>
-                <a:latin typeface="Calibri" pitchFamily="34" charset="0"/>
-                <a:ea typeface="Calibri" pitchFamily="34" charset="-122"/>
-                <a:cs typeface="Calibri" pitchFamily="34" charset="-120"/>
-              </a:rPr>
-              <a:t>bar raised — learned</a:t>
-            </a:r>
-            <a:endParaRPr lang="en-US" sz="1300" dirty="0"/>
-          </a:p>
-        </p:txBody>
-      </p:sp>
-      <p:sp>
-        <p:nvSpPr>
-          <p:cNvPr id="15" name="Shape 13"/>
-          <p:cNvSpPr/>
-          <p:nvPr/>
-        </p:nvSpPr>
-        <p:spPr>
-          <a:xfrm>
-            <a:off x="640080" y="4023360"/>
-            <a:ext cx="10881360" cy="731520"/>
-          </a:xfrm>
-          <a:prstGeom prst="roundRect">
-            <a:avLst>
-              <a:gd name="adj" fmla="val 11250"/>
-            </a:avLst>
-          </a:prstGeom>
-          <a:solidFill>
-            <a:srgbClr val="FFFFFF"/>
-          </a:solidFill>
-          <a:ln w="12700">
-            <a:solidFill>
-              <a:srgbClr val="E2E8F0"/>
-            </a:solidFill>
-            <a:prstDash val="solid"/>
-          </a:ln>
-          <a:effectLst>
-            <a:outerShdw sx="100000" sy="100000" kx="0" ky="0" algn="bl" rotWithShape="0" blurRad="114300" dist="38100" dir="5400000">
-              <a:srgbClr val="0F172A">
-                <a:alpha val="14000"/>
-              </a:srgbClr>
-            </a:outerShdw>
-          </a:effectLst>
-        </p:spPr>
-      </p:sp>
-      <p:sp>
-        <p:nvSpPr>
-          <p:cNvPr id="16" name="Text 14"/>
-          <p:cNvSpPr/>
-          <p:nvPr/>
-        </p:nvSpPr>
-        <p:spPr>
-          <a:xfrm>
-            <a:off x="960120" y="4114800"/>
-            <a:ext cx="914400" cy="548640"/>
-          </a:xfrm>
-          <a:prstGeom prst="rect">
-            <a:avLst/>
-          </a:prstGeom>
-          <a:noFill/>
-          <a:ln/>
-        </p:spPr>
-        <p:txBody>
-          <a:bodyPr wrap="square" lIns="0" tIns="0" rIns="0" bIns="0" rtlCol="0" anchor="ctr"/>
-          <a:lstStyle/>
-          <a:p>
-            <a:pPr indent="0" marL="0">
-              <a:buNone/>
-            </a:pPr>
-            <a:r>
-              <a:rPr lang="en-US" sz="1700" b="1" dirty="0">
-                <a:solidFill>
-                  <a:srgbClr val="1E293B"/>
-                </a:solidFill>
-                <a:latin typeface="Cambria" pitchFamily="34" charset="0"/>
-                <a:ea typeface="Cambria" pitchFamily="34" charset="-122"/>
-                <a:cs typeface="Cambria" pitchFamily="34" charset="-120"/>
-              </a:rPr>
-              <a:t>A1</a:t>
-            </a:r>
-            <a:endParaRPr lang="en-US" sz="1700" dirty="0"/>
-          </a:p>
-        </p:txBody>
-      </p:sp>
-      <p:sp>
-        <p:nvSpPr>
-          <p:cNvPr id="17" name="Text 15"/>
-          <p:cNvSpPr/>
-          <p:nvPr/>
-        </p:nvSpPr>
-        <p:spPr>
-          <a:xfrm>
-            <a:off x="1920240" y="4114800"/>
-            <a:ext cx="914400" cy="548640"/>
-          </a:xfrm>
-          <a:prstGeom prst="rect">
-            <a:avLst/>
-          </a:prstGeom>
-          <a:noFill/>
-          <a:ln/>
-        </p:spPr>
-        <p:txBody>
-          <a:bodyPr wrap="square" lIns="0" tIns="0" rIns="0" bIns="0" rtlCol="0" anchor="ctr"/>
-          <a:lstStyle/>
-          <a:p>
-            <a:pPr indent="0" marL="0">
-              <a:buNone/>
-            </a:pPr>
-            <a:r>
-              <a:rPr lang="en-US" sz="1300" dirty="0">
-                <a:solidFill>
-                  <a:srgbClr val="64748B"/>
-                </a:solidFill>
-                <a:latin typeface="Calibri" pitchFamily="34" charset="0"/>
-                <a:ea typeface="Calibri" pitchFamily="34" charset="-122"/>
-                <a:cs typeface="Calibri" pitchFamily="34" charset="-120"/>
-              </a:rPr>
-              <a:t>up</a:t>
-            </a:r>
-            <a:endParaRPr lang="en-US" sz="1300" dirty="0"/>
-          </a:p>
-        </p:txBody>
-      </p:sp>
-      <p:sp>
-        <p:nvSpPr>
-          <p:cNvPr id="18" name="Text 16"/>
-          <p:cNvSpPr/>
-          <p:nvPr/>
-        </p:nvSpPr>
-        <p:spPr>
-          <a:xfrm>
-            <a:off x="3017520" y="4114800"/>
-            <a:ext cx="2743200" cy="548640"/>
-          </a:xfrm>
-          <a:prstGeom prst="rect">
-            <a:avLst/>
-          </a:prstGeom>
-          <a:noFill/>
-          <a:ln/>
-        </p:spPr>
-        <p:txBody>
-          <a:bodyPr wrap="square" lIns="0" tIns="0" rIns="0" bIns="0" rtlCol="0" anchor="ctr"/>
-          <a:lstStyle/>
-          <a:p>
-            <a:pPr indent="0" marL="0">
-              <a:buNone/>
-            </a:pPr>
-            <a:r>
-              <a:rPr lang="en-US" sz="1350" dirty="0">
-                <a:solidFill>
-                  <a:srgbClr val="1E293B"/>
-                </a:solidFill>
-                <a:latin typeface="Calibri" pitchFamily="34" charset="0"/>
-                <a:ea typeface="Calibri" pitchFamily="34" charset="-122"/>
-                <a:cs typeface="Calibri" pitchFamily="34" charset="-120"/>
-              </a:rPr>
-              <a:t>RW 110 → 59</a:t>
-            </a:r>
-            <a:endParaRPr lang="en-US" sz="1350" dirty="0"/>
-          </a:p>
-        </p:txBody>
-      </p:sp>
-      <p:sp>
-        <p:nvSpPr>
-          <p:cNvPr id="19" name="Text 17"/>
-          <p:cNvSpPr/>
-          <p:nvPr/>
-        </p:nvSpPr>
-        <p:spPr>
-          <a:xfrm>
-            <a:off x="5943600" y="4114800"/>
-            <a:ext cx="5303520" cy="548640"/>
-          </a:xfrm>
-          <a:prstGeom prst="rect">
-            <a:avLst/>
-          </a:prstGeom>
-          <a:noFill/>
-          <a:ln/>
-        </p:spPr>
-        <p:txBody>
-          <a:bodyPr wrap="square" lIns="0" tIns="0" rIns="0" bIns="0" rtlCol="0" anchor="ctr"/>
-          <a:lstStyle/>
-          <a:p>
-            <a:pPr indent="0" marL="0">
-              <a:buNone/>
-            </a:pPr>
-            <a:r>
-              <a:rPr lang="en-US" sz="1300" b="1" dirty="0">
-                <a:solidFill>
-                  <a:srgbClr val="DC2626"/>
-                </a:solidFill>
-                <a:latin typeface="Calibri" pitchFamily="34" charset="0"/>
-                <a:ea typeface="Calibri" pitchFamily="34" charset="-122"/>
-                <a:cs typeface="Calibri" pitchFamily="34" charset="-120"/>
-              </a:rPr>
-              <a:t>bar lowered — struggled</a:t>
-            </a:r>
-            <a:endParaRPr lang="en-US" sz="1300" dirty="0"/>
-          </a:p>
-        </p:txBody>
-      </p:sp>
-      <p:sp>
-        <p:nvSpPr>
-          <p:cNvPr id="20" name="Shape 18"/>
-          <p:cNvSpPr/>
-          <p:nvPr/>
-        </p:nvSpPr>
-        <p:spPr>
-          <a:xfrm>
-            <a:off x="640080" y="4846320"/>
-            <a:ext cx="10881360" cy="731520"/>
-          </a:xfrm>
-          <a:prstGeom prst="roundRect">
-            <a:avLst>
-              <a:gd name="adj" fmla="val 11250"/>
-            </a:avLst>
-          </a:prstGeom>
-          <a:solidFill>
-            <a:srgbClr val="FFFFFF"/>
-          </a:solidFill>
-          <a:ln w="12700">
-            <a:solidFill>
-              <a:srgbClr val="E2E8F0"/>
-            </a:solidFill>
-            <a:prstDash val="solid"/>
-          </a:ln>
-          <a:effectLst>
-            <a:outerShdw sx="100000" sy="100000" kx="0" ky="0" algn="bl" rotWithShape="0" blurRad="114300" dist="38100" dir="5400000">
-              <a:srgbClr val="0F172A">
-                <a:alpha val="14000"/>
-              </a:srgbClr>
-            </a:outerShdw>
-          </a:effectLst>
-        </p:spPr>
-      </p:sp>
-      <p:sp>
-        <p:nvSpPr>
-          <p:cNvPr id="21" name="Text 19"/>
-          <p:cNvSpPr/>
-          <p:nvPr/>
-        </p:nvSpPr>
-        <p:spPr>
-          <a:xfrm>
-            <a:off x="960120" y="4937760"/>
-            <a:ext cx="914400" cy="548640"/>
-          </a:xfrm>
-          <a:prstGeom prst="rect">
-            <a:avLst/>
-          </a:prstGeom>
-          <a:noFill/>
-          <a:ln/>
-        </p:spPr>
-        <p:txBody>
-          <a:bodyPr wrap="square" lIns="0" tIns="0" rIns="0" bIns="0" rtlCol="0" anchor="ctr"/>
-          <a:lstStyle/>
-          <a:p>
-            <a:pPr indent="0" marL="0">
-              <a:buNone/>
-            </a:pPr>
-            <a:r>
-              <a:rPr lang="en-US" sz="1700" b="1" dirty="0">
-                <a:solidFill>
-                  <a:srgbClr val="1E293B"/>
-                </a:solidFill>
-                <a:latin typeface="Cambria" pitchFamily="34" charset="0"/>
-                <a:ea typeface="Cambria" pitchFamily="34" charset="-122"/>
-                <a:cs typeface="Cambria" pitchFamily="34" charset="-120"/>
-              </a:rPr>
-              <a:t>A6</a:t>
-            </a:r>
-            <a:endParaRPr lang="en-US" sz="1700" dirty="0"/>
-          </a:p>
-        </p:txBody>
-      </p:sp>
-      <p:sp>
-        <p:nvSpPr>
-          <p:cNvPr id="22" name="Text 20"/>
-          <p:cNvSpPr/>
-          <p:nvPr/>
-        </p:nvSpPr>
-        <p:spPr>
-          <a:xfrm>
-            <a:off x="1920240" y="4937760"/>
-            <a:ext cx="914400" cy="548640"/>
-          </a:xfrm>
-          <a:prstGeom prst="rect">
-            <a:avLst/>
-          </a:prstGeom>
-          <a:noFill/>
-          <a:ln/>
-        </p:spPr>
-        <p:txBody>
-          <a:bodyPr wrap="square" lIns="0" tIns="0" rIns="0" bIns="0" rtlCol="0" anchor="ctr"/>
-          <a:lstStyle/>
-          <a:p>
-            <a:pPr indent="0" marL="0">
-              <a:buNone/>
-            </a:pPr>
-            <a:r>
-              <a:rPr lang="en-US" sz="1300" dirty="0">
-                <a:solidFill>
-                  <a:srgbClr val="64748B"/>
-                </a:solidFill>
-                <a:latin typeface="Calibri" pitchFamily="34" charset="0"/>
-                <a:ea typeface="Calibri" pitchFamily="34" charset="-122"/>
-                <a:cs typeface="Calibri" pitchFamily="34" charset="-120"/>
-              </a:rPr>
-              <a:t>up</a:t>
-            </a:r>
-            <a:endParaRPr lang="en-US" sz="1300" dirty="0"/>
-          </a:p>
-        </p:txBody>
-      </p:sp>
-      <p:sp>
-        <p:nvSpPr>
-          <p:cNvPr id="23" name="Text 21"/>
-          <p:cNvSpPr/>
-          <p:nvPr/>
-        </p:nvSpPr>
-        <p:spPr>
-          <a:xfrm>
-            <a:off x="3017520" y="4937760"/>
-            <a:ext cx="2743200" cy="548640"/>
-          </a:xfrm>
-          <a:prstGeom prst="rect">
-            <a:avLst/>
-          </a:prstGeom>
-          <a:noFill/>
-          <a:ln/>
-        </p:spPr>
-        <p:txBody>
-          <a:bodyPr wrap="square" lIns="0" tIns="0" rIns="0" bIns="0" rtlCol="0" anchor="ctr"/>
-          <a:lstStyle/>
-          <a:p>
-            <a:pPr indent="0" marL="0">
-              <a:buNone/>
-            </a:pPr>
-            <a:r>
-              <a:rPr lang="en-US" sz="1350" dirty="0">
-                <a:solidFill>
-                  <a:srgbClr val="1E293B"/>
-                </a:solidFill>
-                <a:latin typeface="Calibri" pitchFamily="34" charset="0"/>
-                <a:ea typeface="Calibri" pitchFamily="34" charset="-122"/>
-                <a:cs typeface="Calibri" pitchFamily="34" charset="-120"/>
-              </a:rPr>
-              <a:t>RW 150 → 80</a:t>
-            </a:r>
-            <a:endParaRPr lang="en-US" sz="1350" dirty="0"/>
-          </a:p>
-        </p:txBody>
-      </p:sp>
-      <p:sp>
-        <p:nvSpPr>
-          <p:cNvPr id="24" name="Text 22"/>
-          <p:cNvSpPr/>
-          <p:nvPr/>
-        </p:nvSpPr>
-        <p:spPr>
-          <a:xfrm>
-            <a:off x="5943600" y="4937760"/>
-            <a:ext cx="5303520" cy="548640"/>
-          </a:xfrm>
-          <a:prstGeom prst="rect">
-            <a:avLst/>
-          </a:prstGeom>
-          <a:noFill/>
-          <a:ln/>
-        </p:spPr>
-        <p:txBody>
-          <a:bodyPr wrap="square" lIns="0" tIns="0" rIns="0" bIns="0" rtlCol="0" anchor="ctr"/>
-          <a:lstStyle/>
-          <a:p>
-            <a:pPr indent="0" marL="0">
-              <a:buNone/>
-            </a:pPr>
-            <a:r>
-              <a:rPr lang="en-US" sz="1300" b="1" dirty="0">
-                <a:solidFill>
-                  <a:srgbClr val="DC2626"/>
-                </a:solidFill>
-                <a:latin typeface="Calibri" pitchFamily="34" charset="0"/>
-                <a:ea typeface="Calibri" pitchFamily="34" charset="-122"/>
-                <a:cs typeface="Calibri" pitchFamily="34" charset="-120"/>
-              </a:rPr>
-              <a:t>bar lowered — struggled</a:t>
-            </a:r>
-            <a:endParaRPr lang="en-US" sz="1300" dirty="0"/>
-          </a:p>
-        </p:txBody>
-      </p:sp>
-      <p:sp>
-        <p:nvSpPr>
-          <p:cNvPr id="25" name="Shape 23"/>
-          <p:cNvSpPr/>
-          <p:nvPr/>
-        </p:nvSpPr>
-        <p:spPr>
-          <a:xfrm>
-            <a:off x="640080" y="5669280"/>
-            <a:ext cx="10881360" cy="731520"/>
-          </a:xfrm>
-          <a:prstGeom prst="roundRect">
-            <a:avLst>
-              <a:gd name="adj" fmla="val 11250"/>
-            </a:avLst>
-          </a:prstGeom>
-          <a:solidFill>
-            <a:srgbClr val="FFFFFF"/>
-          </a:solidFill>
-          <a:ln w="12700">
-            <a:solidFill>
-              <a:srgbClr val="E2E8F0"/>
-            </a:solidFill>
-            <a:prstDash val="solid"/>
-          </a:ln>
-          <a:effectLst>
-            <a:outerShdw sx="100000" sy="100000" kx="0" ky="0" algn="bl" rotWithShape="0" blurRad="114300" dist="38100" dir="5400000">
-              <a:srgbClr val="0F172A">
-                <a:alpha val="14000"/>
-              </a:srgbClr>
-            </a:outerShdw>
-          </a:effectLst>
-        </p:spPr>
-      </p:sp>
-      <p:sp>
-        <p:nvSpPr>
-          <p:cNvPr id="26" name="Text 24"/>
-          <p:cNvSpPr/>
-          <p:nvPr/>
-        </p:nvSpPr>
-        <p:spPr>
-          <a:xfrm>
-            <a:off x="960120" y="5760720"/>
-            <a:ext cx="914400" cy="548640"/>
-          </a:xfrm>
-          <a:prstGeom prst="rect">
-            <a:avLst/>
-          </a:prstGeom>
-          <a:noFill/>
-          <a:ln/>
-        </p:spPr>
-        <p:txBody>
-          <a:bodyPr wrap="square" lIns="0" tIns="0" rIns="0" bIns="0" rtlCol="0" anchor="ctr"/>
-          <a:lstStyle/>
-          <a:p>
-            <a:pPr indent="0" marL="0">
-              <a:buNone/>
-            </a:pPr>
-            <a:r>
-              <a:rPr lang="en-US" sz="1700" b="1" dirty="0">
-                <a:solidFill>
-                  <a:srgbClr val="1E293B"/>
-                </a:solidFill>
-                <a:latin typeface="Cambria" pitchFamily="34" charset="0"/>
-                <a:ea typeface="Cambria" pitchFamily="34" charset="-122"/>
-                <a:cs typeface="Cambria" pitchFamily="34" charset="-120"/>
-              </a:rPr>
-              <a:t>A12</a:t>
-            </a:r>
-            <a:endParaRPr lang="en-US" sz="1700" dirty="0"/>
-          </a:p>
-        </p:txBody>
-      </p:sp>
-      <p:sp>
-        <p:nvSpPr>
-          <p:cNvPr id="27" name="Text 25"/>
-          <p:cNvSpPr/>
-          <p:nvPr/>
-        </p:nvSpPr>
-        <p:spPr>
-          <a:xfrm>
-            <a:off x="1920240" y="5760720"/>
-            <a:ext cx="914400" cy="548640"/>
-          </a:xfrm>
-          <a:prstGeom prst="rect">
-            <a:avLst/>
-          </a:prstGeom>
-          <a:noFill/>
-          <a:ln/>
-        </p:spPr>
-        <p:txBody>
-          <a:bodyPr wrap="square" lIns="0" tIns="0" rIns="0" bIns="0" rtlCol="0" anchor="ctr"/>
-          <a:lstStyle/>
-          <a:p>
-            <a:pPr indent="0" marL="0">
-              <a:buNone/>
-            </a:pPr>
-            <a:r>
-              <a:rPr lang="en-US" sz="1300" dirty="0">
-                <a:solidFill>
-                  <a:srgbClr val="64748B"/>
-                </a:solidFill>
-                <a:latin typeface="Calibri" pitchFamily="34" charset="0"/>
-                <a:ea typeface="Calibri" pitchFamily="34" charset="-122"/>
-                <a:cs typeface="Calibri" pitchFamily="34" charset="-120"/>
-              </a:rPr>
-              <a:t>up</a:t>
-            </a:r>
-            <a:endParaRPr lang="en-US" sz="1300" dirty="0"/>
-          </a:p>
-        </p:txBody>
-      </p:sp>
-      <p:sp>
-        <p:nvSpPr>
-          <p:cNvPr id="28" name="Text 26"/>
-          <p:cNvSpPr/>
-          <p:nvPr/>
-        </p:nvSpPr>
-        <p:spPr>
-          <a:xfrm>
-            <a:off x="3017520" y="5760720"/>
-            <a:ext cx="2743200" cy="548640"/>
-          </a:xfrm>
-          <a:prstGeom prst="rect">
-            <a:avLst/>
-          </a:prstGeom>
-          <a:noFill/>
-          <a:ln/>
-        </p:spPr>
-        <p:txBody>
-          <a:bodyPr wrap="square" lIns="0" tIns="0" rIns="0" bIns="0" rtlCol="0" anchor="ctr"/>
-          <a:lstStyle/>
-          <a:p>
-            <a:pPr indent="0" marL="0">
-              <a:buNone/>
-            </a:pPr>
-            <a:r>
-              <a:rPr lang="en-US" sz="1350" dirty="0">
-                <a:solidFill>
-                  <a:srgbClr val="1E293B"/>
-                </a:solidFill>
-                <a:latin typeface="Calibri" pitchFamily="34" charset="0"/>
-                <a:ea typeface="Calibri" pitchFamily="34" charset="-122"/>
-                <a:cs typeface="Calibri" pitchFamily="34" charset="-120"/>
-              </a:rPr>
-              <a:t>—</a:t>
-            </a:r>
-            <a:endParaRPr lang="en-US" sz="1350" dirty="0"/>
-          </a:p>
-        </p:txBody>
-      </p:sp>
-      <p:sp>
-        <p:nvSpPr>
-          <p:cNvPr id="29" name="Text 27"/>
-          <p:cNvSpPr/>
-          <p:nvPr/>
-        </p:nvSpPr>
-        <p:spPr>
-          <a:xfrm>
-            <a:off x="5943600" y="5760720"/>
-            <a:ext cx="5303520" cy="548640"/>
-          </a:xfrm>
-          <a:prstGeom prst="rect">
-            <a:avLst/>
-          </a:prstGeom>
-          <a:noFill/>
-          <a:ln/>
-        </p:spPr>
-        <p:txBody>
-          <a:bodyPr wrap="square" lIns="0" tIns="0" rIns="0" bIns="0" rtlCol="0" anchor="ctr"/>
-          <a:lstStyle/>
-          <a:p>
-            <a:pPr indent="0" marL="0">
-              <a:buNone/>
-            </a:pPr>
-            <a:r>
-              <a:rPr lang="en-US" sz="1300" b="1" dirty="0">
-                <a:solidFill>
-                  <a:srgbClr val="DC2626"/>
-                </a:solidFill>
-                <a:latin typeface="Calibri" pitchFamily="34" charset="0"/>
-                <a:ea typeface="Calibri" pitchFamily="34" charset="-122"/>
-                <a:cs typeface="Calibri" pitchFamily="34" charset="-120"/>
-              </a:rPr>
-              <a:t>ECoG electrode dead (2.8 µV)</a:t>
-            </a:r>
-            <a:endParaRPr lang="en-US" sz="1300" dirty="0"/>
-          </a:p>
-        </p:txBody>
-      </p:sp>
-      <p:sp>
-        <p:nvSpPr>
-          <p:cNvPr id="30" name="Shape 28"/>
-          <p:cNvSpPr/>
-          <p:nvPr/>
-        </p:nvSpPr>
-        <p:spPr>
-          <a:xfrm>
-            <a:off x="640080" y="6537960"/>
-            <a:ext cx="10881360" cy="0"/>
-          </a:xfrm>
-          <a:prstGeom prst="roundRect">
-            <a:avLst>
-              <a:gd name="adj" fmla="val Infinity"/>
-            </a:avLst>
-          </a:prstGeom>
-          <a:solidFill>
-            <a:srgbClr val="FFFFFF"/>
-          </a:solidFill>
-          <a:ln w="12700">
-            <a:solidFill>
-              <a:srgbClr val="E2E8F0"/>
-            </a:solidFill>
-            <a:prstDash val="solid"/>
-          </a:ln>
-          <a:effectLst>
-            <a:outerShdw sx="100000" sy="100000" kx="0" ky="0" algn="bl" rotWithShape="0" blurRad="114300" dist="38100" dir="5400000">
-              <a:srgbClr val="0F172A">
-                <a:alpha val="14000"/>
-              </a:srgbClr>
-            </a:outerShdw>
-          </a:effectLst>
-        </p:spPr>
-      </p:sp>
-      <p:sp>
-        <p:nvSpPr>
-          <p:cNvPr id="31" name="Text 29"/>
-          <p:cNvSpPr/>
-          <p:nvPr/>
-        </p:nvSpPr>
-        <p:spPr>
-          <a:xfrm>
-            <a:off x="658368" y="6492240"/>
-            <a:ext cx="10881360" cy="365760"/>
-          </a:xfrm>
-          <a:prstGeom prst="rect">
-            <a:avLst/>
-          </a:prstGeom>
-          <a:noFill/>
-          <a:ln/>
-        </p:spPr>
-        <p:txBody>
-          <a:bodyPr wrap="square" lIns="0" tIns="0" rIns="0" bIns="0" rtlCol="0" anchor="ctr"/>
-          <a:lstStyle/>
-          <a:p>
-            <a:pPr indent="0" marL="0">
-              <a:buNone/>
-            </a:pPr>
-            <a:r>
-              <a:rPr lang="en-US" sz="1300" b="1" i="1" dirty="0">
-                <a:solidFill>
-                  <a:srgbClr val="6D28D9"/>
-                </a:solidFill>
-                <a:latin typeface="Calibri" pitchFamily="34" charset="0"/>
-                <a:ea typeface="Calibri" pitchFamily="34" charset="-122"/>
-                <a:cs typeface="Calibri" pitchFamily="34" charset="-120"/>
-              </a:rPr>
-              <a:t>So the up group is capped at two. The down group can still grow — 7, 8, 13, 14, 15 are ready to download.</a:t>
-            </a:r>
-            <a:endParaRPr lang="en-US" sz="1300" dirty="0"/>
+              <a:t>between learning and the change in coupling. The two successes gained coupling; the two failures didn't.</a:t>
+            </a:r>
+            <a:endParaRPr lang="en-US" sz="1250" dirty="0"/>
+          </a:p>
+        </p:txBody>
+      </p:sp>
+      <p:sp>
+        <p:nvSpPr>
+          <p:cNvPr id="10" name="Text 7"/>
+          <p:cNvSpPr/>
+          <p:nvPr/>
+        </p:nvSpPr>
+        <p:spPr>
+          <a:xfrm>
+            <a:off x="7863840" y="5394960"/>
+            <a:ext cx="3429000" cy="320040"/>
+          </a:xfrm>
+          <a:prstGeom prst="rect">
+            <a:avLst/>
+          </a:prstGeom>
+          <a:noFill/>
+          <a:ln/>
+        </p:spPr>
+        <p:txBody>
+          <a:bodyPr wrap="square" lIns="0" tIns="0" rIns="0" bIns="0" rtlCol="0" anchor="ctr"/>
+          <a:lstStyle/>
+          <a:p>
+            <a:pPr indent="0" marL="0">
+              <a:buNone/>
+            </a:pPr>
+            <a:r>
+              <a:rPr lang="en-US" sz="1200" b="1" i="1" dirty="0">
+                <a:solidFill>
+                  <a:srgbClr val="D97706"/>
+                </a:solidFill>
+                <a:latin typeface="Calibri" pitchFamily="34" charset="0"/>
+                <a:ea typeface="Calibri" pitchFamily="34" charset="-122"/>
+                <a:cs typeface="Calibri" pitchFamily="34" charset="-120"/>
+              </a:rPr>
+              <a:t>n = 5, so not significant yet.</a:t>
+            </a:r>
+            <a:endParaRPr lang="en-US" sz="1200" dirty="0"/>
           </a:p>
         </p:txBody>
       </p:sp>
@@ -6469,13 +7409,13 @@
             <a:r>
               <a:rPr lang="en-US" sz="1200" b="1" spc="300" kern="0" dirty="0">
                 <a:solidFill>
-                  <a:srgbClr val="6D28D9"/>
-                </a:solidFill>
-                <a:latin typeface="Calibri" pitchFamily="34" charset="0"/>
-                <a:ea typeface="Calibri" pitchFamily="34" charset="-122"/>
-                <a:cs typeface="Calibri" pitchFamily="34" charset="-120"/>
-              </a:rPr>
-              <a:t>NEW THIS WEEK · DELIVERABLES</a:t>
+                  <a:srgbClr val="D97706"/>
+                </a:solidFill>
+                <a:latin typeface="Calibri" pitchFamily="34" charset="0"/>
+                <a:ea typeface="Calibri" pitchFamily="34" charset="-122"/>
+                <a:cs typeface="Calibri" pitchFamily="34" charset="-120"/>
+              </a:rPr>
+              <a:t>NEW FINDING · A CONSTRAINT</a:t>
             </a:r>
             <a:endParaRPr lang="en-US" sz="1200" dirty="0"/>
           </a:p>
@@ -6514,7 +7454,7 @@
                 <a:ea typeface="Cambria" pitchFamily="34" charset="-122"/>
                 <a:cs typeface="Cambria" pitchFamily="34" charset="-120"/>
               </a:rPr>
-              <a:t>Everything now lives in one place</a:t>
+              <a:t>A constraint worth knowing early</a:t>
             </a:r>
             <a:endParaRPr lang="en-US" sz="2800" dirty="0"/>
           </a:p>
@@ -6528,8 +7468,8 @@
         </p:nvSpPr>
         <p:spPr>
           <a:xfrm>
-            <a:off x="640080" y="1627632"/>
-            <a:ext cx="10881360" cy="502920"/>
+            <a:off x="640080" y="1645920"/>
+            <a:ext cx="10881360" cy="548640"/>
           </a:xfrm>
           <a:prstGeom prst="rect">
             <a:avLst/>
@@ -6553,7 +7493,7 @@
                 <a:ea typeface="Calibri" pitchFamily="34" charset="-122"/>
                 <a:cs typeface="Calibri" pitchFamily="34" charset="-120"/>
               </a:rPr>
-              <a:t>We put the project behind a single page so the code, the write-up and the slides stay in sync and are easy to hand to anyone.</a:t>
+              <a:t>Using the reward criterion as a success readout across every animal's log — the same trick that found animals 3 and 4:</a:t>
             </a:r>
             <a:endParaRPr lang="en-US" sz="1450" dirty="0"/>
           </a:p>
@@ -6567,12 +7507,12 @@
         </p:nvSpPr>
         <p:spPr>
           <a:xfrm>
-            <a:off x="640080" y="2286000"/>
-            <a:ext cx="3538728" cy="3200400"/>
+            <a:off x="640080" y="2377440"/>
+            <a:ext cx="10881360" cy="731520"/>
           </a:xfrm>
           <a:prstGeom prst="roundRect">
             <a:avLst>
-              <a:gd name="adj" fmla="val 2571"/>
+              <a:gd name="adj" fmla="val 11250"/>
             </a:avLst>
           </a:prstGeom>
           <a:solidFill>
@@ -6601,63 +7541,24 @@
         </p:nvSpPr>
         <p:spPr>
           <a:xfrm>
-            <a:off x="914400" y="2514600"/>
-            <a:ext cx="3017520" cy="274320"/>
-          </a:xfrm>
-          <a:prstGeom prst="rect">
-            <a:avLst/>
-          </a:prstGeom>
-          <a:noFill/>
-          <a:ln/>
-        </p:spPr>
-        <p:txBody>
-          <a:bodyPr wrap="square" lIns="0" tIns="0" rIns="0" bIns="0" rtlCol="0" anchor="ctr"/>
-          <a:lstStyle/>
-          <a:p>
-            <a:pPr indent="0" marL="0">
-              <a:buNone/>
-            </a:pPr>
-            <a:r>
-              <a:rPr lang="en-US" sz="1100" b="1" spc="200" kern="0" dirty="0">
-                <a:solidFill>
-                  <a:srgbClr val="6D28D9"/>
-                </a:solidFill>
-                <a:latin typeface="Calibri" pitchFamily="34" charset="0"/>
-                <a:ea typeface="Calibri" pitchFamily="34" charset="-122"/>
-                <a:cs typeface="Calibri" pitchFamily="34" charset="-120"/>
-              </a:rPr>
-              <a:t>REPOSITORY</a:t>
-            </a:r>
-            <a:endParaRPr lang="en-US" sz="1100" dirty="0"/>
-          </a:p>
-        </p:txBody>
-      </p:sp>
-      <p:sp>
-        <p:nvSpPr>
-          <p:cNvPr id="7" name="Text 5"/>
-          <p:cNvSpPr/>
-          <p:nvPr/>
-        </p:nvSpPr>
-        <p:spPr>
-          <a:xfrm>
-            <a:off x="914400" y="2834640"/>
-            <a:ext cx="3017520" cy="457200"/>
-          </a:xfrm>
-          <a:prstGeom prst="rect">
-            <a:avLst/>
-          </a:prstGeom>
-          <a:noFill/>
-          <a:ln/>
-        </p:spPr>
-        <p:txBody>
-          <a:bodyPr wrap="square" lIns="0" tIns="0" rIns="0" bIns="0" rtlCol="0" anchor="ctr"/>
-          <a:lstStyle/>
-          <a:p>
-            <a:pPr indent="0" marL="0">
-              <a:buNone/>
-            </a:pPr>
-            <a:r>
-              <a:rPr lang="en-US" sz="1900" b="1" dirty="0">
+            <a:off x="960120" y="2468880"/>
+            <a:ext cx="914400" cy="548640"/>
+          </a:xfrm>
+          <a:prstGeom prst="rect">
+            <a:avLst/>
+          </a:prstGeom>
+          <a:noFill/>
+          <a:ln/>
+        </p:spPr>
+        <p:txBody>
+          <a:bodyPr wrap="square" lIns="0" tIns="0" rIns="0" bIns="0" rtlCol="0" anchor="ctr"/>
+          <a:lstStyle/>
+          <a:p>
+            <a:pPr indent="0" marL="0">
+              <a:buNone/>
+            </a:pPr>
+            <a:r>
+              <a:rPr lang="en-US" sz="1700" b="1" dirty="0">
                 <a:solidFill>
                   <a:srgbClr val="1E293B"/>
                 </a:solidFill>
@@ -6665,9 +7566,48 @@
                 <a:ea typeface="Cambria" pitchFamily="34" charset="-122"/>
                 <a:cs typeface="Cambria" pitchFamily="34" charset="-120"/>
               </a:rPr>
-              <a:t>The pipeline</a:t>
-            </a:r>
-            <a:endParaRPr lang="en-US" sz="1900" dirty="0"/>
+              <a:t>A3</a:t>
+            </a:r>
+            <a:endParaRPr lang="en-US" sz="1700" dirty="0"/>
+          </a:p>
+        </p:txBody>
+      </p:sp>
+      <p:sp>
+        <p:nvSpPr>
+          <p:cNvPr id="7" name="Text 5"/>
+          <p:cNvSpPr/>
+          <p:nvPr/>
+        </p:nvSpPr>
+        <p:spPr>
+          <a:xfrm>
+            <a:off x="1920240" y="2468880"/>
+            <a:ext cx="914400" cy="548640"/>
+          </a:xfrm>
+          <a:prstGeom prst="rect">
+            <a:avLst/>
+          </a:prstGeom>
+          <a:noFill/>
+          <a:ln/>
+        </p:spPr>
+        <p:txBody>
+          <a:bodyPr wrap="square" lIns="0" tIns="0" rIns="0" bIns="0" rtlCol="0" anchor="ctr"/>
+          <a:lstStyle/>
+          <a:p>
+            <a:pPr indent="0" marL="0">
+              <a:buNone/>
+            </a:pPr>
+            <a:r>
+              <a:rPr lang="en-US" sz="1300" dirty="0">
+                <a:solidFill>
+                  <a:srgbClr val="64748B"/>
+                </a:solidFill>
+                <a:latin typeface="Calibri" pitchFamily="34" charset="0"/>
+                <a:ea typeface="Calibri" pitchFamily="34" charset="-122"/>
+                <a:cs typeface="Calibri" pitchFamily="34" charset="-120"/>
+              </a:rPr>
+              <a:t>up</a:t>
+            </a:r>
+            <a:endParaRPr lang="en-US" sz="1300" dirty="0"/>
           </a:p>
         </p:txBody>
       </p:sp>
@@ -6679,37 +7619,34 @@
         </p:nvSpPr>
         <p:spPr>
           <a:xfrm>
-            <a:off x="914400" y="3383280"/>
-            <a:ext cx="3063240" cy="1463040"/>
-          </a:xfrm>
-          <a:prstGeom prst="rect">
-            <a:avLst/>
-          </a:prstGeom>
-          <a:noFill/>
-          <a:ln/>
-        </p:spPr>
-        <p:txBody>
-          <a:bodyPr wrap="square" lIns="0" tIns="0" rIns="0" bIns="0" rtlCol="0" anchor="ctr"/>
-          <a:lstStyle/>
-          <a:p>
-            <a:pPr indent="0" marL="0">
-              <a:lnSpc>
-                <a:spcPct val="106000"/>
-              </a:lnSpc>
-              <a:buNone/>
-            </a:pPr>
-            <a:r>
-              <a:rPr lang="en-US" sz="1250" dirty="0">
-                <a:solidFill>
-                  <a:srgbClr val="64748B"/>
-                </a:solidFill>
-                <a:latin typeface="Calibri" pitchFamily="34" charset="0"/>
-                <a:ea typeface="Calibri" pitchFamily="34" charset="-122"/>
-                <a:cs typeface="Calibri" pitchFamily="34" charset="-120"/>
-              </a:rPr>
-              <a:t>Decoding, the pooled autoencoder, every control, per-animal results. One command per animal, reproducible end to end.</a:t>
-            </a:r>
-            <a:endParaRPr lang="en-US" sz="1250" dirty="0"/>
+            <a:off x="3017520" y="2468880"/>
+            <a:ext cx="2743200" cy="548640"/>
+          </a:xfrm>
+          <a:prstGeom prst="rect">
+            <a:avLst/>
+          </a:prstGeom>
+          <a:noFill/>
+          <a:ln/>
+        </p:spPr>
+        <p:txBody>
+          <a:bodyPr wrap="square" lIns="0" tIns="0" rIns="0" bIns="0" rtlCol="0" anchor="ctr"/>
+          <a:lstStyle/>
+          <a:p>
+            <a:pPr indent="0" marL="0">
+              <a:buNone/>
+            </a:pPr>
+            <a:r>
+              <a:rPr lang="en-US" sz="1350" dirty="0">
+                <a:solidFill>
+                  <a:srgbClr val="1E293B"/>
+                </a:solidFill>
+                <a:latin typeface="Calibri" pitchFamily="34" charset="0"/>
+                <a:ea typeface="Calibri" pitchFamily="34" charset="-122"/>
+                <a:cs typeface="Calibri" pitchFamily="34" charset="-120"/>
+              </a:rPr>
+              <a:t>RW  90 → 190</a:t>
+            </a:r>
+            <a:endParaRPr lang="en-US" sz="1350" dirty="0"/>
           </a:p>
         </p:txBody>
       </p:sp>
@@ -6721,34 +7658,34 @@
         </p:nvSpPr>
         <p:spPr>
           <a:xfrm>
-            <a:off x="914400" y="4983480"/>
-            <a:ext cx="3063240" cy="365760"/>
-          </a:xfrm>
-          <a:prstGeom prst="rect">
-            <a:avLst/>
-          </a:prstGeom>
-          <a:noFill/>
-          <a:ln/>
-        </p:spPr>
-        <p:txBody>
-          <a:bodyPr wrap="square" lIns="0" tIns="0" rIns="0" bIns="0" rtlCol="0" anchor="ctr"/>
-          <a:lstStyle/>
-          <a:p>
-            <a:pPr indent="0" marL="0">
-              <a:buNone/>
-            </a:pPr>
-            <a:r>
-              <a:rPr lang="en-US" sz="1050" i="1" dirty="0">
-                <a:solidFill>
-                  <a:srgbClr val="6D28D9"/>
-                </a:solidFill>
-                <a:latin typeface="Calibri" pitchFamily="34" charset="0"/>
-                <a:ea typeface="Calibri" pitchFamily="34" charset="-122"/>
-                <a:cs typeface="Calibri" pitchFamily="34" charset="-120"/>
-              </a:rPr>
-              <a:t>github.com/switchrao777/hroc-ncan</a:t>
-            </a:r>
-            <a:endParaRPr lang="en-US" sz="1050" dirty="0"/>
+            <a:off x="5943600" y="2468880"/>
+            <a:ext cx="5303520" cy="548640"/>
+          </a:xfrm>
+          <a:prstGeom prst="rect">
+            <a:avLst/>
+          </a:prstGeom>
+          <a:noFill/>
+          <a:ln/>
+        </p:spPr>
+        <p:txBody>
+          <a:bodyPr wrap="square" lIns="0" tIns="0" rIns="0" bIns="0" rtlCol="0" anchor="ctr"/>
+          <a:lstStyle/>
+          <a:p>
+            <a:pPr indent="0" marL="0">
+              <a:buNone/>
+            </a:pPr>
+            <a:r>
+              <a:rPr lang="en-US" sz="1300" b="1" dirty="0">
+                <a:solidFill>
+                  <a:srgbClr val="16A34A"/>
+                </a:solidFill>
+                <a:latin typeface="Calibri" pitchFamily="34" charset="0"/>
+                <a:ea typeface="Calibri" pitchFamily="34" charset="-122"/>
+                <a:cs typeface="Calibri" pitchFamily="34" charset="-120"/>
+              </a:rPr>
+              <a:t>bar raised — learned</a:t>
+            </a:r>
+            <a:endParaRPr lang="en-US" sz="1300" dirty="0"/>
           </a:p>
         </p:txBody>
       </p:sp>
@@ -6760,12 +7697,12 @@
         </p:nvSpPr>
         <p:spPr>
           <a:xfrm>
-            <a:off x="4370832" y="2286000"/>
-            <a:ext cx="3538728" cy="3200400"/>
+            <a:off x="640080" y="3200400"/>
+            <a:ext cx="10881360" cy="731520"/>
           </a:xfrm>
           <a:prstGeom prst="roundRect">
             <a:avLst>
-              <a:gd name="adj" fmla="val 2571"/>
+              <a:gd name="adj" fmla="val 11250"/>
             </a:avLst>
           </a:prstGeom>
           <a:solidFill>
@@ -6794,63 +7731,24 @@
         </p:nvSpPr>
         <p:spPr>
           <a:xfrm>
-            <a:off x="4645152" y="2514600"/>
-            <a:ext cx="3017520" cy="274320"/>
-          </a:xfrm>
-          <a:prstGeom prst="rect">
-            <a:avLst/>
-          </a:prstGeom>
-          <a:noFill/>
-          <a:ln/>
-        </p:spPr>
-        <p:txBody>
-          <a:bodyPr wrap="square" lIns="0" tIns="0" rIns="0" bIns="0" rtlCol="0" anchor="ctr"/>
-          <a:lstStyle/>
-          <a:p>
-            <a:pPr indent="0" marL="0">
-              <a:buNone/>
-            </a:pPr>
-            <a:r>
-              <a:rPr lang="en-US" sz="1100" b="1" spc="200" kern="0" dirty="0">
-                <a:solidFill>
-                  <a:srgbClr val="0D9488"/>
-                </a:solidFill>
-                <a:latin typeface="Calibri" pitchFamily="34" charset="0"/>
-                <a:ea typeface="Calibri" pitchFamily="34" charset="-122"/>
-                <a:cs typeface="Calibri" pitchFamily="34" charset="-120"/>
-              </a:rPr>
-              <a:t>REPORT</a:t>
-            </a:r>
-            <a:endParaRPr lang="en-US" sz="1100" dirty="0"/>
-          </a:p>
-        </p:txBody>
-      </p:sp>
-      <p:sp>
-        <p:nvSpPr>
-          <p:cNvPr id="12" name="Text 10"/>
-          <p:cNvSpPr/>
-          <p:nvPr/>
-        </p:nvSpPr>
-        <p:spPr>
-          <a:xfrm>
-            <a:off x="4645152" y="2834640"/>
-            <a:ext cx="3017520" cy="457200"/>
-          </a:xfrm>
-          <a:prstGeom prst="rect">
-            <a:avLst/>
-          </a:prstGeom>
-          <a:noFill/>
-          <a:ln/>
-        </p:spPr>
-        <p:txBody>
-          <a:bodyPr wrap="square" lIns="0" tIns="0" rIns="0" bIns="0" rtlCol="0" anchor="ctr"/>
-          <a:lstStyle/>
-          <a:p>
-            <a:pPr indent="0" marL="0">
-              <a:buNone/>
-            </a:pPr>
-            <a:r>
-              <a:rPr lang="en-US" sz="1900" b="1" dirty="0">
+            <a:off x="960120" y="3291840"/>
+            <a:ext cx="914400" cy="548640"/>
+          </a:xfrm>
+          <a:prstGeom prst="rect">
+            <a:avLst/>
+          </a:prstGeom>
+          <a:noFill/>
+          <a:ln/>
+        </p:spPr>
+        <p:txBody>
+          <a:bodyPr wrap="square" lIns="0" tIns="0" rIns="0" bIns="0" rtlCol="0" anchor="ctr"/>
+          <a:lstStyle/>
+          <a:p>
+            <a:pPr indent="0" marL="0">
+              <a:buNone/>
+            </a:pPr>
+            <a:r>
+              <a:rPr lang="en-US" sz="1700" b="1" dirty="0">
                 <a:solidFill>
                   <a:srgbClr val="1E293B"/>
                 </a:solidFill>
@@ -6858,9 +7756,48 @@
                 <a:ea typeface="Cambria" pitchFamily="34" charset="-122"/>
                 <a:cs typeface="Cambria" pitchFamily="34" charset="-120"/>
               </a:rPr>
-              <a:t>Six-page write-up</a:t>
-            </a:r>
-            <a:endParaRPr lang="en-US" sz="1900" dirty="0"/>
+              <a:t>A4</a:t>
+            </a:r>
+            <a:endParaRPr lang="en-US" sz="1700" dirty="0"/>
+          </a:p>
+        </p:txBody>
+      </p:sp>
+      <p:sp>
+        <p:nvSpPr>
+          <p:cNvPr id="12" name="Text 10"/>
+          <p:cNvSpPr/>
+          <p:nvPr/>
+        </p:nvSpPr>
+        <p:spPr>
+          <a:xfrm>
+            <a:off x="1920240" y="3291840"/>
+            <a:ext cx="914400" cy="548640"/>
+          </a:xfrm>
+          <a:prstGeom prst="rect">
+            <a:avLst/>
+          </a:prstGeom>
+          <a:noFill/>
+          <a:ln/>
+        </p:spPr>
+        <p:txBody>
+          <a:bodyPr wrap="square" lIns="0" tIns="0" rIns="0" bIns="0" rtlCol="0" anchor="ctr"/>
+          <a:lstStyle/>
+          <a:p>
+            <a:pPr indent="0" marL="0">
+              <a:buNone/>
+            </a:pPr>
+            <a:r>
+              <a:rPr lang="en-US" sz="1300" dirty="0">
+                <a:solidFill>
+                  <a:srgbClr val="64748B"/>
+                </a:solidFill>
+                <a:latin typeface="Calibri" pitchFamily="34" charset="0"/>
+                <a:ea typeface="Calibri" pitchFamily="34" charset="-122"/>
+                <a:cs typeface="Calibri" pitchFamily="34" charset="-120"/>
+              </a:rPr>
+              <a:t>up</a:t>
+            </a:r>
+            <a:endParaRPr lang="en-US" sz="1300" dirty="0"/>
           </a:p>
         </p:txBody>
       </p:sp>
@@ -6872,37 +7809,34 @@
         </p:nvSpPr>
         <p:spPr>
           <a:xfrm>
-            <a:off x="4645152" y="3383280"/>
-            <a:ext cx="3063240" cy="1463040"/>
-          </a:xfrm>
-          <a:prstGeom prst="rect">
-            <a:avLst/>
-          </a:prstGeom>
-          <a:noFill/>
-          <a:ln/>
-        </p:spPr>
-        <p:txBody>
-          <a:bodyPr wrap="square" lIns="0" tIns="0" rIns="0" bIns="0" rtlCol="0" anchor="ctr"/>
-          <a:lstStyle/>
-          <a:p>
-            <a:pPr indent="0" marL="0">
-              <a:lnSpc>
-                <a:spcPct val="106000"/>
-              </a:lnSpc>
-              <a:buNone/>
-            </a:pPr>
-            <a:r>
-              <a:rPr lang="en-US" sz="1250" dirty="0">
-                <a:solidFill>
-                  <a:srgbClr val="64748B"/>
-                </a:solidFill>
-                <a:latin typeface="Calibri" pitchFamily="34" charset="0"/>
-                <a:ea typeface="Calibri" pitchFamily="34" charset="-122"/>
-                <a:cs typeface="Calibri" pitchFamily="34" charset="-120"/>
-              </a:rPr>
-              <a:t>Background, methods, results, limitations, references — with the four figures and the real numbers. Formatted as a handout.</a:t>
-            </a:r>
-            <a:endParaRPr lang="en-US" sz="1250" dirty="0"/>
+            <a:off x="3017520" y="3291840"/>
+            <a:ext cx="2743200" cy="548640"/>
+          </a:xfrm>
+          <a:prstGeom prst="rect">
+            <a:avLst/>
+          </a:prstGeom>
+          <a:noFill/>
+          <a:ln/>
+        </p:spPr>
+        <p:txBody>
+          <a:bodyPr wrap="square" lIns="0" tIns="0" rIns="0" bIns="0" rtlCol="0" anchor="ctr"/>
+          <a:lstStyle/>
+          <a:p>
+            <a:pPr indent="0" marL="0">
+              <a:buNone/>
+            </a:pPr>
+            <a:r>
+              <a:rPr lang="en-US" sz="1350" dirty="0">
+                <a:solidFill>
+                  <a:srgbClr val="1E293B"/>
+                </a:solidFill>
+                <a:latin typeface="Calibri" pitchFamily="34" charset="0"/>
+                <a:ea typeface="Calibri" pitchFamily="34" charset="-122"/>
+                <a:cs typeface="Calibri" pitchFamily="34" charset="-120"/>
+              </a:rPr>
+              <a:t>RW 150 → 220</a:t>
+            </a:r>
+            <a:endParaRPr lang="en-US" sz="1350" dirty="0"/>
           </a:p>
         </p:txBody>
       </p:sp>
@@ -6914,34 +7848,34 @@
         </p:nvSpPr>
         <p:spPr>
           <a:xfrm>
-            <a:off x="4645152" y="4983480"/>
-            <a:ext cx="3063240" cy="365760"/>
-          </a:xfrm>
-          <a:prstGeom prst="rect">
-            <a:avLst/>
-          </a:prstGeom>
-          <a:noFill/>
-          <a:ln/>
-        </p:spPr>
-        <p:txBody>
-          <a:bodyPr wrap="square" lIns="0" tIns="0" rIns="0" bIns="0" rtlCol="0" anchor="ctr"/>
-          <a:lstStyle/>
-          <a:p>
-            <a:pPr indent="0" marL="0">
-              <a:buNone/>
-            </a:pPr>
-            <a:r>
-              <a:rPr lang="en-US" sz="1050" i="1" dirty="0">
-                <a:solidFill>
-                  <a:srgbClr val="0D9488"/>
-                </a:solidFill>
-                <a:latin typeface="Calibri" pitchFamily="34" charset="0"/>
-                <a:ea typeface="Calibri" pitchFamily="34" charset="-122"/>
-                <a:cs typeface="Calibri" pitchFamily="34" charset="-120"/>
-              </a:rPr>
-              <a:t>docs/HROC_Report.pdf</a:t>
-            </a:r>
-            <a:endParaRPr lang="en-US" sz="1050" dirty="0"/>
+            <a:off x="5943600" y="3291840"/>
+            <a:ext cx="5303520" cy="548640"/>
+          </a:xfrm>
+          <a:prstGeom prst="rect">
+            <a:avLst/>
+          </a:prstGeom>
+          <a:noFill/>
+          <a:ln/>
+        </p:spPr>
+        <p:txBody>
+          <a:bodyPr wrap="square" lIns="0" tIns="0" rIns="0" bIns="0" rtlCol="0" anchor="ctr"/>
+          <a:lstStyle/>
+          <a:p>
+            <a:pPr indent="0" marL="0">
+              <a:buNone/>
+            </a:pPr>
+            <a:r>
+              <a:rPr lang="en-US" sz="1300" b="1" dirty="0">
+                <a:solidFill>
+                  <a:srgbClr val="16A34A"/>
+                </a:solidFill>
+                <a:latin typeface="Calibri" pitchFamily="34" charset="0"/>
+                <a:ea typeface="Calibri" pitchFamily="34" charset="-122"/>
+                <a:cs typeface="Calibri" pitchFamily="34" charset="-120"/>
+              </a:rPr>
+              <a:t>bar raised — learned</a:t>
+            </a:r>
+            <a:endParaRPr lang="en-US" sz="1300" dirty="0"/>
           </a:p>
         </p:txBody>
       </p:sp>
@@ -6953,12 +7887,12 @@
         </p:nvSpPr>
         <p:spPr>
           <a:xfrm>
-            <a:off x="8101584" y="2286000"/>
-            <a:ext cx="3538728" cy="3200400"/>
+            <a:off x="640080" y="4023360"/>
+            <a:ext cx="10881360" cy="731520"/>
           </a:xfrm>
           <a:prstGeom prst="roundRect">
             <a:avLst>
-              <a:gd name="adj" fmla="val 2571"/>
+              <a:gd name="adj" fmla="val 11250"/>
             </a:avLst>
           </a:prstGeom>
           <a:solidFill>
@@ -6987,63 +7921,24 @@
         </p:nvSpPr>
         <p:spPr>
           <a:xfrm>
-            <a:off x="8375904" y="2514600"/>
-            <a:ext cx="3017520" cy="274320"/>
-          </a:xfrm>
-          <a:prstGeom prst="rect">
-            <a:avLst/>
-          </a:prstGeom>
-          <a:noFill/>
-          <a:ln/>
-        </p:spPr>
-        <p:txBody>
-          <a:bodyPr wrap="square" lIns="0" tIns="0" rIns="0" bIns="0" rtlCol="0" anchor="ctr"/>
-          <a:lstStyle/>
-          <a:p>
-            <a:pPr indent="0" marL="0">
-              <a:buNone/>
-            </a:pPr>
-            <a:r>
-              <a:rPr lang="en-US" sz="1100" b="1" spc="200" kern="0" dirty="0">
-                <a:solidFill>
-                  <a:srgbClr val="D97706"/>
-                </a:solidFill>
-                <a:latin typeface="Calibri" pitchFamily="34" charset="0"/>
-                <a:ea typeface="Calibri" pitchFamily="34" charset="-122"/>
-                <a:cs typeface="Calibri" pitchFamily="34" charset="-120"/>
-              </a:rPr>
-              <a:t>SLIDES</a:t>
-            </a:r>
-            <a:endParaRPr lang="en-US" sz="1100" dirty="0"/>
-          </a:p>
-        </p:txBody>
-      </p:sp>
-      <p:sp>
-        <p:nvSpPr>
-          <p:cNvPr id="17" name="Text 15"/>
-          <p:cNvSpPr/>
-          <p:nvPr/>
-        </p:nvSpPr>
-        <p:spPr>
-          <a:xfrm>
-            <a:off x="8375904" y="2834640"/>
-            <a:ext cx="3017520" cy="457200"/>
-          </a:xfrm>
-          <a:prstGeom prst="rect">
-            <a:avLst/>
-          </a:prstGeom>
-          <a:noFill/>
-          <a:ln/>
-        </p:spPr>
-        <p:txBody>
-          <a:bodyPr wrap="square" lIns="0" tIns="0" rIns="0" bIns="0" rtlCol="0" anchor="ctr"/>
-          <a:lstStyle/>
-          <a:p>
-            <a:pPr indent="0" marL="0">
-              <a:buNone/>
-            </a:pPr>
-            <a:r>
-              <a:rPr lang="en-US" sz="1900" b="1" dirty="0">
+            <a:off x="960120" y="4114800"/>
+            <a:ext cx="914400" cy="548640"/>
+          </a:xfrm>
+          <a:prstGeom prst="rect">
+            <a:avLst/>
+          </a:prstGeom>
+          <a:noFill/>
+          <a:ln/>
+        </p:spPr>
+        <p:txBody>
+          <a:bodyPr wrap="square" lIns="0" tIns="0" rIns="0" bIns="0" rtlCol="0" anchor="ctr"/>
+          <a:lstStyle/>
+          <a:p>
+            <a:pPr indent="0" marL="0">
+              <a:buNone/>
+            </a:pPr>
+            <a:r>
+              <a:rPr lang="en-US" sz="1700" b="1" dirty="0">
                 <a:solidFill>
                   <a:srgbClr val="1E293B"/>
                 </a:solidFill>
@@ -7051,9 +7946,48 @@
                 <a:ea typeface="Cambria" pitchFamily="34" charset="-122"/>
                 <a:cs typeface="Cambria" pitchFamily="34" charset="-120"/>
               </a:rPr>
-              <a:t>The decks</a:t>
-            </a:r>
-            <a:endParaRPr lang="en-US" sz="1900" dirty="0"/>
+              <a:t>A1</a:t>
+            </a:r>
+            <a:endParaRPr lang="en-US" sz="1700" dirty="0"/>
+          </a:p>
+        </p:txBody>
+      </p:sp>
+      <p:sp>
+        <p:nvSpPr>
+          <p:cNvPr id="17" name="Text 15"/>
+          <p:cNvSpPr/>
+          <p:nvPr/>
+        </p:nvSpPr>
+        <p:spPr>
+          <a:xfrm>
+            <a:off x="1920240" y="4114800"/>
+            <a:ext cx="914400" cy="548640"/>
+          </a:xfrm>
+          <a:prstGeom prst="rect">
+            <a:avLst/>
+          </a:prstGeom>
+          <a:noFill/>
+          <a:ln/>
+        </p:spPr>
+        <p:txBody>
+          <a:bodyPr wrap="square" lIns="0" tIns="0" rIns="0" bIns="0" rtlCol="0" anchor="ctr"/>
+          <a:lstStyle/>
+          <a:p>
+            <a:pPr indent="0" marL="0">
+              <a:buNone/>
+            </a:pPr>
+            <a:r>
+              <a:rPr lang="en-US" sz="1300" dirty="0">
+                <a:solidFill>
+                  <a:srgbClr val="64748B"/>
+                </a:solidFill>
+                <a:latin typeface="Calibri" pitchFamily="34" charset="0"/>
+                <a:ea typeface="Calibri" pitchFamily="34" charset="-122"/>
+                <a:cs typeface="Calibri" pitchFamily="34" charset="-120"/>
+              </a:rPr>
+              <a:t>up</a:t>
+            </a:r>
+            <a:endParaRPr lang="en-US" sz="1300" dirty="0"/>
           </a:p>
         </p:txBody>
       </p:sp>
@@ -7065,37 +7999,34 @@
         </p:nvSpPr>
         <p:spPr>
           <a:xfrm>
-            <a:off x="8375904" y="3383280"/>
-            <a:ext cx="3063240" cy="1463040"/>
-          </a:xfrm>
-          <a:prstGeom prst="rect">
-            <a:avLst/>
-          </a:prstGeom>
-          <a:noFill/>
-          <a:ln/>
-        </p:spPr>
-        <p:txBody>
-          <a:bodyPr wrap="square" lIns="0" tIns="0" rIns="0" bIns="0" rtlCol="0" anchor="ctr"/>
-          <a:lstStyle/>
-          <a:p>
-            <a:pPr indent="0" marL="0">
-              <a:lnSpc>
-                <a:spcPct val="106000"/>
-              </a:lnSpc>
-              <a:buNone/>
-            </a:pPr>
-            <a:r>
-              <a:rPr lang="en-US" sz="1250" dirty="0">
-                <a:solidFill>
-                  <a:srgbClr val="64748B"/>
-                </a:solidFill>
-                <a:latin typeface="Calibri" pitchFamily="34" charset="0"/>
-                <a:ea typeface="Calibri" pitchFamily="34" charset="-122"/>
-                <a:cs typeface="Calibri" pitchFamily="34" charset="-120"/>
-              </a:rPr>
-              <a:t>This update, the talk for your group, and speaker notes for each.</a:t>
-            </a:r>
-            <a:endParaRPr lang="en-US" sz="1250" dirty="0"/>
+            <a:off x="3017520" y="4114800"/>
+            <a:ext cx="2743200" cy="548640"/>
+          </a:xfrm>
+          <a:prstGeom prst="rect">
+            <a:avLst/>
+          </a:prstGeom>
+          <a:noFill/>
+          <a:ln/>
+        </p:spPr>
+        <p:txBody>
+          <a:bodyPr wrap="square" lIns="0" tIns="0" rIns="0" bIns="0" rtlCol="0" anchor="ctr"/>
+          <a:lstStyle/>
+          <a:p>
+            <a:pPr indent="0" marL="0">
+              <a:buNone/>
+            </a:pPr>
+            <a:r>
+              <a:rPr lang="en-US" sz="1350" dirty="0">
+                <a:solidFill>
+                  <a:srgbClr val="1E293B"/>
+                </a:solidFill>
+                <a:latin typeface="Calibri" pitchFamily="34" charset="0"/>
+                <a:ea typeface="Calibri" pitchFamily="34" charset="-122"/>
+                <a:cs typeface="Calibri" pitchFamily="34" charset="-120"/>
+              </a:rPr>
+              <a:t>RW 110 → 59</a:t>
+            </a:r>
+            <a:endParaRPr lang="en-US" sz="1350" dirty="0"/>
           </a:p>
         </p:txBody>
       </p:sp>
@@ -7107,34 +8038,34 @@
         </p:nvSpPr>
         <p:spPr>
           <a:xfrm>
-            <a:off x="8375904" y="4983480"/>
-            <a:ext cx="3063240" cy="365760"/>
-          </a:xfrm>
-          <a:prstGeom prst="rect">
-            <a:avLst/>
-          </a:prstGeom>
-          <a:noFill/>
-          <a:ln/>
-        </p:spPr>
-        <p:txBody>
-          <a:bodyPr wrap="square" lIns="0" tIns="0" rIns="0" bIns="0" rtlCol="0" anchor="ctr"/>
-          <a:lstStyle/>
-          <a:p>
-            <a:pPr indent="0" marL="0">
-              <a:buNone/>
-            </a:pPr>
-            <a:r>
-              <a:rPr lang="en-US" sz="1050" i="1" dirty="0">
-                <a:solidFill>
-                  <a:srgbClr val="D97706"/>
-                </a:solidFill>
-                <a:latin typeface="Calibri" pitchFamily="34" charset="0"/>
-                <a:ea typeface="Calibri" pitchFamily="34" charset="-122"/>
-                <a:cs typeface="Calibri" pitchFamily="34" charset="-120"/>
-              </a:rPr>
-              <a:t>slides/</a:t>
-            </a:r>
-            <a:endParaRPr lang="en-US" sz="1050" dirty="0"/>
+            <a:off x="5943600" y="4114800"/>
+            <a:ext cx="5303520" cy="548640"/>
+          </a:xfrm>
+          <a:prstGeom prst="rect">
+            <a:avLst/>
+          </a:prstGeom>
+          <a:noFill/>
+          <a:ln/>
+        </p:spPr>
+        <p:txBody>
+          <a:bodyPr wrap="square" lIns="0" tIns="0" rIns="0" bIns="0" rtlCol="0" anchor="ctr"/>
+          <a:lstStyle/>
+          <a:p>
+            <a:pPr indent="0" marL="0">
+              <a:buNone/>
+            </a:pPr>
+            <a:r>
+              <a:rPr lang="en-US" sz="1300" b="1" dirty="0">
+                <a:solidFill>
+                  <a:srgbClr val="DC2626"/>
+                </a:solidFill>
+                <a:latin typeface="Calibri" pitchFamily="34" charset="0"/>
+                <a:ea typeface="Calibri" pitchFamily="34" charset="-122"/>
+                <a:cs typeface="Calibri" pitchFamily="34" charset="-120"/>
+              </a:rPr>
+              <a:t>bar lowered — struggled</a:t>
+            </a:r>
+            <a:endParaRPr lang="en-US" sz="1300" dirty="0"/>
           </a:p>
         </p:txBody>
       </p:sp>
@@ -7146,16 +8077,16 @@
         </p:nvSpPr>
         <p:spPr>
           <a:xfrm>
-            <a:off x="640080" y="5715000"/>
-            <a:ext cx="10881360" cy="777240"/>
+            <a:off x="640080" y="4846320"/>
+            <a:ext cx="10881360" cy="731520"/>
           </a:xfrm>
           <a:prstGeom prst="roundRect">
             <a:avLst>
-              <a:gd name="adj" fmla="val 10588"/>
+              <a:gd name="adj" fmla="val 11250"/>
             </a:avLst>
           </a:prstGeom>
           <a:solidFill>
-            <a:srgbClr val="F5F3FF"/>
+            <a:srgbClr val="FFFFFF"/>
           </a:solidFill>
           <a:ln w="12700">
             <a:solidFill>
@@ -7180,8 +8111,125 @@
         </p:nvSpPr>
         <p:spPr>
           <a:xfrm>
-            <a:off x="960120" y="5852160"/>
-            <a:ext cx="10241280" cy="502920"/>
+            <a:off x="960120" y="4937760"/>
+            <a:ext cx="914400" cy="548640"/>
+          </a:xfrm>
+          <a:prstGeom prst="rect">
+            <a:avLst/>
+          </a:prstGeom>
+          <a:noFill/>
+          <a:ln/>
+        </p:spPr>
+        <p:txBody>
+          <a:bodyPr wrap="square" lIns="0" tIns="0" rIns="0" bIns="0" rtlCol="0" anchor="ctr"/>
+          <a:lstStyle/>
+          <a:p>
+            <a:pPr indent="0" marL="0">
+              <a:buNone/>
+            </a:pPr>
+            <a:r>
+              <a:rPr lang="en-US" sz="1700" b="1" dirty="0">
+                <a:solidFill>
+                  <a:srgbClr val="1E293B"/>
+                </a:solidFill>
+                <a:latin typeface="Cambria" pitchFamily="34" charset="0"/>
+                <a:ea typeface="Cambria" pitchFamily="34" charset="-122"/>
+                <a:cs typeface="Cambria" pitchFamily="34" charset="-120"/>
+              </a:rPr>
+              <a:t>A6</a:t>
+            </a:r>
+            <a:endParaRPr lang="en-US" sz="1700" dirty="0"/>
+          </a:p>
+        </p:txBody>
+      </p:sp>
+      <p:sp>
+        <p:nvSpPr>
+          <p:cNvPr id="22" name="Text 20"/>
+          <p:cNvSpPr/>
+          <p:nvPr/>
+        </p:nvSpPr>
+        <p:spPr>
+          <a:xfrm>
+            <a:off x="1920240" y="4937760"/>
+            <a:ext cx="914400" cy="548640"/>
+          </a:xfrm>
+          <a:prstGeom prst="rect">
+            <a:avLst/>
+          </a:prstGeom>
+          <a:noFill/>
+          <a:ln/>
+        </p:spPr>
+        <p:txBody>
+          <a:bodyPr wrap="square" lIns="0" tIns="0" rIns="0" bIns="0" rtlCol="0" anchor="ctr"/>
+          <a:lstStyle/>
+          <a:p>
+            <a:pPr indent="0" marL="0">
+              <a:buNone/>
+            </a:pPr>
+            <a:r>
+              <a:rPr lang="en-US" sz="1300" dirty="0">
+                <a:solidFill>
+                  <a:srgbClr val="64748B"/>
+                </a:solidFill>
+                <a:latin typeface="Calibri" pitchFamily="34" charset="0"/>
+                <a:ea typeface="Calibri" pitchFamily="34" charset="-122"/>
+                <a:cs typeface="Calibri" pitchFamily="34" charset="-120"/>
+              </a:rPr>
+              <a:t>up</a:t>
+            </a:r>
+            <a:endParaRPr lang="en-US" sz="1300" dirty="0"/>
+          </a:p>
+        </p:txBody>
+      </p:sp>
+      <p:sp>
+        <p:nvSpPr>
+          <p:cNvPr id="23" name="Text 21"/>
+          <p:cNvSpPr/>
+          <p:nvPr/>
+        </p:nvSpPr>
+        <p:spPr>
+          <a:xfrm>
+            <a:off x="3017520" y="4937760"/>
+            <a:ext cx="2743200" cy="548640"/>
+          </a:xfrm>
+          <a:prstGeom prst="rect">
+            <a:avLst/>
+          </a:prstGeom>
+          <a:noFill/>
+          <a:ln/>
+        </p:spPr>
+        <p:txBody>
+          <a:bodyPr wrap="square" lIns="0" tIns="0" rIns="0" bIns="0" rtlCol="0" anchor="ctr"/>
+          <a:lstStyle/>
+          <a:p>
+            <a:pPr indent="0" marL="0">
+              <a:buNone/>
+            </a:pPr>
+            <a:r>
+              <a:rPr lang="en-US" sz="1350" dirty="0">
+                <a:solidFill>
+                  <a:srgbClr val="1E293B"/>
+                </a:solidFill>
+                <a:latin typeface="Calibri" pitchFamily="34" charset="0"/>
+                <a:ea typeface="Calibri" pitchFamily="34" charset="-122"/>
+                <a:cs typeface="Calibri" pitchFamily="34" charset="-120"/>
+              </a:rPr>
+              <a:t>RW 150 → 80</a:t>
+            </a:r>
+            <a:endParaRPr lang="en-US" sz="1350" dirty="0"/>
+          </a:p>
+        </p:txBody>
+      </p:sp>
+      <p:sp>
+        <p:nvSpPr>
+          <p:cNvPr id="24" name="Text 22"/>
+          <p:cNvSpPr/>
+          <p:nvPr/>
+        </p:nvSpPr>
+        <p:spPr>
+          <a:xfrm>
+            <a:off x="5943600" y="4937760"/>
+            <a:ext cx="5303520" cy="548640"/>
           </a:xfrm>
           <a:prstGeom prst="rect">
             <a:avLst/>
@@ -7199,27 +8247,276 @@
             <a:r>
               <a:rPr lang="en-US" sz="1300" b="1" dirty="0">
                 <a:solidFill>
+                  <a:srgbClr val="DC2626"/>
+                </a:solidFill>
+                <a:latin typeface="Calibri" pitchFamily="34" charset="0"/>
+                <a:ea typeface="Calibri" pitchFamily="34" charset="-122"/>
+                <a:cs typeface="Calibri" pitchFamily="34" charset="-120"/>
+              </a:rPr>
+              <a:t>bar lowered — struggled</a:t>
+            </a:r>
+            <a:endParaRPr lang="en-US" sz="1300" dirty="0"/>
+          </a:p>
+        </p:txBody>
+      </p:sp>
+      <p:sp>
+        <p:nvSpPr>
+          <p:cNvPr id="25" name="Shape 23"/>
+          <p:cNvSpPr/>
+          <p:nvPr/>
+        </p:nvSpPr>
+        <p:spPr>
+          <a:xfrm>
+            <a:off x="640080" y="5669280"/>
+            <a:ext cx="10881360" cy="731520"/>
+          </a:xfrm>
+          <a:prstGeom prst="roundRect">
+            <a:avLst>
+              <a:gd name="adj" fmla="val 11250"/>
+            </a:avLst>
+          </a:prstGeom>
+          <a:solidFill>
+            <a:srgbClr val="FFFFFF"/>
+          </a:solidFill>
+          <a:ln w="12700">
+            <a:solidFill>
+              <a:srgbClr val="E2E8F0"/>
+            </a:solidFill>
+            <a:prstDash val="solid"/>
+          </a:ln>
+          <a:effectLst>
+            <a:outerShdw sx="100000" sy="100000" kx="0" ky="0" algn="bl" rotWithShape="0" blurRad="114300" dist="38100" dir="5400000">
+              <a:srgbClr val="0F172A">
+                <a:alpha val="14000"/>
+              </a:srgbClr>
+            </a:outerShdw>
+          </a:effectLst>
+        </p:spPr>
+      </p:sp>
+      <p:sp>
+        <p:nvSpPr>
+          <p:cNvPr id="26" name="Text 24"/>
+          <p:cNvSpPr/>
+          <p:nvPr/>
+        </p:nvSpPr>
+        <p:spPr>
+          <a:xfrm>
+            <a:off x="960120" y="5760720"/>
+            <a:ext cx="914400" cy="548640"/>
+          </a:xfrm>
+          <a:prstGeom prst="rect">
+            <a:avLst/>
+          </a:prstGeom>
+          <a:noFill/>
+          <a:ln/>
+        </p:spPr>
+        <p:txBody>
+          <a:bodyPr wrap="square" lIns="0" tIns="0" rIns="0" bIns="0" rtlCol="0" anchor="ctr"/>
+          <a:lstStyle/>
+          <a:p>
+            <a:pPr indent="0" marL="0">
+              <a:buNone/>
+            </a:pPr>
+            <a:r>
+              <a:rPr lang="en-US" sz="1700" b="1" dirty="0">
+                <a:solidFill>
+                  <a:srgbClr val="1E293B"/>
+                </a:solidFill>
+                <a:latin typeface="Cambria" pitchFamily="34" charset="0"/>
+                <a:ea typeface="Cambria" pitchFamily="34" charset="-122"/>
+                <a:cs typeface="Cambria" pitchFamily="34" charset="-120"/>
+              </a:rPr>
+              <a:t>A12</a:t>
+            </a:r>
+            <a:endParaRPr lang="en-US" sz="1700" dirty="0"/>
+          </a:p>
+        </p:txBody>
+      </p:sp>
+      <p:sp>
+        <p:nvSpPr>
+          <p:cNvPr id="27" name="Text 25"/>
+          <p:cNvSpPr/>
+          <p:nvPr/>
+        </p:nvSpPr>
+        <p:spPr>
+          <a:xfrm>
+            <a:off x="1920240" y="5760720"/>
+            <a:ext cx="914400" cy="548640"/>
+          </a:xfrm>
+          <a:prstGeom prst="rect">
+            <a:avLst/>
+          </a:prstGeom>
+          <a:noFill/>
+          <a:ln/>
+        </p:spPr>
+        <p:txBody>
+          <a:bodyPr wrap="square" lIns="0" tIns="0" rIns="0" bIns="0" rtlCol="0" anchor="ctr"/>
+          <a:lstStyle/>
+          <a:p>
+            <a:pPr indent="0" marL="0">
+              <a:buNone/>
+            </a:pPr>
+            <a:r>
+              <a:rPr lang="en-US" sz="1300" dirty="0">
+                <a:solidFill>
+                  <a:srgbClr val="64748B"/>
+                </a:solidFill>
+                <a:latin typeface="Calibri" pitchFamily="34" charset="0"/>
+                <a:ea typeface="Calibri" pitchFamily="34" charset="-122"/>
+                <a:cs typeface="Calibri" pitchFamily="34" charset="-120"/>
+              </a:rPr>
+              <a:t>up</a:t>
+            </a:r>
+            <a:endParaRPr lang="en-US" sz="1300" dirty="0"/>
+          </a:p>
+        </p:txBody>
+      </p:sp>
+      <p:sp>
+        <p:nvSpPr>
+          <p:cNvPr id="28" name="Text 26"/>
+          <p:cNvSpPr/>
+          <p:nvPr/>
+        </p:nvSpPr>
+        <p:spPr>
+          <a:xfrm>
+            <a:off x="3017520" y="5760720"/>
+            <a:ext cx="2743200" cy="548640"/>
+          </a:xfrm>
+          <a:prstGeom prst="rect">
+            <a:avLst/>
+          </a:prstGeom>
+          <a:noFill/>
+          <a:ln/>
+        </p:spPr>
+        <p:txBody>
+          <a:bodyPr wrap="square" lIns="0" tIns="0" rIns="0" bIns="0" rtlCol="0" anchor="ctr"/>
+          <a:lstStyle/>
+          <a:p>
+            <a:pPr indent="0" marL="0">
+              <a:buNone/>
+            </a:pPr>
+            <a:r>
+              <a:rPr lang="en-US" sz="1350" dirty="0">
+                <a:solidFill>
+                  <a:srgbClr val="1E293B"/>
+                </a:solidFill>
+                <a:latin typeface="Calibri" pitchFamily="34" charset="0"/>
+                <a:ea typeface="Calibri" pitchFamily="34" charset="-122"/>
+                <a:cs typeface="Calibri" pitchFamily="34" charset="-120"/>
+              </a:rPr>
+              <a:t>—</a:t>
+            </a:r>
+            <a:endParaRPr lang="en-US" sz="1350" dirty="0"/>
+          </a:p>
+        </p:txBody>
+      </p:sp>
+      <p:sp>
+        <p:nvSpPr>
+          <p:cNvPr id="29" name="Text 27"/>
+          <p:cNvSpPr/>
+          <p:nvPr/>
+        </p:nvSpPr>
+        <p:spPr>
+          <a:xfrm>
+            <a:off x="5943600" y="5760720"/>
+            <a:ext cx="5303520" cy="548640"/>
+          </a:xfrm>
+          <a:prstGeom prst="rect">
+            <a:avLst/>
+          </a:prstGeom>
+          <a:noFill/>
+          <a:ln/>
+        </p:spPr>
+        <p:txBody>
+          <a:bodyPr wrap="square" lIns="0" tIns="0" rIns="0" bIns="0" rtlCol="0" anchor="ctr"/>
+          <a:lstStyle/>
+          <a:p>
+            <a:pPr indent="0" marL="0">
+              <a:buNone/>
+            </a:pPr>
+            <a:r>
+              <a:rPr lang="en-US" sz="1300" b="1" dirty="0">
+                <a:solidFill>
+                  <a:srgbClr val="DC2626"/>
+                </a:solidFill>
+                <a:latin typeface="Calibri" pitchFamily="34" charset="0"/>
+                <a:ea typeface="Calibri" pitchFamily="34" charset="-122"/>
+                <a:cs typeface="Calibri" pitchFamily="34" charset="-120"/>
+              </a:rPr>
+              <a:t>ECoG electrode dead (2.8 µV)</a:t>
+            </a:r>
+            <a:endParaRPr lang="en-US" sz="1300" dirty="0"/>
+          </a:p>
+        </p:txBody>
+      </p:sp>
+      <p:sp>
+        <p:nvSpPr>
+          <p:cNvPr id="30" name="Shape 28"/>
+          <p:cNvSpPr/>
+          <p:nvPr/>
+        </p:nvSpPr>
+        <p:spPr>
+          <a:xfrm>
+            <a:off x="640080" y="6537960"/>
+            <a:ext cx="10881360" cy="0"/>
+          </a:xfrm>
+          <a:prstGeom prst="roundRect">
+            <a:avLst>
+              <a:gd name="adj" fmla="val Infinity"/>
+            </a:avLst>
+          </a:prstGeom>
+          <a:solidFill>
+            <a:srgbClr val="FFFFFF"/>
+          </a:solidFill>
+          <a:ln w="12700">
+            <a:solidFill>
+              <a:srgbClr val="E2E8F0"/>
+            </a:solidFill>
+            <a:prstDash val="solid"/>
+          </a:ln>
+          <a:effectLst>
+            <a:outerShdw sx="100000" sy="100000" kx="0" ky="0" algn="bl" rotWithShape="0" blurRad="114300" dist="38100" dir="5400000">
+              <a:srgbClr val="0F172A">
+                <a:alpha val="14000"/>
+              </a:srgbClr>
+            </a:outerShdw>
+          </a:effectLst>
+        </p:spPr>
+      </p:sp>
+      <p:sp>
+        <p:nvSpPr>
+          <p:cNvPr id="31" name="Text 29"/>
+          <p:cNvSpPr/>
+          <p:nvPr/>
+        </p:nvSpPr>
+        <p:spPr>
+          <a:xfrm>
+            <a:off x="658368" y="6492240"/>
+            <a:ext cx="10881360" cy="365760"/>
+          </a:xfrm>
+          <a:prstGeom prst="rect">
+            <a:avLst/>
+          </a:prstGeom>
+          <a:noFill/>
+          <a:ln/>
+        </p:spPr>
+        <p:txBody>
+          <a:bodyPr wrap="square" lIns="0" tIns="0" rIns="0" bIns="0" rtlCol="0" anchor="ctr"/>
+          <a:lstStyle/>
+          <a:p>
+            <a:pPr indent="0" marL="0">
+              <a:buNone/>
+            </a:pPr>
+            <a:r>
+              <a:rPr lang="en-US" sz="1300" b="1" i="1" dirty="0">
+                <a:solidFill>
                   <a:srgbClr val="6D28D9"/>
                 </a:solidFill>
                 <a:latin typeface="Calibri" pitchFamily="34" charset="0"/>
                 <a:ea typeface="Calibri" pitchFamily="34" charset="-122"/>
                 <a:cs typeface="Calibri" pitchFamily="34" charset="-120"/>
               </a:rPr>
-              <a:t>Two blanks I left for you:  </a:t>
-            </a:r>
-            <a:pPr indent="0" marL="0">
-              <a:buNone/>
-            </a:pPr>
-            <a:r>
-              <a:rPr lang="en-US" sz="1300" dirty="0">
-                <a:solidFill>
-                  <a:srgbClr val="1E293B"/>
-                </a:solidFill>
-                <a:latin typeface="Calibri" pitchFamily="34" charset="0"/>
-                <a:ea typeface="Calibri" pitchFamily="34" charset="-122"/>
-                <a:cs typeface="Calibri" pitchFamily="34" charset="-120"/>
-              </a:rPr>
-              <a:t>Theresa's surname, and what Tarun and I should be listed as. I didn't want to guess on the write-up.</a:t>
+              <a:t>So the up group is capped at two. The down group can still grow — 7, 8, 13, 14, 15 are ready to download.</a:t>
             </a:r>
             <a:endParaRPr lang="en-US" sz="1300" dirty="0"/>
           </a:p>
@@ -7284,13 +8581,13 @@
             <a:r>
               <a:rPr lang="en-US" sz="1200" b="1" spc="300" kern="0" dirty="0">
                 <a:solidFill>
-                  <a:srgbClr val="0D9488"/>
-                </a:solidFill>
-                <a:latin typeface="Calibri" pitchFamily="34" charset="0"/>
-                <a:ea typeface="Calibri" pitchFamily="34" charset="-122"/>
-                <a:cs typeface="Calibri" pitchFamily="34" charset="-120"/>
-              </a:rPr>
-              <a:t>NEXT</a:t>
+                  <a:srgbClr val="6D28D9"/>
+                </a:solidFill>
+                <a:latin typeface="Calibri" pitchFamily="34" charset="0"/>
+                <a:ea typeface="Calibri" pitchFamily="34" charset="-122"/>
+                <a:cs typeface="Calibri" pitchFamily="34" charset="-120"/>
+              </a:rPr>
+              <a:t>NEW THIS WEEK · DELIVERABLES</a:t>
             </a:r>
             <a:endParaRPr lang="en-US" sz="1200" dirty="0"/>
           </a:p>
@@ -7329,7 +8626,7 @@
                 <a:ea typeface="Cambria" pitchFamily="34" charset="-122"/>
                 <a:cs typeface="Cambria" pitchFamily="34" charset="-120"/>
               </a:rPr>
-              <a:t>Between now and the 21st</a:t>
+              <a:t>Everything now lives in one place</a:t>
             </a:r>
             <a:endParaRPr lang="en-US" sz="2800" dirty="0"/>
           </a:p>
@@ -7337,18 +8634,57 @@
       </p:sp>
       <p:sp>
         <p:nvSpPr>
-          <p:cNvPr id="4" name="Shape 2"/>
-          <p:cNvSpPr/>
-          <p:nvPr/>
-        </p:nvSpPr>
-        <p:spPr>
-          <a:xfrm>
-            <a:off x="640080" y="1920240"/>
-            <a:ext cx="10881360" cy="960120"/>
+          <p:cNvPr id="4" name="Text 2"/>
+          <p:cNvSpPr/>
+          <p:nvPr/>
+        </p:nvSpPr>
+        <p:spPr>
+          <a:xfrm>
+            <a:off x="640080" y="1627632"/>
+            <a:ext cx="10881360" cy="502920"/>
+          </a:xfrm>
+          <a:prstGeom prst="rect">
+            <a:avLst/>
+          </a:prstGeom>
+          <a:noFill/>
+          <a:ln/>
+        </p:spPr>
+        <p:txBody>
+          <a:bodyPr wrap="square" lIns="0" tIns="0" rIns="0" bIns="0" rtlCol="0" anchor="ctr"/>
+          <a:lstStyle/>
+          <a:p>
+            <a:pPr indent="0" marL="0">
+              <a:buNone/>
+            </a:pPr>
+            <a:r>
+              <a:rPr lang="en-US" sz="1450" dirty="0">
+                <a:solidFill>
+                  <a:srgbClr val="1E293B"/>
+                </a:solidFill>
+                <a:latin typeface="Calibri" pitchFamily="34" charset="0"/>
+                <a:ea typeface="Calibri" pitchFamily="34" charset="-122"/>
+                <a:cs typeface="Calibri" pitchFamily="34" charset="-120"/>
+              </a:rPr>
+              <a:t>We put the project behind a single page so the code, the write-up and the slides stay in sync and are easy to hand to anyone.</a:t>
+            </a:r>
+            <a:endParaRPr lang="en-US" sz="1450" dirty="0"/>
+          </a:p>
+        </p:txBody>
+      </p:sp>
+      <p:sp>
+        <p:nvSpPr>
+          <p:cNvPr id="5" name="Shape 3"/>
+          <p:cNvSpPr/>
+          <p:nvPr/>
+        </p:nvSpPr>
+        <p:spPr>
+          <a:xfrm>
+            <a:off x="640080" y="2286000"/>
+            <a:ext cx="3538728" cy="3200400"/>
           </a:xfrm>
           <a:prstGeom prst="roundRect">
             <a:avLst>
-              <a:gd name="adj" fmla="val 8571"/>
+              <a:gd name="adj" fmla="val 2571"/>
             </a:avLst>
           </a:prstGeom>
           <a:solidFill>
@@ -7371,60 +8707,40 @@
       </p:sp>
       <p:sp>
         <p:nvSpPr>
-          <p:cNvPr id="5" name="Shape 3"/>
-          <p:cNvSpPr/>
-          <p:nvPr/>
-        </p:nvSpPr>
-        <p:spPr>
-          <a:xfrm>
-            <a:off x="896112" y="2176272"/>
-            <a:ext cx="438912" cy="438912"/>
-          </a:xfrm>
-          <a:prstGeom prst="ellipse">
-            <a:avLst/>
-          </a:prstGeom>
-          <a:solidFill>
-            <a:srgbClr val="6D28D9"/>
-          </a:solidFill>
-          <a:ln/>
-        </p:spPr>
-      </p:sp>
-      <p:sp>
-        <p:nvSpPr>
           <p:cNvPr id="6" name="Text 4"/>
           <p:cNvSpPr/>
           <p:nvPr/>
         </p:nvSpPr>
         <p:spPr>
           <a:xfrm>
-            <a:off x="896112" y="2176272"/>
-            <a:ext cx="438912" cy="438912"/>
-          </a:xfrm>
-          <a:prstGeom prst="rect">
-            <a:avLst/>
-          </a:prstGeom>
-          <a:noFill/>
-          <a:ln/>
-        </p:spPr>
-        <p:txBody>
-          <a:bodyPr wrap="square" lIns="0" tIns="0" rIns="0" bIns="0" rtlCol="0" anchor="ctr"/>
-          <a:lstStyle/>
-          <a:p>
-            <a:pPr algn="ctr" indent="0" marL="0">
-              <a:buNone/>
-            </a:pPr>
-            <a:r>
-              <a:rPr lang="en-US" sz="1600" b="1" dirty="0">
-                <a:solidFill>
-                  <a:srgbClr val="FFFFFF"/>
-                </a:solidFill>
-                <a:latin typeface="Calibri" pitchFamily="34" charset="0"/>
-                <a:ea typeface="Calibri" pitchFamily="34" charset="-122"/>
-                <a:cs typeface="Calibri" pitchFamily="34" charset="-120"/>
-              </a:rPr>
-              <a:t>1</a:t>
-            </a:r>
-            <a:endParaRPr lang="en-US" sz="1600" dirty="0"/>
+            <a:off x="914400" y="2514600"/>
+            <a:ext cx="3017520" cy="274320"/>
+          </a:xfrm>
+          <a:prstGeom prst="rect">
+            <a:avLst/>
+          </a:prstGeom>
+          <a:noFill/>
+          <a:ln/>
+        </p:spPr>
+        <p:txBody>
+          <a:bodyPr wrap="square" lIns="0" tIns="0" rIns="0" bIns="0" rtlCol="0" anchor="ctr"/>
+          <a:lstStyle/>
+          <a:p>
+            <a:pPr indent="0" marL="0">
+              <a:buNone/>
+            </a:pPr>
+            <a:r>
+              <a:rPr lang="en-US" sz="1100" b="1" spc="200" kern="0" dirty="0">
+                <a:solidFill>
+                  <a:srgbClr val="6D28D9"/>
+                </a:solidFill>
+                <a:latin typeface="Calibri" pitchFamily="34" charset="0"/>
+                <a:ea typeface="Calibri" pitchFamily="34" charset="-122"/>
+                <a:cs typeface="Calibri" pitchFamily="34" charset="-120"/>
+              </a:rPr>
+              <a:t>REPOSITORY</a:t>
+            </a:r>
+            <a:endParaRPr lang="en-US" sz="1100" dirty="0"/>
           </a:p>
         </p:txBody>
       </p:sp>
@@ -7436,8 +8752,47 @@
         </p:nvSpPr>
         <p:spPr>
           <a:xfrm>
-            <a:off x="1517904" y="2103120"/>
-            <a:ext cx="3931920" cy="594360"/>
+            <a:off x="914400" y="2834640"/>
+            <a:ext cx="3017520" cy="457200"/>
+          </a:xfrm>
+          <a:prstGeom prst="rect">
+            <a:avLst/>
+          </a:prstGeom>
+          <a:noFill/>
+          <a:ln/>
+        </p:spPr>
+        <p:txBody>
+          <a:bodyPr wrap="square" lIns="0" tIns="0" rIns="0" bIns="0" rtlCol="0" anchor="ctr"/>
+          <a:lstStyle/>
+          <a:p>
+            <a:pPr indent="0" marL="0">
+              <a:buNone/>
+            </a:pPr>
+            <a:r>
+              <a:rPr lang="en-US" sz="1900" b="1" dirty="0">
+                <a:solidFill>
+                  <a:srgbClr val="1E293B"/>
+                </a:solidFill>
+                <a:latin typeface="Cambria" pitchFamily="34" charset="0"/>
+                <a:ea typeface="Cambria" pitchFamily="34" charset="-122"/>
+                <a:cs typeface="Cambria" pitchFamily="34" charset="-120"/>
+              </a:rPr>
+              <a:t>The pipeline</a:t>
+            </a:r>
+            <a:endParaRPr lang="en-US" sz="1900" dirty="0"/>
+          </a:p>
+        </p:txBody>
+      </p:sp>
+      <p:sp>
+        <p:nvSpPr>
+          <p:cNvPr id="8" name="Text 6"/>
+          <p:cNvSpPr/>
+          <p:nvPr/>
+        </p:nvSpPr>
+        <p:spPr>
+          <a:xfrm>
+            <a:off x="914400" y="3383280"/>
+            <a:ext cx="3063240" cy="1463040"/>
           </a:xfrm>
           <a:prstGeom prst="rect">
             <a:avLst/>
@@ -7451,53 +8806,11 @@
           <a:p>
             <a:pPr indent="0" marL="0">
               <a:lnSpc>
-                <a:spcPct val="100000"/>
+                <a:spcPct val="106000"/>
               </a:lnSpc>
               <a:buNone/>
             </a:pPr>
             <a:r>
-              <a:rPr lang="en-US" sz="1450" b="1" dirty="0">
-                <a:solidFill>
-                  <a:srgbClr val="1E293B"/>
-                </a:solidFill>
-                <a:latin typeface="Calibri" pitchFamily="34" charset="0"/>
-                <a:ea typeface="Calibri" pitchFamily="34" charset="-122"/>
-                <a:cs typeface="Calibri" pitchFamily="34" charset="-120"/>
-              </a:rPr>
-              <a:t>Download and process the remaining animals</a:t>
-            </a:r>
-            <a:endParaRPr lang="en-US" sz="1450" dirty="0"/>
-          </a:p>
-        </p:txBody>
-      </p:sp>
-      <p:sp>
-        <p:nvSpPr>
-          <p:cNvPr id="8" name="Text 6"/>
-          <p:cNvSpPr/>
-          <p:nvPr/>
-        </p:nvSpPr>
-        <p:spPr>
-          <a:xfrm>
-            <a:off x="5577840" y="2103120"/>
-            <a:ext cx="5669280" cy="594360"/>
-          </a:xfrm>
-          <a:prstGeom prst="rect">
-            <a:avLst/>
-          </a:prstGeom>
-          <a:noFill/>
-          <a:ln/>
-        </p:spPr>
-        <p:txBody>
-          <a:bodyPr wrap="square" lIns="0" tIns="0" rIns="0" bIns="0" rtlCol="0" anchor="ctr"/>
-          <a:lstStyle/>
-          <a:p>
-            <a:pPr indent="0" marL="0">
-              <a:lnSpc>
-                <a:spcPct val="102000"/>
-              </a:lnSpc>
-              <a:buNone/>
-            </a:pPr>
-            <a:r>
               <a:rPr lang="en-US" sz="1250" dirty="0">
                 <a:solidFill>
                   <a:srgbClr val="64748B"/>
@@ -7506,7 +8819,7 @@
                 <a:ea typeface="Calibri" pitchFamily="34" charset="-122"/>
                 <a:cs typeface="Calibri" pitchFamily="34" charset="-120"/>
               </a:rPr>
-              <a:t>7, 8, 13, 14, 15 (down) plus 1 and 6 (failed up — negative controls). Takes n from 5 to about 12.</a:t>
+              <a:t>Decoding, the pooled autoencoder, every control, per-animal results. One command per animal, reproducible end to end.</a:t>
             </a:r>
             <a:endParaRPr lang="en-US" sz="1250" dirty="0"/>
           </a:p>
@@ -7514,18 +8827,57 @@
       </p:sp>
       <p:sp>
         <p:nvSpPr>
-          <p:cNvPr id="9" name="Shape 7"/>
-          <p:cNvSpPr/>
-          <p:nvPr/>
-        </p:nvSpPr>
-        <p:spPr>
-          <a:xfrm>
-            <a:off x="640080" y="2990088"/>
-            <a:ext cx="10881360" cy="960120"/>
+          <p:cNvPr id="9" name="Text 7"/>
+          <p:cNvSpPr/>
+          <p:nvPr/>
+        </p:nvSpPr>
+        <p:spPr>
+          <a:xfrm>
+            <a:off x="914400" y="4983480"/>
+            <a:ext cx="3063240" cy="365760"/>
+          </a:xfrm>
+          <a:prstGeom prst="rect">
+            <a:avLst/>
+          </a:prstGeom>
+          <a:noFill/>
+          <a:ln/>
+        </p:spPr>
+        <p:txBody>
+          <a:bodyPr wrap="square" lIns="0" tIns="0" rIns="0" bIns="0" rtlCol="0" anchor="ctr"/>
+          <a:lstStyle/>
+          <a:p>
+            <a:pPr indent="0" marL="0">
+              <a:buNone/>
+            </a:pPr>
+            <a:r>
+              <a:rPr lang="en-US" sz="1050" i="1" dirty="0">
+                <a:solidFill>
+                  <a:srgbClr val="6D28D9"/>
+                </a:solidFill>
+                <a:latin typeface="Calibri" pitchFamily="34" charset="0"/>
+                <a:ea typeface="Calibri" pitchFamily="34" charset="-122"/>
+                <a:cs typeface="Calibri" pitchFamily="34" charset="-120"/>
+              </a:rPr>
+              <a:t>github.com/switchrao777/hroc-ncan</a:t>
+            </a:r>
+            <a:endParaRPr lang="en-US" sz="1050" dirty="0"/>
+          </a:p>
+        </p:txBody>
+      </p:sp>
+      <p:sp>
+        <p:nvSpPr>
+          <p:cNvPr id="10" name="Shape 8"/>
+          <p:cNvSpPr/>
+          <p:nvPr/>
+        </p:nvSpPr>
+        <p:spPr>
+          <a:xfrm>
+            <a:off x="4370832" y="2286000"/>
+            <a:ext cx="3538728" cy="3200400"/>
           </a:xfrm>
           <a:prstGeom prst="roundRect">
             <a:avLst>
-              <a:gd name="adj" fmla="val 8571"/>
+              <a:gd name="adj" fmla="val 2571"/>
             </a:avLst>
           </a:prstGeom>
           <a:solidFill>
@@ -7548,60 +8900,40 @@
       </p:sp>
       <p:sp>
         <p:nvSpPr>
-          <p:cNvPr id="10" name="Shape 8"/>
-          <p:cNvSpPr/>
-          <p:nvPr/>
-        </p:nvSpPr>
-        <p:spPr>
-          <a:xfrm>
-            <a:off x="896112" y="3246120"/>
-            <a:ext cx="438912" cy="438912"/>
-          </a:xfrm>
-          <a:prstGeom prst="ellipse">
-            <a:avLst/>
-          </a:prstGeom>
-          <a:solidFill>
-            <a:srgbClr val="6D28D9"/>
-          </a:solidFill>
-          <a:ln/>
-        </p:spPr>
-      </p:sp>
-      <p:sp>
-        <p:nvSpPr>
           <p:cNvPr id="11" name="Text 9"/>
           <p:cNvSpPr/>
           <p:nvPr/>
         </p:nvSpPr>
         <p:spPr>
           <a:xfrm>
-            <a:off x="896112" y="3246120"/>
-            <a:ext cx="438912" cy="438912"/>
-          </a:xfrm>
-          <a:prstGeom prst="rect">
-            <a:avLst/>
-          </a:prstGeom>
-          <a:noFill/>
-          <a:ln/>
-        </p:spPr>
-        <p:txBody>
-          <a:bodyPr wrap="square" lIns="0" tIns="0" rIns="0" bIns="0" rtlCol="0" anchor="ctr"/>
-          <a:lstStyle/>
-          <a:p>
-            <a:pPr algn="ctr" indent="0" marL="0">
-              <a:buNone/>
-            </a:pPr>
-            <a:r>
-              <a:rPr lang="en-US" sz="1600" b="1" dirty="0">
-                <a:solidFill>
-                  <a:srgbClr val="FFFFFF"/>
-                </a:solidFill>
-                <a:latin typeface="Calibri" pitchFamily="34" charset="0"/>
-                <a:ea typeface="Calibri" pitchFamily="34" charset="-122"/>
-                <a:cs typeface="Calibri" pitchFamily="34" charset="-120"/>
-              </a:rPr>
-              <a:t>2</a:t>
-            </a:r>
-            <a:endParaRPr lang="en-US" sz="1600" dirty="0"/>
+            <a:off x="4645152" y="2514600"/>
+            <a:ext cx="3017520" cy="274320"/>
+          </a:xfrm>
+          <a:prstGeom prst="rect">
+            <a:avLst/>
+          </a:prstGeom>
+          <a:noFill/>
+          <a:ln/>
+        </p:spPr>
+        <p:txBody>
+          <a:bodyPr wrap="square" lIns="0" tIns="0" rIns="0" bIns="0" rtlCol="0" anchor="ctr"/>
+          <a:lstStyle/>
+          <a:p>
+            <a:pPr indent="0" marL="0">
+              <a:buNone/>
+            </a:pPr>
+            <a:r>
+              <a:rPr lang="en-US" sz="1100" b="1" spc="200" kern="0" dirty="0">
+                <a:solidFill>
+                  <a:srgbClr val="0D9488"/>
+                </a:solidFill>
+                <a:latin typeface="Calibri" pitchFamily="34" charset="0"/>
+                <a:ea typeface="Calibri" pitchFamily="34" charset="-122"/>
+                <a:cs typeface="Calibri" pitchFamily="34" charset="-120"/>
+              </a:rPr>
+              <a:t>REPORT</a:t>
+            </a:r>
+            <a:endParaRPr lang="en-US" sz="1100" dirty="0"/>
           </a:p>
         </p:txBody>
       </p:sp>
@@ -7613,8 +8945,47 @@
         </p:nvSpPr>
         <p:spPr>
           <a:xfrm>
-            <a:off x="1517904" y="3172968"/>
-            <a:ext cx="3931920" cy="594360"/>
+            <a:off x="4645152" y="2834640"/>
+            <a:ext cx="3017520" cy="457200"/>
+          </a:xfrm>
+          <a:prstGeom prst="rect">
+            <a:avLst/>
+          </a:prstGeom>
+          <a:noFill/>
+          <a:ln/>
+        </p:spPr>
+        <p:txBody>
+          <a:bodyPr wrap="square" lIns="0" tIns="0" rIns="0" bIns="0" rtlCol="0" anchor="ctr"/>
+          <a:lstStyle/>
+          <a:p>
+            <a:pPr indent="0" marL="0">
+              <a:buNone/>
+            </a:pPr>
+            <a:r>
+              <a:rPr lang="en-US" sz="1900" b="1" dirty="0">
+                <a:solidFill>
+                  <a:srgbClr val="1E293B"/>
+                </a:solidFill>
+                <a:latin typeface="Cambria" pitchFamily="34" charset="0"/>
+                <a:ea typeface="Cambria" pitchFamily="34" charset="-122"/>
+                <a:cs typeface="Cambria" pitchFamily="34" charset="-120"/>
+              </a:rPr>
+              <a:t>Six-page write-up</a:t>
+            </a:r>
+            <a:endParaRPr lang="en-US" sz="1900" dirty="0"/>
+          </a:p>
+        </p:txBody>
+      </p:sp>
+      <p:sp>
+        <p:nvSpPr>
+          <p:cNvPr id="13" name="Text 11"/>
+          <p:cNvSpPr/>
+          <p:nvPr/>
+        </p:nvSpPr>
+        <p:spPr>
+          <a:xfrm>
+            <a:off x="4645152" y="3383280"/>
+            <a:ext cx="3063240" cy="1463040"/>
           </a:xfrm>
           <a:prstGeom prst="rect">
             <a:avLst/>
@@ -7628,53 +8999,11 @@
           <a:p>
             <a:pPr indent="0" marL="0">
               <a:lnSpc>
-                <a:spcPct val="100000"/>
+                <a:spcPct val="106000"/>
               </a:lnSpc>
               <a:buNone/>
             </a:pPr>
             <a:r>
-              <a:rPr lang="en-US" sz="1450" b="1" dirty="0">
-                <a:solidFill>
-                  <a:srgbClr val="1E293B"/>
-                </a:solidFill>
-                <a:latin typeface="Calibri" pitchFamily="34" charset="0"/>
-                <a:ea typeface="Calibri" pitchFamily="34" charset="-122"/>
-                <a:cs typeface="Calibri" pitchFamily="34" charset="-120"/>
-              </a:rPr>
-              <a:t>Re-run everything at the larger n</a:t>
-            </a:r>
-            <a:endParaRPr lang="en-US" sz="1450" dirty="0"/>
-          </a:p>
-        </p:txBody>
-      </p:sp>
-      <p:sp>
-        <p:nvSpPr>
-          <p:cNvPr id="13" name="Text 11"/>
-          <p:cNvSpPr/>
-          <p:nvPr/>
-        </p:nvSpPr>
-        <p:spPr>
-          <a:xfrm>
-            <a:off x="5577840" y="3172968"/>
-            <a:ext cx="5669280" cy="594360"/>
-          </a:xfrm>
-          <a:prstGeom prst="rect">
-            <a:avLst/>
-          </a:prstGeom>
-          <a:noFill/>
-          <a:ln/>
-        </p:spPr>
-        <p:txBody>
-          <a:bodyPr wrap="square" lIns="0" tIns="0" rIns="0" bIns="0" rtlCol="0" anchor="ctr"/>
-          <a:lstStyle/>
-          <a:p>
-            <a:pPr indent="0" marL="0">
-              <a:lnSpc>
-                <a:spcPct val="102000"/>
-              </a:lnSpc>
-              <a:buNone/>
-            </a:pPr>
-            <a:r>
               <a:rPr lang="en-US" sz="1250" dirty="0">
                 <a:solidFill>
                   <a:srgbClr val="64748B"/>
@@ -7683,7 +9012,7 @@
                 <a:ea typeface="Calibri" pitchFamily="34" charset="-122"/>
                 <a:cs typeface="Calibri" pitchFamily="34" charset="-120"/>
               </a:rPr>
-              <a:t>The scaling correlation is the analysis this powers. Fully automated — two commands per animal.</a:t>
+              <a:t>Background, methods, results, limitations, references — with the four figures and the real numbers. Formatted as a handout.</a:t>
             </a:r>
             <a:endParaRPr lang="en-US" sz="1250" dirty="0"/>
           </a:p>
@@ -7691,18 +9020,57 @@
       </p:sp>
       <p:sp>
         <p:nvSpPr>
-          <p:cNvPr id="14" name="Shape 12"/>
-          <p:cNvSpPr/>
-          <p:nvPr/>
-        </p:nvSpPr>
-        <p:spPr>
-          <a:xfrm>
-            <a:off x="640080" y="4059936"/>
-            <a:ext cx="10881360" cy="960120"/>
+          <p:cNvPr id="14" name="Text 12"/>
+          <p:cNvSpPr/>
+          <p:nvPr/>
+        </p:nvSpPr>
+        <p:spPr>
+          <a:xfrm>
+            <a:off x="4645152" y="4983480"/>
+            <a:ext cx="3063240" cy="365760"/>
+          </a:xfrm>
+          <a:prstGeom prst="rect">
+            <a:avLst/>
+          </a:prstGeom>
+          <a:noFill/>
+          <a:ln/>
+        </p:spPr>
+        <p:txBody>
+          <a:bodyPr wrap="square" lIns="0" tIns="0" rIns="0" bIns="0" rtlCol="0" anchor="ctr"/>
+          <a:lstStyle/>
+          <a:p>
+            <a:pPr indent="0" marL="0">
+              <a:buNone/>
+            </a:pPr>
+            <a:r>
+              <a:rPr lang="en-US" sz="1050" i="1" dirty="0">
+                <a:solidFill>
+                  <a:srgbClr val="0D9488"/>
+                </a:solidFill>
+                <a:latin typeface="Calibri" pitchFamily="34" charset="0"/>
+                <a:ea typeface="Calibri" pitchFamily="34" charset="-122"/>
+                <a:cs typeface="Calibri" pitchFamily="34" charset="-120"/>
+              </a:rPr>
+              <a:t>docs/HROC_Report.pdf</a:t>
+            </a:r>
+            <a:endParaRPr lang="en-US" sz="1050" dirty="0"/>
+          </a:p>
+        </p:txBody>
+      </p:sp>
+      <p:sp>
+        <p:nvSpPr>
+          <p:cNvPr id="15" name="Shape 13"/>
+          <p:cNvSpPr/>
+          <p:nvPr/>
+        </p:nvSpPr>
+        <p:spPr>
+          <a:xfrm>
+            <a:off x="8101584" y="2286000"/>
+            <a:ext cx="3538728" cy="3200400"/>
           </a:xfrm>
           <a:prstGeom prst="roundRect">
             <a:avLst>
-              <a:gd name="adj" fmla="val 8571"/>
+              <a:gd name="adj" fmla="val 2571"/>
             </a:avLst>
           </a:prstGeom>
           <a:solidFill>
@@ -7725,60 +9093,40 @@
       </p:sp>
       <p:sp>
         <p:nvSpPr>
-          <p:cNvPr id="15" name="Shape 13"/>
-          <p:cNvSpPr/>
-          <p:nvPr/>
-        </p:nvSpPr>
-        <p:spPr>
-          <a:xfrm>
-            <a:off x="896112" y="4315968"/>
-            <a:ext cx="438912" cy="438912"/>
-          </a:xfrm>
-          <a:prstGeom prst="ellipse">
-            <a:avLst/>
-          </a:prstGeom>
-          <a:solidFill>
-            <a:srgbClr val="0D9488"/>
-          </a:solidFill>
-          <a:ln/>
-        </p:spPr>
-      </p:sp>
-      <p:sp>
-        <p:nvSpPr>
           <p:cNvPr id="16" name="Text 14"/>
           <p:cNvSpPr/>
           <p:nvPr/>
         </p:nvSpPr>
         <p:spPr>
           <a:xfrm>
-            <a:off x="896112" y="4315968"/>
-            <a:ext cx="438912" cy="438912"/>
-          </a:xfrm>
-          <a:prstGeom prst="rect">
-            <a:avLst/>
-          </a:prstGeom>
-          <a:noFill/>
-          <a:ln/>
-        </p:spPr>
-        <p:txBody>
-          <a:bodyPr wrap="square" lIns="0" tIns="0" rIns="0" bIns="0" rtlCol="0" anchor="ctr"/>
-          <a:lstStyle/>
-          <a:p>
-            <a:pPr algn="ctr" indent="0" marL="0">
-              <a:buNone/>
-            </a:pPr>
-            <a:r>
-              <a:rPr lang="en-US" sz="1600" b="1" dirty="0">
-                <a:solidFill>
-                  <a:srgbClr val="FFFFFF"/>
-                </a:solidFill>
-                <a:latin typeface="Calibri" pitchFamily="34" charset="0"/>
-                <a:ea typeface="Calibri" pitchFamily="34" charset="-122"/>
-                <a:cs typeface="Calibri" pitchFamily="34" charset="-120"/>
-              </a:rPr>
-              <a:t>3</a:t>
-            </a:r>
-            <a:endParaRPr lang="en-US" sz="1600" dirty="0"/>
+            <a:off x="8375904" y="2514600"/>
+            <a:ext cx="3017520" cy="274320"/>
+          </a:xfrm>
+          <a:prstGeom prst="rect">
+            <a:avLst/>
+          </a:prstGeom>
+          <a:noFill/>
+          <a:ln/>
+        </p:spPr>
+        <p:txBody>
+          <a:bodyPr wrap="square" lIns="0" tIns="0" rIns="0" bIns="0" rtlCol="0" anchor="ctr"/>
+          <a:lstStyle/>
+          <a:p>
+            <a:pPr indent="0" marL="0">
+              <a:buNone/>
+            </a:pPr>
+            <a:r>
+              <a:rPr lang="en-US" sz="1100" b="1" spc="200" kern="0" dirty="0">
+                <a:solidFill>
+                  <a:srgbClr val="D97706"/>
+                </a:solidFill>
+                <a:latin typeface="Calibri" pitchFamily="34" charset="0"/>
+                <a:ea typeface="Calibri" pitchFamily="34" charset="-122"/>
+                <a:cs typeface="Calibri" pitchFamily="34" charset="-120"/>
+              </a:rPr>
+              <a:t>SLIDES</a:t>
+            </a:r>
+            <a:endParaRPr lang="en-US" sz="1100" dirty="0"/>
           </a:p>
         </p:txBody>
       </p:sp>
@@ -7790,8 +9138,47 @@
         </p:nvSpPr>
         <p:spPr>
           <a:xfrm>
-            <a:off x="1517904" y="4242816"/>
-            <a:ext cx="3931920" cy="594360"/>
+            <a:off x="8375904" y="2834640"/>
+            <a:ext cx="3017520" cy="457200"/>
+          </a:xfrm>
+          <a:prstGeom prst="rect">
+            <a:avLst/>
+          </a:prstGeom>
+          <a:noFill/>
+          <a:ln/>
+        </p:spPr>
+        <p:txBody>
+          <a:bodyPr wrap="square" lIns="0" tIns="0" rIns="0" bIns="0" rtlCol="0" anchor="ctr"/>
+          <a:lstStyle/>
+          <a:p>
+            <a:pPr indent="0" marL="0">
+              <a:buNone/>
+            </a:pPr>
+            <a:r>
+              <a:rPr lang="en-US" sz="1900" b="1" dirty="0">
+                <a:solidFill>
+                  <a:srgbClr val="1E293B"/>
+                </a:solidFill>
+                <a:latin typeface="Cambria" pitchFamily="34" charset="0"/>
+                <a:ea typeface="Cambria" pitchFamily="34" charset="-122"/>
+                <a:cs typeface="Cambria" pitchFamily="34" charset="-120"/>
+              </a:rPr>
+              <a:t>The decks</a:t>
+            </a:r>
+            <a:endParaRPr lang="en-US" sz="1900" dirty="0"/>
+          </a:p>
+        </p:txBody>
+      </p:sp>
+      <p:sp>
+        <p:nvSpPr>
+          <p:cNvPr id="18" name="Text 16"/>
+          <p:cNvSpPr/>
+          <p:nvPr/>
+        </p:nvSpPr>
+        <p:spPr>
+          <a:xfrm>
+            <a:off x="8375904" y="3383280"/>
+            <a:ext cx="3063240" cy="1463040"/>
           </a:xfrm>
           <a:prstGeom prst="rect">
             <a:avLst/>
@@ -7805,53 +9192,11 @@
           <a:p>
             <a:pPr indent="0" marL="0">
               <a:lnSpc>
-                <a:spcPct val="100000"/>
+                <a:spcPct val="106000"/>
               </a:lnSpc>
               <a:buNone/>
             </a:pPr>
             <a:r>
-              <a:rPr lang="en-US" sz="1450" b="1" dirty="0">
-                <a:solidFill>
-                  <a:srgbClr val="1E293B"/>
-                </a:solidFill>
-                <a:latin typeface="Calibri" pitchFamily="34" charset="0"/>
-                <a:ea typeface="Calibri" pitchFamily="34" charset="-122"/>
-                <a:cs typeface="Calibri" pitchFamily="34" charset="-120"/>
-              </a:rPr>
-              <a:t>Build the presentation for your group</a:t>
-            </a:r>
-            <a:endParaRPr lang="en-US" sz="1450" dirty="0"/>
-          </a:p>
-        </p:txBody>
-      </p:sp>
-      <p:sp>
-        <p:nvSpPr>
-          <p:cNvPr id="18" name="Text 16"/>
-          <p:cNvSpPr/>
-          <p:nvPr/>
-        </p:nvSpPr>
-        <p:spPr>
-          <a:xfrm>
-            <a:off x="5577840" y="4242816"/>
-            <a:ext cx="5669280" cy="594360"/>
-          </a:xfrm>
-          <a:prstGeom prst="rect">
-            <a:avLst/>
-          </a:prstGeom>
-          <a:noFill/>
-          <a:ln/>
-        </p:spPr>
-        <p:txBody>
-          <a:bodyPr wrap="square" lIns="0" tIns="0" rIns="0" bIns="0" rtlCol="0" anchor="ctr"/>
-          <a:lstStyle/>
-          <a:p>
-            <a:pPr indent="0" marL="0">
-              <a:lnSpc>
-                <a:spcPct val="102000"/>
-              </a:lnSpc>
-              <a:buNone/>
-            </a:pPr>
-            <a:r>
               <a:rPr lang="en-US" sz="1250" dirty="0">
                 <a:solidFill>
                   <a:srgbClr val="64748B"/>
@@ -7860,7 +9205,7 @@
                 <a:ea typeface="Calibri" pitchFamily="34" charset="-122"/>
                 <a:cs typeface="Calibri" pitchFamily="34" charset="-120"/>
               </a:rPr>
-              <a:t>Pipeline explained with a data-flow figure, at the level you described.</a:t>
+              <a:t>This update, the talk for your group, and speaker notes for each.</a:t>
             </a:r>
             <a:endParaRPr lang="en-US" sz="1250" dirty="0"/>
           </a:p>
@@ -7868,195 +9213,57 @@
       </p:sp>
       <p:sp>
         <p:nvSpPr>
-          <p:cNvPr id="19" name="Shape 17"/>
-          <p:cNvSpPr/>
-          <p:nvPr/>
-        </p:nvSpPr>
-        <p:spPr>
-          <a:xfrm>
-            <a:off x="640080" y="5129784"/>
-            <a:ext cx="10881360" cy="960120"/>
+          <p:cNvPr id="19" name="Text 17"/>
+          <p:cNvSpPr/>
+          <p:nvPr/>
+        </p:nvSpPr>
+        <p:spPr>
+          <a:xfrm>
+            <a:off x="8375904" y="4983480"/>
+            <a:ext cx="3063240" cy="365760"/>
+          </a:xfrm>
+          <a:prstGeom prst="rect">
+            <a:avLst/>
+          </a:prstGeom>
+          <a:noFill/>
+          <a:ln/>
+        </p:spPr>
+        <p:txBody>
+          <a:bodyPr wrap="square" lIns="0" tIns="0" rIns="0" bIns="0" rtlCol="0" anchor="ctr"/>
+          <a:lstStyle/>
+          <a:p>
+            <a:pPr indent="0" marL="0">
+              <a:buNone/>
+            </a:pPr>
+            <a:r>
+              <a:rPr lang="en-US" sz="1050" i="1" dirty="0">
+                <a:solidFill>
+                  <a:srgbClr val="D97706"/>
+                </a:solidFill>
+                <a:latin typeface="Calibri" pitchFamily="34" charset="0"/>
+                <a:ea typeface="Calibri" pitchFamily="34" charset="-122"/>
+                <a:cs typeface="Calibri" pitchFamily="34" charset="-120"/>
+              </a:rPr>
+              <a:t>slides/</a:t>
+            </a:r>
+            <a:endParaRPr lang="en-US" sz="1050" dirty="0"/>
+          </a:p>
+        </p:txBody>
+      </p:sp>
+      <p:sp>
+        <p:nvSpPr>
+          <p:cNvPr id="20" name="Shape 18"/>
+          <p:cNvSpPr/>
+          <p:nvPr/>
+        </p:nvSpPr>
+        <p:spPr>
+          <a:xfrm>
+            <a:off x="640080" y="5715000"/>
+            <a:ext cx="10881360" cy="777240"/>
           </a:xfrm>
           <a:prstGeom prst="roundRect">
             <a:avLst>
-              <a:gd name="adj" fmla="val 8571"/>
-            </a:avLst>
-          </a:prstGeom>
-          <a:solidFill>
-            <a:srgbClr val="FFFFFF"/>
-          </a:solidFill>
-          <a:ln w="12700">
-            <a:solidFill>
-              <a:srgbClr val="E2E8F0"/>
-            </a:solidFill>
-            <a:prstDash val="solid"/>
-          </a:ln>
-          <a:effectLst>
-            <a:outerShdw sx="100000" sy="100000" kx="0" ky="0" algn="bl" rotWithShape="0" blurRad="114300" dist="38100" dir="5400000">
-              <a:srgbClr val="0F172A">
-                <a:alpha val="14000"/>
-              </a:srgbClr>
-            </a:outerShdw>
-          </a:effectLst>
-        </p:spPr>
-      </p:sp>
-      <p:sp>
-        <p:nvSpPr>
-          <p:cNvPr id="20" name="Shape 18"/>
-          <p:cNvSpPr/>
-          <p:nvPr/>
-        </p:nvSpPr>
-        <p:spPr>
-          <a:xfrm>
-            <a:off x="896112" y="5385816"/>
-            <a:ext cx="438912" cy="438912"/>
-          </a:xfrm>
-          <a:prstGeom prst="ellipse">
-            <a:avLst/>
-          </a:prstGeom>
-          <a:solidFill>
-            <a:srgbClr val="0D9488"/>
-          </a:solidFill>
-          <a:ln/>
-        </p:spPr>
-      </p:sp>
-      <p:sp>
-        <p:nvSpPr>
-          <p:cNvPr id="21" name="Text 19"/>
-          <p:cNvSpPr/>
-          <p:nvPr/>
-        </p:nvSpPr>
-        <p:spPr>
-          <a:xfrm>
-            <a:off x="896112" y="5385816"/>
-            <a:ext cx="438912" cy="438912"/>
-          </a:xfrm>
-          <a:prstGeom prst="rect">
-            <a:avLst/>
-          </a:prstGeom>
-          <a:noFill/>
-          <a:ln/>
-        </p:spPr>
-        <p:txBody>
-          <a:bodyPr wrap="square" lIns="0" tIns="0" rIns="0" bIns="0" rtlCol="0" anchor="ctr"/>
-          <a:lstStyle/>
-          <a:p>
-            <a:pPr algn="ctr" indent="0" marL="0">
-              <a:buNone/>
-            </a:pPr>
-            <a:r>
-              <a:rPr lang="en-US" sz="1600" b="1" dirty="0">
-                <a:solidFill>
-                  <a:srgbClr val="FFFFFF"/>
-                </a:solidFill>
-                <a:latin typeface="Calibri" pitchFamily="34" charset="0"/>
-                <a:ea typeface="Calibri" pitchFamily="34" charset="-122"/>
-                <a:cs typeface="Calibri" pitchFamily="34" charset="-120"/>
-              </a:rPr>
-              <a:t>4</a:t>
-            </a:r>
-            <a:endParaRPr lang="en-US" sz="1600" dirty="0"/>
-          </a:p>
-        </p:txBody>
-      </p:sp>
-      <p:sp>
-        <p:nvSpPr>
-          <p:cNvPr id="22" name="Text 20"/>
-          <p:cNvSpPr/>
-          <p:nvPr/>
-        </p:nvSpPr>
-        <p:spPr>
-          <a:xfrm>
-            <a:off x="1517904" y="5312664"/>
-            <a:ext cx="3931920" cy="594360"/>
-          </a:xfrm>
-          <a:prstGeom prst="rect">
-            <a:avLst/>
-          </a:prstGeom>
-          <a:noFill/>
-          <a:ln/>
-        </p:spPr>
-        <p:txBody>
-          <a:bodyPr wrap="square" lIns="0" tIns="0" rIns="0" bIns="0" rtlCol="0" anchor="ctr"/>
-          <a:lstStyle/>
-          <a:p>
-            <a:pPr indent="0" marL="0">
-              <a:lnSpc>
-                <a:spcPct val="100000"/>
-              </a:lnSpc>
-              <a:buNone/>
-            </a:pPr>
-            <a:r>
-              <a:rPr lang="en-US" sz="1450" b="1" dirty="0">
-                <a:solidFill>
-                  <a:srgbClr val="1E293B"/>
-                </a:solidFill>
-                <a:latin typeface="Calibri" pitchFamily="34" charset="0"/>
-                <a:ea typeface="Calibri" pitchFamily="34" charset="-122"/>
-                <a:cs typeface="Calibri" pitchFamily="34" charset="-120"/>
-              </a:rPr>
-              <a:t>Preview it with you</a:t>
-            </a:r>
-            <a:endParaRPr lang="en-US" sz="1450" dirty="0"/>
-          </a:p>
-        </p:txBody>
-      </p:sp>
-      <p:sp>
-        <p:nvSpPr>
-          <p:cNvPr id="23" name="Text 21"/>
-          <p:cNvSpPr/>
-          <p:nvPr/>
-        </p:nvSpPr>
-        <p:spPr>
-          <a:xfrm>
-            <a:off x="5577840" y="5312664"/>
-            <a:ext cx="5669280" cy="594360"/>
-          </a:xfrm>
-          <a:prstGeom prst="rect">
-            <a:avLst/>
-          </a:prstGeom>
-          <a:noFill/>
-          <a:ln/>
-        </p:spPr>
-        <p:txBody>
-          <a:bodyPr wrap="square" lIns="0" tIns="0" rIns="0" bIns="0" rtlCol="0" anchor="ctr"/>
-          <a:lstStyle/>
-          <a:p>
-            <a:pPr indent="0" marL="0">
-              <a:lnSpc>
-                <a:spcPct val="102000"/>
-              </a:lnSpc>
-              <a:buNone/>
-            </a:pPr>
-            <a:r>
-              <a:rPr lang="en-US" sz="1250" dirty="0">
-                <a:solidFill>
-                  <a:srgbClr val="64748B"/>
-                </a:solidFill>
-                <a:latin typeface="Calibri" pitchFamily="34" charset="0"/>
-                <a:ea typeface="Calibri" pitchFamily="34" charset="-122"/>
-                <a:cs typeface="Calibri" pitchFamily="34" charset="-120"/>
-              </a:rPr>
-              <a:t>Before the 21st, so it's on par with what your group expects.</a:t>
-            </a:r>
-            <a:endParaRPr lang="en-US" sz="1250" dirty="0"/>
-          </a:p>
-        </p:txBody>
-      </p:sp>
-      <p:sp>
-        <p:nvSpPr>
-          <p:cNvPr id="24" name="Shape 22"/>
-          <p:cNvSpPr/>
-          <p:nvPr/>
-        </p:nvSpPr>
-        <p:spPr>
-          <a:xfrm>
-            <a:off x="640080" y="6263640"/>
-            <a:ext cx="10881360" cy="685800"/>
-          </a:xfrm>
-          <a:prstGeom prst="roundRect">
-            <a:avLst>
-              <a:gd name="adj" fmla="val 12000"/>
+              <a:gd name="adj" fmla="val 10588"/>
             </a:avLst>
           </a:prstGeom>
           <a:solidFill>
@@ -8079,30 +9286,30 @@
       </p:sp>
       <p:sp>
         <p:nvSpPr>
-          <p:cNvPr id="25" name="Text 23"/>
-          <p:cNvSpPr/>
-          <p:nvPr/>
-        </p:nvSpPr>
-        <p:spPr>
-          <a:xfrm>
-            <a:off x="960120" y="6382512"/>
-            <a:ext cx="10241280" cy="457200"/>
-          </a:xfrm>
-          <a:prstGeom prst="rect">
-            <a:avLst/>
-          </a:prstGeom>
-          <a:noFill/>
-          <a:ln/>
-        </p:spPr>
-        <p:txBody>
-          <a:bodyPr wrap="square" lIns="0" tIns="0" rIns="0" bIns="0" rtlCol="0" anchor="ctr"/>
-          <a:lstStyle/>
-          <a:p>
-            <a:pPr indent="0" marL="0">
-              <a:buNone/>
-            </a:pPr>
-            <a:r>
-              <a:rPr lang="en-US" sz="1350" b="1" dirty="0">
+          <p:cNvPr id="21" name="Text 19"/>
+          <p:cNvSpPr/>
+          <p:nvPr/>
+        </p:nvSpPr>
+        <p:spPr>
+          <a:xfrm>
+            <a:off x="960120" y="5852160"/>
+            <a:ext cx="10241280" cy="502920"/>
+          </a:xfrm>
+          <a:prstGeom prst="rect">
+            <a:avLst/>
+          </a:prstGeom>
+          <a:noFill/>
+          <a:ln/>
+        </p:spPr>
+        <p:txBody>
+          <a:bodyPr wrap="square" lIns="0" tIns="0" rIns="0" bIns="0" rtlCol="0" anchor="ctr"/>
+          <a:lstStyle/>
+          <a:p>
+            <a:pPr indent="0" marL="0">
+              <a:buNone/>
+            </a:pPr>
+            <a:r>
+              <a:rPr lang="en-US" sz="1300" b="1" dirty="0">
                 <a:solidFill>
                   <a:srgbClr val="6D28D9"/>
                 </a:solidFill>
@@ -8110,9 +9317,23 @@
                 <a:ea typeface="Calibri" pitchFamily="34" charset="-122"/>
                 <a:cs typeface="Calibri" pitchFamily="34" charset="-120"/>
               </a:rPr>
-              <a:t>Question for you: with the up group capped at two, is the scaling analysis the right thing to build the paper on?</a:t>
-            </a:r>
-            <a:endParaRPr lang="en-US" sz="1350" dirty="0"/>
+              <a:t>Two blanks I left for you:  </a:t>
+            </a:r>
+            <a:pPr indent="0" marL="0">
+              <a:buNone/>
+            </a:pPr>
+            <a:r>
+              <a:rPr lang="en-US" sz="1300" dirty="0">
+                <a:solidFill>
+                  <a:srgbClr val="1E293B"/>
+                </a:solidFill>
+                <a:latin typeface="Calibri" pitchFamily="34" charset="0"/>
+                <a:ea typeface="Calibri" pitchFamily="34" charset="-122"/>
+                <a:cs typeface="Calibri" pitchFamily="34" charset="-120"/>
+              </a:rPr>
+              <a:t>Theresa's surname, and what Tarun and I should be listed as. I didn't want to guess on the write-up.</a:t>
+            </a:r>
+            <a:endParaRPr lang="en-US" sz="1300" dirty="0"/>
           </a:p>
         </p:txBody>
       </p:sp>
